--- a/assets/libreoffice_impr_njc/bde97a2f-56de-4c6c-acd6-3aec3d25caff/The Birthday Paradox.pptx
+++ b/assets/libreoffice_impr_njc/bde97a2f-56de-4c6c-acd6-3aec3d25caff/The Birthday Paradox.pptx
@@ -26,7 +26,7 @@
     <p:sldId id="271" r:id="rId19"/>
     <p:sldId id="272" r:id="rId20"/>
   </p:sldIdLst>
-  <p:sldSz cx="12192000" cy="6858000"/>
+  <p:sldSz cx="12193588" cy="6858000"/>
   <p:notesSz cx="6858000" cy="12192000"/>
 </p:presentation>
 </file>
@@ -81,18 +81,12 @@
             </a:pPr>
             <a:r>
               <a:rPr b="0" lang="en-HK" sz="4400" spc="-1" strike="noStrike">
-                <a:solidFill>
-                  <a:srgbClr val="000000"/>
-                </a:solidFill>
-                <a:latin typeface="Calibri Light"/>
+                <a:latin typeface="Arial"/>
               </a:rPr>
               <a:t>Click to move the slide</a:t>
             </a:r>
             <a:endParaRPr b="0" lang="en-HK" sz="4400" spc="-1" strike="noStrike">
-              <a:solidFill>
-                <a:srgbClr val="000000"/>
-              </a:solidFill>
-              <a:latin typeface="Calibri Light"/>
+              <a:latin typeface="Arial"/>
             </a:endParaRPr>
           </a:p>
         </p:txBody>
@@ -314,7 +308,7 @@
             <a:pPr algn="r">
               <a:buNone/>
             </a:pPr>
-            <a:fld id="{F3D6A725-CC6F-4845-9B33-AF69F147C330}" type="slidenum">
+            <a:fld id="{264ACDED-1FE3-466C-BE2A-21B7A8986AAF}" type="slidenum">
               <a:rPr b="0" lang="en-HK" sz="1400" spc="-1" strike="noStrike">
                 <a:latin typeface="Times New Roman"/>
               </a:rPr>
@@ -362,7 +356,7 @@
         <p:spPr>
           <a:xfrm>
             <a:off x="685800" y="1143000"/>
-            <a:ext cx="5486040" cy="3085920"/>
+            <a:ext cx="5485680" cy="3085560"/>
           </a:xfrm>
           <a:prstGeom prst="rect">
             <a:avLst/>
@@ -385,18 +379,18 @@
         <p:spPr>
           <a:xfrm>
             <a:off x="685800" y="4400640"/>
-            <a:ext cx="5486040" cy="3600000"/>
-          </a:xfrm>
-          <a:prstGeom prst="rect">
-            <a:avLst/>
-          </a:prstGeom>
-          <a:noFill/>
-          <a:ln w="0">
-            <a:noFill/>
-          </a:ln>
-        </p:spPr>
-        <p:txBody>
-          <a:bodyPr anchor="t">
+            <a:ext cx="5485680" cy="3599640"/>
+          </a:xfrm>
+          <a:prstGeom prst="rect">
+            <a:avLst/>
+          </a:prstGeom>
+          <a:noFill/>
+          <a:ln w="0">
+            <a:noFill/>
+          </a:ln>
+        </p:spPr>
+        <p:txBody>
+          <a:bodyPr lIns="0" rIns="0" tIns="0" bIns="0" anchor="t">
             <a:noAutofit/>
           </a:bodyPr>
           <a:p>
@@ -419,18 +413,18 @@
         <p:spPr>
           <a:xfrm>
             <a:off x="3884760" y="8685360"/>
-            <a:ext cx="2971440" cy="458280"/>
-          </a:xfrm>
-          <a:prstGeom prst="rect">
-            <a:avLst/>
-          </a:prstGeom>
-          <a:noFill/>
-          <a:ln w="0">
-            <a:noFill/>
-          </a:ln>
-        </p:spPr>
-        <p:txBody>
-          <a:bodyPr anchor="b">
+            <a:ext cx="2971080" cy="457920"/>
+          </a:xfrm>
+          <a:prstGeom prst="rect">
+            <a:avLst/>
+          </a:prstGeom>
+          <a:noFill/>
+          <a:ln w="0">
+            <a:noFill/>
+          </a:ln>
+        </p:spPr>
+        <p:txBody>
+          <a:bodyPr lIns="0" rIns="0" tIns="0" bIns="0" anchor="b">
             <a:noAutofit/>
           </a:bodyPr>
           <a:lstStyle>
@@ -451,7 +445,7 @@
               </a:lnSpc>
               <a:buNone/>
             </a:pPr>
-            <a:fld id="{91B2E4D0-BE88-4F6B-B43C-5EB599A0ED74}" type="slidenum">
+            <a:fld id="{19FCC7AA-E511-43EC-B8B9-AEB87CA7753C}" type="slidenum">
               <a:rPr b="0" lang="en-US" sz="1200" spc="-1" strike="noStrike">
                 <a:latin typeface="Times New Roman"/>
               </a:rPr>
@@ -498,7 +492,7 @@
         <p:spPr>
           <a:xfrm>
             <a:off x="685800" y="1143000"/>
-            <a:ext cx="5486040" cy="3085920"/>
+            <a:ext cx="5485680" cy="3085560"/>
           </a:xfrm>
           <a:prstGeom prst="rect">
             <a:avLst/>
@@ -521,18 +515,18 @@
         <p:spPr>
           <a:xfrm>
             <a:off x="685800" y="4400640"/>
-            <a:ext cx="5486040" cy="3600000"/>
-          </a:xfrm>
-          <a:prstGeom prst="rect">
-            <a:avLst/>
-          </a:prstGeom>
-          <a:noFill/>
-          <a:ln w="0">
-            <a:noFill/>
-          </a:ln>
-        </p:spPr>
-        <p:txBody>
-          <a:bodyPr anchor="t">
+            <a:ext cx="5485680" cy="3599640"/>
+          </a:xfrm>
+          <a:prstGeom prst="rect">
+            <a:avLst/>
+          </a:prstGeom>
+          <a:noFill/>
+          <a:ln w="0">
+            <a:noFill/>
+          </a:ln>
+        </p:spPr>
+        <p:txBody>
+          <a:bodyPr lIns="0" rIns="0" tIns="0" bIns="0" anchor="t">
             <a:noAutofit/>
           </a:bodyPr>
           <a:p>
@@ -555,18 +549,18 @@
         <p:spPr>
           <a:xfrm>
             <a:off x="3884760" y="8685360"/>
-            <a:ext cx="2971440" cy="458280"/>
-          </a:xfrm>
-          <a:prstGeom prst="rect">
-            <a:avLst/>
-          </a:prstGeom>
-          <a:noFill/>
-          <a:ln w="0">
-            <a:noFill/>
-          </a:ln>
-        </p:spPr>
-        <p:txBody>
-          <a:bodyPr anchor="b">
+            <a:ext cx="2971080" cy="457920"/>
+          </a:xfrm>
+          <a:prstGeom prst="rect">
+            <a:avLst/>
+          </a:prstGeom>
+          <a:noFill/>
+          <a:ln w="0">
+            <a:noFill/>
+          </a:ln>
+        </p:spPr>
+        <p:txBody>
+          <a:bodyPr lIns="0" rIns="0" tIns="0" bIns="0" anchor="b">
             <a:noAutofit/>
           </a:bodyPr>
           <a:lstStyle>
@@ -587,7 +581,7 @@
               </a:lnSpc>
               <a:buNone/>
             </a:pPr>
-            <a:fld id="{3341142A-C1A8-4733-BDD0-66CC757DA983}" type="slidenum">
+            <a:fld id="{39C825CA-1B5D-4F8E-990D-A17084BB73AE}" type="slidenum">
               <a:rPr b="0" lang="en-US" sz="1200" spc="-1" strike="noStrike">
                 <a:latin typeface="Times New Roman"/>
               </a:rPr>
@@ -634,7 +628,7 @@
         <p:spPr>
           <a:xfrm>
             <a:off x="685800" y="1143000"/>
-            <a:ext cx="5486040" cy="3085920"/>
+            <a:ext cx="5485680" cy="3085560"/>
           </a:xfrm>
           <a:prstGeom prst="rect">
             <a:avLst/>
@@ -657,18 +651,18 @@
         <p:spPr>
           <a:xfrm>
             <a:off x="685800" y="4400640"/>
-            <a:ext cx="5486040" cy="3600000"/>
-          </a:xfrm>
-          <a:prstGeom prst="rect">
-            <a:avLst/>
-          </a:prstGeom>
-          <a:noFill/>
-          <a:ln w="0">
-            <a:noFill/>
-          </a:ln>
-        </p:spPr>
-        <p:txBody>
-          <a:bodyPr anchor="t">
+            <a:ext cx="5485680" cy="3599640"/>
+          </a:xfrm>
+          <a:prstGeom prst="rect">
+            <a:avLst/>
+          </a:prstGeom>
+          <a:noFill/>
+          <a:ln w="0">
+            <a:noFill/>
+          </a:ln>
+        </p:spPr>
+        <p:txBody>
+          <a:bodyPr lIns="0" rIns="0" tIns="0" bIns="0" anchor="t">
             <a:noAutofit/>
           </a:bodyPr>
           <a:p>
@@ -691,18 +685,18 @@
         <p:spPr>
           <a:xfrm>
             <a:off x="3884760" y="8685360"/>
-            <a:ext cx="2971440" cy="458280"/>
-          </a:xfrm>
-          <a:prstGeom prst="rect">
-            <a:avLst/>
-          </a:prstGeom>
-          <a:noFill/>
-          <a:ln w="0">
-            <a:noFill/>
-          </a:ln>
-        </p:spPr>
-        <p:txBody>
-          <a:bodyPr anchor="b">
+            <a:ext cx="2971080" cy="457920"/>
+          </a:xfrm>
+          <a:prstGeom prst="rect">
+            <a:avLst/>
+          </a:prstGeom>
+          <a:noFill/>
+          <a:ln w="0">
+            <a:noFill/>
+          </a:ln>
+        </p:spPr>
+        <p:txBody>
+          <a:bodyPr lIns="0" rIns="0" tIns="0" bIns="0" anchor="b">
             <a:noAutofit/>
           </a:bodyPr>
           <a:lstStyle>
@@ -723,7 +717,7 @@
               </a:lnSpc>
               <a:buNone/>
             </a:pPr>
-            <a:fld id="{D426E78D-E2A1-4847-B09E-7C5F7372163E}" type="slidenum">
+            <a:fld id="{35862B41-1193-48F1-9A08-19E495586ED4}" type="slidenum">
               <a:rPr b="0" lang="en-US" sz="1200" spc="-1" strike="noStrike">
                 <a:latin typeface="Times New Roman"/>
               </a:rPr>
@@ -770,7 +764,7 @@
         <p:spPr>
           <a:xfrm>
             <a:off x="685800" y="1143000"/>
-            <a:ext cx="5486040" cy="3085920"/>
+            <a:ext cx="5485680" cy="3085560"/>
           </a:xfrm>
           <a:prstGeom prst="rect">
             <a:avLst/>
@@ -793,18 +787,18 @@
         <p:spPr>
           <a:xfrm>
             <a:off x="685800" y="4400640"/>
-            <a:ext cx="5486040" cy="3600000"/>
-          </a:xfrm>
-          <a:prstGeom prst="rect">
-            <a:avLst/>
-          </a:prstGeom>
-          <a:noFill/>
-          <a:ln w="0">
-            <a:noFill/>
-          </a:ln>
-        </p:spPr>
-        <p:txBody>
-          <a:bodyPr anchor="t">
+            <a:ext cx="5485680" cy="3599640"/>
+          </a:xfrm>
+          <a:prstGeom prst="rect">
+            <a:avLst/>
+          </a:prstGeom>
+          <a:noFill/>
+          <a:ln w="0">
+            <a:noFill/>
+          </a:ln>
+        </p:spPr>
+        <p:txBody>
+          <a:bodyPr lIns="0" rIns="0" tIns="0" bIns="0" anchor="t">
             <a:noAutofit/>
           </a:bodyPr>
           <a:p>
@@ -827,18 +821,18 @@
         <p:spPr>
           <a:xfrm>
             <a:off x="3884760" y="8685360"/>
-            <a:ext cx="2971440" cy="458280"/>
-          </a:xfrm>
-          <a:prstGeom prst="rect">
-            <a:avLst/>
-          </a:prstGeom>
-          <a:noFill/>
-          <a:ln w="0">
-            <a:noFill/>
-          </a:ln>
-        </p:spPr>
-        <p:txBody>
-          <a:bodyPr anchor="b">
+            <a:ext cx="2971080" cy="457920"/>
+          </a:xfrm>
+          <a:prstGeom prst="rect">
+            <a:avLst/>
+          </a:prstGeom>
+          <a:noFill/>
+          <a:ln w="0">
+            <a:noFill/>
+          </a:ln>
+        </p:spPr>
+        <p:txBody>
+          <a:bodyPr lIns="0" rIns="0" tIns="0" bIns="0" anchor="b">
             <a:noAutofit/>
           </a:bodyPr>
           <a:lstStyle>
@@ -859,7 +853,7 @@
               </a:lnSpc>
               <a:buNone/>
             </a:pPr>
-            <a:fld id="{338584ED-EE7C-496A-9A58-BB2BA09B7E29}" type="slidenum">
+            <a:fld id="{05946839-8F79-4A54-9D20-8987FC810CC7}" type="slidenum">
               <a:rPr b="0" lang="en-US" sz="1200" spc="-1" strike="noStrike">
                 <a:latin typeface="Times New Roman"/>
               </a:rPr>
@@ -906,7 +900,7 @@
         <p:spPr>
           <a:xfrm>
             <a:off x="685800" y="1143000"/>
-            <a:ext cx="5486040" cy="3085920"/>
+            <a:ext cx="5485680" cy="3085560"/>
           </a:xfrm>
           <a:prstGeom prst="rect">
             <a:avLst/>
@@ -929,18 +923,18 @@
         <p:spPr>
           <a:xfrm>
             <a:off x="685800" y="4400640"/>
-            <a:ext cx="5486040" cy="3600000"/>
-          </a:xfrm>
-          <a:prstGeom prst="rect">
-            <a:avLst/>
-          </a:prstGeom>
-          <a:noFill/>
-          <a:ln w="0">
-            <a:noFill/>
-          </a:ln>
-        </p:spPr>
-        <p:txBody>
-          <a:bodyPr anchor="t">
+            <a:ext cx="5485680" cy="3599640"/>
+          </a:xfrm>
+          <a:prstGeom prst="rect">
+            <a:avLst/>
+          </a:prstGeom>
+          <a:noFill/>
+          <a:ln w="0">
+            <a:noFill/>
+          </a:ln>
+        </p:spPr>
+        <p:txBody>
+          <a:bodyPr lIns="0" rIns="0" tIns="0" bIns="0" anchor="t">
             <a:noAutofit/>
           </a:bodyPr>
           <a:p>
@@ -963,18 +957,18 @@
         <p:spPr>
           <a:xfrm>
             <a:off x="3884760" y="8685360"/>
-            <a:ext cx="2971440" cy="458280"/>
-          </a:xfrm>
-          <a:prstGeom prst="rect">
-            <a:avLst/>
-          </a:prstGeom>
-          <a:noFill/>
-          <a:ln w="0">
-            <a:noFill/>
-          </a:ln>
-        </p:spPr>
-        <p:txBody>
-          <a:bodyPr anchor="b">
+            <a:ext cx="2971080" cy="457920"/>
+          </a:xfrm>
+          <a:prstGeom prst="rect">
+            <a:avLst/>
+          </a:prstGeom>
+          <a:noFill/>
+          <a:ln w="0">
+            <a:noFill/>
+          </a:ln>
+        </p:spPr>
+        <p:txBody>
+          <a:bodyPr lIns="0" rIns="0" tIns="0" bIns="0" anchor="b">
             <a:noAutofit/>
           </a:bodyPr>
           <a:lstStyle>
@@ -995,7 +989,7 @@
               </a:lnSpc>
               <a:buNone/>
             </a:pPr>
-            <a:fld id="{F46ECAFB-99B5-4929-83B9-72E92DBBE0F2}" type="slidenum">
+            <a:fld id="{03A70282-BF47-4ADF-8318-7ACD55A6E084}" type="slidenum">
               <a:rPr b="0" lang="en-US" sz="1200" spc="-1" strike="noStrike">
                 <a:latin typeface="Times New Roman"/>
               </a:rPr>
@@ -1042,7 +1036,7 @@
         <p:spPr>
           <a:xfrm>
             <a:off x="685800" y="1143000"/>
-            <a:ext cx="5486040" cy="3085920"/>
+            <a:ext cx="5485680" cy="3085560"/>
           </a:xfrm>
           <a:prstGeom prst="rect">
             <a:avLst/>
@@ -1065,18 +1059,18 @@
         <p:spPr>
           <a:xfrm>
             <a:off x="685800" y="4400640"/>
-            <a:ext cx="5486040" cy="3600000"/>
-          </a:xfrm>
-          <a:prstGeom prst="rect">
-            <a:avLst/>
-          </a:prstGeom>
-          <a:noFill/>
-          <a:ln w="0">
-            <a:noFill/>
-          </a:ln>
-        </p:spPr>
-        <p:txBody>
-          <a:bodyPr anchor="t">
+            <a:ext cx="5485680" cy="3599640"/>
+          </a:xfrm>
+          <a:prstGeom prst="rect">
+            <a:avLst/>
+          </a:prstGeom>
+          <a:noFill/>
+          <a:ln w="0">
+            <a:noFill/>
+          </a:ln>
+        </p:spPr>
+        <p:txBody>
+          <a:bodyPr lIns="0" rIns="0" tIns="0" bIns="0" anchor="t">
             <a:noAutofit/>
           </a:bodyPr>
           <a:p>
@@ -1099,18 +1093,18 @@
         <p:spPr>
           <a:xfrm>
             <a:off x="3884760" y="8685360"/>
-            <a:ext cx="2971440" cy="458280"/>
-          </a:xfrm>
-          <a:prstGeom prst="rect">
-            <a:avLst/>
-          </a:prstGeom>
-          <a:noFill/>
-          <a:ln w="0">
-            <a:noFill/>
-          </a:ln>
-        </p:spPr>
-        <p:txBody>
-          <a:bodyPr anchor="b">
+            <a:ext cx="2971080" cy="457920"/>
+          </a:xfrm>
+          <a:prstGeom prst="rect">
+            <a:avLst/>
+          </a:prstGeom>
+          <a:noFill/>
+          <a:ln w="0">
+            <a:noFill/>
+          </a:ln>
+        </p:spPr>
+        <p:txBody>
+          <a:bodyPr lIns="0" rIns="0" tIns="0" bIns="0" anchor="b">
             <a:noAutofit/>
           </a:bodyPr>
           <a:lstStyle>
@@ -1131,7 +1125,7 @@
               </a:lnSpc>
               <a:buNone/>
             </a:pPr>
-            <a:fld id="{E3050C30-770B-4095-A554-E81B8929E88B}" type="slidenum">
+            <a:fld id="{B8D2331E-0A3F-471B-AD54-6D80CCD4BF57}" type="slidenum">
               <a:rPr b="0" lang="en-US" sz="1200" spc="-1" strike="noStrike">
                 <a:latin typeface="Times New Roman"/>
               </a:rPr>
@@ -1178,7 +1172,7 @@
         <p:spPr>
           <a:xfrm>
             <a:off x="685800" y="1143000"/>
-            <a:ext cx="5486040" cy="3085920"/>
+            <a:ext cx="5485680" cy="3085560"/>
           </a:xfrm>
           <a:prstGeom prst="rect">
             <a:avLst/>
@@ -1201,18 +1195,18 @@
         <p:spPr>
           <a:xfrm>
             <a:off x="685800" y="4400640"/>
-            <a:ext cx="5486040" cy="3600000"/>
-          </a:xfrm>
-          <a:prstGeom prst="rect">
-            <a:avLst/>
-          </a:prstGeom>
-          <a:noFill/>
-          <a:ln w="0">
-            <a:noFill/>
-          </a:ln>
-        </p:spPr>
-        <p:txBody>
-          <a:bodyPr anchor="t">
+            <a:ext cx="5485680" cy="3599640"/>
+          </a:xfrm>
+          <a:prstGeom prst="rect">
+            <a:avLst/>
+          </a:prstGeom>
+          <a:noFill/>
+          <a:ln w="0">
+            <a:noFill/>
+          </a:ln>
+        </p:spPr>
+        <p:txBody>
+          <a:bodyPr lIns="0" rIns="0" tIns="0" bIns="0" anchor="t">
             <a:noAutofit/>
           </a:bodyPr>
           <a:p>
@@ -1235,18 +1229,18 @@
         <p:spPr>
           <a:xfrm>
             <a:off x="3884760" y="8685360"/>
-            <a:ext cx="2971440" cy="458280"/>
-          </a:xfrm>
-          <a:prstGeom prst="rect">
-            <a:avLst/>
-          </a:prstGeom>
-          <a:noFill/>
-          <a:ln w="0">
-            <a:noFill/>
-          </a:ln>
-        </p:spPr>
-        <p:txBody>
-          <a:bodyPr anchor="b">
+            <a:ext cx="2971080" cy="457920"/>
+          </a:xfrm>
+          <a:prstGeom prst="rect">
+            <a:avLst/>
+          </a:prstGeom>
+          <a:noFill/>
+          <a:ln w="0">
+            <a:noFill/>
+          </a:ln>
+        </p:spPr>
+        <p:txBody>
+          <a:bodyPr lIns="0" rIns="0" tIns="0" bIns="0" anchor="b">
             <a:noAutofit/>
           </a:bodyPr>
           <a:lstStyle>
@@ -1267,7 +1261,7 @@
               </a:lnSpc>
               <a:buNone/>
             </a:pPr>
-            <a:fld id="{5E3F8307-0B29-4F55-863A-216C61CE562E}" type="slidenum">
+            <a:fld id="{44A0A2DF-1E2F-4FDD-8513-AB26B48497C2}" type="slidenum">
               <a:rPr b="0" lang="en-US" sz="1200" spc="-1" strike="noStrike">
                 <a:latin typeface="Times New Roman"/>
               </a:rPr>
@@ -1314,7 +1308,7 @@
         <p:spPr>
           <a:xfrm>
             <a:off x="685800" y="1143000"/>
-            <a:ext cx="5486040" cy="3085920"/>
+            <a:ext cx="5485680" cy="3085560"/>
           </a:xfrm>
           <a:prstGeom prst="rect">
             <a:avLst/>
@@ -1337,18 +1331,18 @@
         <p:spPr>
           <a:xfrm>
             <a:off x="685800" y="4400640"/>
-            <a:ext cx="5486040" cy="3600000"/>
-          </a:xfrm>
-          <a:prstGeom prst="rect">
-            <a:avLst/>
-          </a:prstGeom>
-          <a:noFill/>
-          <a:ln w="0">
-            <a:noFill/>
-          </a:ln>
-        </p:spPr>
-        <p:txBody>
-          <a:bodyPr anchor="t">
+            <a:ext cx="5485680" cy="3599640"/>
+          </a:xfrm>
+          <a:prstGeom prst="rect">
+            <a:avLst/>
+          </a:prstGeom>
+          <a:noFill/>
+          <a:ln w="0">
+            <a:noFill/>
+          </a:ln>
+        </p:spPr>
+        <p:txBody>
+          <a:bodyPr lIns="0" rIns="0" tIns="0" bIns="0" anchor="t">
             <a:noAutofit/>
           </a:bodyPr>
           <a:p>
@@ -1371,18 +1365,18 @@
         <p:spPr>
           <a:xfrm>
             <a:off x="3884760" y="8685360"/>
-            <a:ext cx="2971440" cy="458280"/>
-          </a:xfrm>
-          <a:prstGeom prst="rect">
-            <a:avLst/>
-          </a:prstGeom>
-          <a:noFill/>
-          <a:ln w="0">
-            <a:noFill/>
-          </a:ln>
-        </p:spPr>
-        <p:txBody>
-          <a:bodyPr anchor="b">
+            <a:ext cx="2971080" cy="457920"/>
+          </a:xfrm>
+          <a:prstGeom prst="rect">
+            <a:avLst/>
+          </a:prstGeom>
+          <a:noFill/>
+          <a:ln w="0">
+            <a:noFill/>
+          </a:ln>
+        </p:spPr>
+        <p:txBody>
+          <a:bodyPr lIns="0" rIns="0" tIns="0" bIns="0" anchor="b">
             <a:noAutofit/>
           </a:bodyPr>
           <a:lstStyle>
@@ -1403,7 +1397,7 @@
               </a:lnSpc>
               <a:buNone/>
             </a:pPr>
-            <a:fld id="{C6B62743-C5FE-44E7-AB4D-84D70C9146E5}" type="slidenum">
+            <a:fld id="{6549172F-6574-4DE0-A338-34834B14FD37}" type="slidenum">
               <a:rPr b="0" lang="en-US" sz="1200" spc="-1" strike="noStrike">
                 <a:latin typeface="Times New Roman"/>
               </a:rPr>
@@ -1450,7 +1444,7 @@
         <p:spPr>
           <a:xfrm>
             <a:off x="685800" y="1143000"/>
-            <a:ext cx="5486040" cy="3085920"/>
+            <a:ext cx="5485680" cy="3085560"/>
           </a:xfrm>
           <a:prstGeom prst="rect">
             <a:avLst/>
@@ -1473,18 +1467,18 @@
         <p:spPr>
           <a:xfrm>
             <a:off x="685800" y="4400640"/>
-            <a:ext cx="5486040" cy="3600000"/>
-          </a:xfrm>
-          <a:prstGeom prst="rect">
-            <a:avLst/>
-          </a:prstGeom>
-          <a:noFill/>
-          <a:ln w="0">
-            <a:noFill/>
-          </a:ln>
-        </p:spPr>
-        <p:txBody>
-          <a:bodyPr anchor="t">
+            <a:ext cx="5485680" cy="3599640"/>
+          </a:xfrm>
+          <a:prstGeom prst="rect">
+            <a:avLst/>
+          </a:prstGeom>
+          <a:noFill/>
+          <a:ln w="0">
+            <a:noFill/>
+          </a:ln>
+        </p:spPr>
+        <p:txBody>
+          <a:bodyPr lIns="0" rIns="0" tIns="0" bIns="0" anchor="t">
             <a:noAutofit/>
           </a:bodyPr>
           <a:p>
@@ -1507,18 +1501,18 @@
         <p:spPr>
           <a:xfrm>
             <a:off x="3884760" y="8685360"/>
-            <a:ext cx="2971440" cy="458280"/>
-          </a:xfrm>
-          <a:prstGeom prst="rect">
-            <a:avLst/>
-          </a:prstGeom>
-          <a:noFill/>
-          <a:ln w="0">
-            <a:noFill/>
-          </a:ln>
-        </p:spPr>
-        <p:txBody>
-          <a:bodyPr anchor="b">
+            <a:ext cx="2971080" cy="457920"/>
+          </a:xfrm>
+          <a:prstGeom prst="rect">
+            <a:avLst/>
+          </a:prstGeom>
+          <a:noFill/>
+          <a:ln w="0">
+            <a:noFill/>
+          </a:ln>
+        </p:spPr>
+        <p:txBody>
+          <a:bodyPr lIns="0" rIns="0" tIns="0" bIns="0" anchor="b">
             <a:noAutofit/>
           </a:bodyPr>
           <a:lstStyle>
@@ -1539,7 +1533,7 @@
               </a:lnSpc>
               <a:buNone/>
             </a:pPr>
-            <a:fld id="{80A7F455-5ECF-4693-924E-6B71BC6AF497}" type="slidenum">
+            <a:fld id="{7B9A0B10-74C7-4BD7-AD87-C5A97968AAC4}" type="slidenum">
               <a:rPr b="0" lang="en-US" sz="1200" spc="-1" strike="noStrike">
                 <a:latin typeface="Times New Roman"/>
               </a:rPr>
@@ -1586,7 +1580,7 @@
         <p:spPr>
           <a:xfrm>
             <a:off x="685800" y="1143000"/>
-            <a:ext cx="5486040" cy="3085920"/>
+            <a:ext cx="5485680" cy="3085560"/>
           </a:xfrm>
           <a:prstGeom prst="rect">
             <a:avLst/>
@@ -1609,18 +1603,18 @@
         <p:spPr>
           <a:xfrm>
             <a:off x="685800" y="4400640"/>
-            <a:ext cx="5486040" cy="3600000"/>
-          </a:xfrm>
-          <a:prstGeom prst="rect">
-            <a:avLst/>
-          </a:prstGeom>
-          <a:noFill/>
-          <a:ln w="0">
-            <a:noFill/>
-          </a:ln>
-        </p:spPr>
-        <p:txBody>
-          <a:bodyPr anchor="t">
+            <a:ext cx="5485680" cy="3599640"/>
+          </a:xfrm>
+          <a:prstGeom prst="rect">
+            <a:avLst/>
+          </a:prstGeom>
+          <a:noFill/>
+          <a:ln w="0">
+            <a:noFill/>
+          </a:ln>
+        </p:spPr>
+        <p:txBody>
+          <a:bodyPr lIns="0" rIns="0" tIns="0" bIns="0" anchor="t">
             <a:noAutofit/>
           </a:bodyPr>
           <a:p>
@@ -1643,18 +1637,18 @@
         <p:spPr>
           <a:xfrm>
             <a:off x="3884760" y="8685360"/>
-            <a:ext cx="2971440" cy="458280"/>
-          </a:xfrm>
-          <a:prstGeom prst="rect">
-            <a:avLst/>
-          </a:prstGeom>
-          <a:noFill/>
-          <a:ln w="0">
-            <a:noFill/>
-          </a:ln>
-        </p:spPr>
-        <p:txBody>
-          <a:bodyPr anchor="b">
+            <a:ext cx="2971080" cy="457920"/>
+          </a:xfrm>
+          <a:prstGeom prst="rect">
+            <a:avLst/>
+          </a:prstGeom>
+          <a:noFill/>
+          <a:ln w="0">
+            <a:noFill/>
+          </a:ln>
+        </p:spPr>
+        <p:txBody>
+          <a:bodyPr lIns="0" rIns="0" tIns="0" bIns="0" anchor="b">
             <a:noAutofit/>
           </a:bodyPr>
           <a:lstStyle>
@@ -1675,7 +1669,7 @@
               </a:lnSpc>
               <a:buNone/>
             </a:pPr>
-            <a:fld id="{3B56FBF1-8948-4B65-8BBF-004B841AE00E}" type="slidenum">
+            <a:fld id="{2F5BD15B-0014-4ED7-8550-4BD2F31E1B98}" type="slidenum">
               <a:rPr b="0" lang="en-US" sz="1200" spc="-1" strike="noStrike">
                 <a:latin typeface="Times New Roman"/>
               </a:rPr>
@@ -1722,7 +1716,7 @@
         <p:spPr>
           <a:xfrm>
             <a:off x="685800" y="1143000"/>
-            <a:ext cx="5486040" cy="3085920"/>
+            <a:ext cx="5485680" cy="3085560"/>
           </a:xfrm>
           <a:prstGeom prst="rect">
             <a:avLst/>
@@ -1745,18 +1739,18 @@
         <p:spPr>
           <a:xfrm>
             <a:off x="685800" y="4400640"/>
-            <a:ext cx="5486040" cy="3600000"/>
-          </a:xfrm>
-          <a:prstGeom prst="rect">
-            <a:avLst/>
-          </a:prstGeom>
-          <a:noFill/>
-          <a:ln w="0">
-            <a:noFill/>
-          </a:ln>
-        </p:spPr>
-        <p:txBody>
-          <a:bodyPr anchor="t">
+            <a:ext cx="5485680" cy="3599640"/>
+          </a:xfrm>
+          <a:prstGeom prst="rect">
+            <a:avLst/>
+          </a:prstGeom>
+          <a:noFill/>
+          <a:ln w="0">
+            <a:noFill/>
+          </a:ln>
+        </p:spPr>
+        <p:txBody>
+          <a:bodyPr lIns="0" rIns="0" tIns="0" bIns="0" anchor="t">
             <a:noAutofit/>
           </a:bodyPr>
           <a:p>
@@ -1779,18 +1773,18 @@
         <p:spPr>
           <a:xfrm>
             <a:off x="3884760" y="8685360"/>
-            <a:ext cx="2971440" cy="458280"/>
-          </a:xfrm>
-          <a:prstGeom prst="rect">
-            <a:avLst/>
-          </a:prstGeom>
-          <a:noFill/>
-          <a:ln w="0">
-            <a:noFill/>
-          </a:ln>
-        </p:spPr>
-        <p:txBody>
-          <a:bodyPr anchor="b">
+            <a:ext cx="2971080" cy="457920"/>
+          </a:xfrm>
+          <a:prstGeom prst="rect">
+            <a:avLst/>
+          </a:prstGeom>
+          <a:noFill/>
+          <a:ln w="0">
+            <a:noFill/>
+          </a:ln>
+        </p:spPr>
+        <p:txBody>
+          <a:bodyPr lIns="0" rIns="0" tIns="0" bIns="0" anchor="b">
             <a:noAutofit/>
           </a:bodyPr>
           <a:lstStyle>
@@ -1811,7 +1805,7 @@
               </a:lnSpc>
               <a:buNone/>
             </a:pPr>
-            <a:fld id="{63265BF1-6044-49FB-9A01-AA9701DA9207}" type="slidenum">
+            <a:fld id="{8A22B080-BC38-47E5-98A6-D89E8C7836F6}" type="slidenum">
               <a:rPr b="0" lang="en-US" sz="1200" spc="-1" strike="noStrike">
                 <a:latin typeface="Times New Roman"/>
               </a:rPr>
@@ -1858,7 +1852,7 @@
         <p:spPr>
           <a:xfrm>
             <a:off x="685800" y="1143000"/>
-            <a:ext cx="5486040" cy="3085920"/>
+            <a:ext cx="5485680" cy="3085560"/>
           </a:xfrm>
           <a:prstGeom prst="rect">
             <a:avLst/>
@@ -1881,18 +1875,18 @@
         <p:spPr>
           <a:xfrm>
             <a:off x="685800" y="4400640"/>
-            <a:ext cx="5486040" cy="3600000"/>
-          </a:xfrm>
-          <a:prstGeom prst="rect">
-            <a:avLst/>
-          </a:prstGeom>
-          <a:noFill/>
-          <a:ln w="0">
-            <a:noFill/>
-          </a:ln>
-        </p:spPr>
-        <p:txBody>
-          <a:bodyPr anchor="t">
+            <a:ext cx="5485680" cy="3599640"/>
+          </a:xfrm>
+          <a:prstGeom prst="rect">
+            <a:avLst/>
+          </a:prstGeom>
+          <a:noFill/>
+          <a:ln w="0">
+            <a:noFill/>
+          </a:ln>
+        </p:spPr>
+        <p:txBody>
+          <a:bodyPr lIns="0" rIns="0" tIns="0" bIns="0" anchor="t">
             <a:noAutofit/>
           </a:bodyPr>
           <a:p>
@@ -1915,18 +1909,18 @@
         <p:spPr>
           <a:xfrm>
             <a:off x="3884760" y="8685360"/>
-            <a:ext cx="2971440" cy="458280"/>
-          </a:xfrm>
-          <a:prstGeom prst="rect">
-            <a:avLst/>
-          </a:prstGeom>
-          <a:noFill/>
-          <a:ln w="0">
-            <a:noFill/>
-          </a:ln>
-        </p:spPr>
-        <p:txBody>
-          <a:bodyPr anchor="b">
+            <a:ext cx="2971080" cy="457920"/>
+          </a:xfrm>
+          <a:prstGeom prst="rect">
+            <a:avLst/>
+          </a:prstGeom>
+          <a:noFill/>
+          <a:ln w="0">
+            <a:noFill/>
+          </a:ln>
+        </p:spPr>
+        <p:txBody>
+          <a:bodyPr lIns="0" rIns="0" tIns="0" bIns="0" anchor="b">
             <a:noAutofit/>
           </a:bodyPr>
           <a:lstStyle>
@@ -1947,7 +1941,7 @@
               </a:lnSpc>
               <a:buNone/>
             </a:pPr>
-            <a:fld id="{CA76FC5A-5275-46B5-B851-02C1192334F4}" type="slidenum">
+            <a:fld id="{F59EAD94-9E80-428F-92E7-F91F3C6151D5}" type="slidenum">
               <a:rPr b="0" lang="en-US" sz="1200" spc="-1" strike="noStrike">
                 <a:latin typeface="Times New Roman"/>
               </a:rPr>
@@ -1994,7 +1988,7 @@
         <p:spPr>
           <a:xfrm>
             <a:off x="685800" y="1143000"/>
-            <a:ext cx="5486040" cy="3085920"/>
+            <a:ext cx="5485680" cy="3085560"/>
           </a:xfrm>
           <a:prstGeom prst="rect">
             <a:avLst/>
@@ -2017,18 +2011,18 @@
         <p:spPr>
           <a:xfrm>
             <a:off x="685800" y="4400640"/>
-            <a:ext cx="5486040" cy="3600000"/>
-          </a:xfrm>
-          <a:prstGeom prst="rect">
-            <a:avLst/>
-          </a:prstGeom>
-          <a:noFill/>
-          <a:ln w="0">
-            <a:noFill/>
-          </a:ln>
-        </p:spPr>
-        <p:txBody>
-          <a:bodyPr anchor="t">
+            <a:ext cx="5485680" cy="3599640"/>
+          </a:xfrm>
+          <a:prstGeom prst="rect">
+            <a:avLst/>
+          </a:prstGeom>
+          <a:noFill/>
+          <a:ln w="0">
+            <a:noFill/>
+          </a:ln>
+        </p:spPr>
+        <p:txBody>
+          <a:bodyPr lIns="0" rIns="0" tIns="0" bIns="0" anchor="t">
             <a:noAutofit/>
           </a:bodyPr>
           <a:p>
@@ -2051,18 +2045,18 @@
         <p:spPr>
           <a:xfrm>
             <a:off x="3884760" y="8685360"/>
-            <a:ext cx="2971440" cy="458280"/>
-          </a:xfrm>
-          <a:prstGeom prst="rect">
-            <a:avLst/>
-          </a:prstGeom>
-          <a:noFill/>
-          <a:ln w="0">
-            <a:noFill/>
-          </a:ln>
-        </p:spPr>
-        <p:txBody>
-          <a:bodyPr anchor="b">
+            <a:ext cx="2971080" cy="457920"/>
+          </a:xfrm>
+          <a:prstGeom prst="rect">
+            <a:avLst/>
+          </a:prstGeom>
+          <a:noFill/>
+          <a:ln w="0">
+            <a:noFill/>
+          </a:ln>
+        </p:spPr>
+        <p:txBody>
+          <a:bodyPr lIns="0" rIns="0" tIns="0" bIns="0" anchor="b">
             <a:noAutofit/>
           </a:bodyPr>
           <a:lstStyle>
@@ -2083,7 +2077,7 @@
               </a:lnSpc>
               <a:buNone/>
             </a:pPr>
-            <a:fld id="{53E2ACF9-32B9-47CA-B5D6-CC18A332C25A}" type="slidenum">
+            <a:fld id="{0B2A0CE9-F504-4152-9628-F7A7679D843F}" type="slidenum">
               <a:rPr b="0" lang="en-US" sz="1200" spc="-1" strike="noStrike">
                 <a:latin typeface="Times New Roman"/>
               </a:rPr>
@@ -2130,7 +2124,7 @@
         <p:spPr>
           <a:xfrm>
             <a:off x="685800" y="1143000"/>
-            <a:ext cx="5486040" cy="3085920"/>
+            <a:ext cx="5485680" cy="3085560"/>
           </a:xfrm>
           <a:prstGeom prst="rect">
             <a:avLst/>
@@ -2153,22 +2147,46 @@
         <p:spPr>
           <a:xfrm>
             <a:off x="685800" y="4400640"/>
-            <a:ext cx="5486040" cy="3600000"/>
-          </a:xfrm>
-          <a:prstGeom prst="rect">
-            <a:avLst/>
-          </a:prstGeom>
-          <a:noFill/>
-          <a:ln w="0">
-            <a:noFill/>
-          </a:ln>
-        </p:spPr>
-        <p:txBody>
-          <a:bodyPr anchor="t">
-            <a:noAutofit/>
-          </a:bodyPr>
-          <a:p>
-            <a:endParaRPr b="0" lang="en-HK" sz="2000" spc="-1" strike="noStrike">
+            <a:ext cx="5485680" cy="3599640"/>
+          </a:xfrm>
+          <a:prstGeom prst="rect">
+            <a:avLst/>
+          </a:prstGeom>
+          <a:noFill/>
+          <a:ln w="0">
+            <a:noFill/>
+          </a:ln>
+        </p:spPr>
+        <p:txBody>
+          <a:bodyPr lIns="0" rIns="0" tIns="0" bIns="0" anchor="t">
+            <a:noAutofit/>
+          </a:bodyPr>
+          <a:p>
+            <a:pPr marL="216000" indent="-216000">
+              <a:lnSpc>
+                <a:spcPct val="100000"/>
+              </a:lnSpc>
+              <a:buNone/>
+            </a:pPr>
+            <a:r>
+              <a:rPr b="0" lang="en-HK" sz="1800" spc="-1" strike="noStrike">
+                <a:latin typeface="Arial"/>
+              </a:rPr>
+              <a:t>The birthday paradox illustrates how human </a:t>
+            </a:r>
+            <a:r>
+              <a:rPr b="0" lang="en-HK" sz="1800" spc="-1" strike="noStrike">
+                <a:latin typeface="Arial"/>
+              </a:rPr>
+              <a:t>intuition about probability often fails when </a:t>
+            </a:r>
+            <a:r>
+              <a:rPr b="0" lang="en-HK" sz="1800" spc="-1" strike="noStrike">
+                <a:latin typeface="Arial"/>
+              </a:rPr>
+              <a:t>dealing with combinatorial problems.</a:t>
+            </a:r>
+            <a:endParaRPr b="0" lang="en-HK" sz="1800" spc="-1" strike="noStrike">
               <a:latin typeface="Arial"/>
             </a:endParaRPr>
           </a:p>
@@ -2187,18 +2205,18 @@
         <p:spPr>
           <a:xfrm>
             <a:off x="3884760" y="8685360"/>
-            <a:ext cx="2971440" cy="458280"/>
-          </a:xfrm>
-          <a:prstGeom prst="rect">
-            <a:avLst/>
-          </a:prstGeom>
-          <a:noFill/>
-          <a:ln w="0">
-            <a:noFill/>
-          </a:ln>
-        </p:spPr>
-        <p:txBody>
-          <a:bodyPr anchor="b">
+            <a:ext cx="2971080" cy="457920"/>
+          </a:xfrm>
+          <a:prstGeom prst="rect">
+            <a:avLst/>
+          </a:prstGeom>
+          <a:noFill/>
+          <a:ln w="0">
+            <a:noFill/>
+          </a:ln>
+        </p:spPr>
+        <p:txBody>
+          <a:bodyPr lIns="0" rIns="0" tIns="0" bIns="0" anchor="b">
             <a:noAutofit/>
           </a:bodyPr>
           <a:lstStyle>
@@ -2219,7 +2237,7 @@
               </a:lnSpc>
               <a:buNone/>
             </a:pPr>
-            <a:fld id="{F190D915-60BB-4F1F-AB33-F79653BCEDA0}" type="slidenum">
+            <a:fld id="{476F5DE3-68DC-4A07-A5E3-93B05F6ECE94}" type="slidenum">
               <a:rPr b="0" lang="en-US" sz="1200" spc="-1" strike="noStrike">
                 <a:latin typeface="Times New Roman"/>
               </a:rPr>
@@ -2266,7 +2284,7 @@
         <p:spPr>
           <a:xfrm>
             <a:off x="685800" y="1143000"/>
-            <a:ext cx="5486040" cy="3085920"/>
+            <a:ext cx="5485680" cy="3085560"/>
           </a:xfrm>
           <a:prstGeom prst="rect">
             <a:avLst/>
@@ -2289,18 +2307,18 @@
         <p:spPr>
           <a:xfrm>
             <a:off x="685800" y="4400640"/>
-            <a:ext cx="5486040" cy="3600000"/>
-          </a:xfrm>
-          <a:prstGeom prst="rect">
-            <a:avLst/>
-          </a:prstGeom>
-          <a:noFill/>
-          <a:ln w="0">
-            <a:noFill/>
-          </a:ln>
-        </p:spPr>
-        <p:txBody>
-          <a:bodyPr anchor="t">
+            <a:ext cx="5485680" cy="3599640"/>
+          </a:xfrm>
+          <a:prstGeom prst="rect">
+            <a:avLst/>
+          </a:prstGeom>
+          <a:noFill/>
+          <a:ln w="0">
+            <a:noFill/>
+          </a:ln>
+        </p:spPr>
+        <p:txBody>
+          <a:bodyPr lIns="0" rIns="0" tIns="0" bIns="0" anchor="t">
             <a:noAutofit/>
           </a:bodyPr>
           <a:p>
@@ -2323,18 +2341,18 @@
         <p:spPr>
           <a:xfrm>
             <a:off x="3884760" y="8685360"/>
-            <a:ext cx="2971440" cy="458280"/>
-          </a:xfrm>
-          <a:prstGeom prst="rect">
-            <a:avLst/>
-          </a:prstGeom>
-          <a:noFill/>
-          <a:ln w="0">
-            <a:noFill/>
-          </a:ln>
-        </p:spPr>
-        <p:txBody>
-          <a:bodyPr anchor="b">
+            <a:ext cx="2971080" cy="457920"/>
+          </a:xfrm>
+          <a:prstGeom prst="rect">
+            <a:avLst/>
+          </a:prstGeom>
+          <a:noFill/>
+          <a:ln w="0">
+            <a:noFill/>
+          </a:ln>
+        </p:spPr>
+        <p:txBody>
+          <a:bodyPr lIns="0" rIns="0" tIns="0" bIns="0" anchor="b">
             <a:noAutofit/>
           </a:bodyPr>
           <a:lstStyle>
@@ -2355,7 +2373,7 @@
               </a:lnSpc>
               <a:buNone/>
             </a:pPr>
-            <a:fld id="{65D433AC-9960-44FC-9EB3-927DBEF7223F}" type="slidenum">
+            <a:fld id="{98899325-C4FC-49CD-8E00-F2A3852487AD}" type="slidenum">
               <a:rPr b="0" lang="en-US" sz="1200" spc="-1" strike="noStrike">
                 <a:latin typeface="Times New Roman"/>
               </a:rPr>
@@ -2402,7 +2420,7 @@
         <p:spPr>
           <a:xfrm>
             <a:off x="685800" y="1143000"/>
-            <a:ext cx="5486040" cy="3085920"/>
+            <a:ext cx="5485680" cy="3085560"/>
           </a:xfrm>
           <a:prstGeom prst="rect">
             <a:avLst/>
@@ -2425,18 +2443,18 @@
         <p:spPr>
           <a:xfrm>
             <a:off x="685800" y="4400640"/>
-            <a:ext cx="5486040" cy="3600000"/>
-          </a:xfrm>
-          <a:prstGeom prst="rect">
-            <a:avLst/>
-          </a:prstGeom>
-          <a:noFill/>
-          <a:ln w="0">
-            <a:noFill/>
-          </a:ln>
-        </p:spPr>
-        <p:txBody>
-          <a:bodyPr anchor="t">
+            <a:ext cx="5485680" cy="3599640"/>
+          </a:xfrm>
+          <a:prstGeom prst="rect">
+            <a:avLst/>
+          </a:prstGeom>
+          <a:noFill/>
+          <a:ln w="0">
+            <a:noFill/>
+          </a:ln>
+        </p:spPr>
+        <p:txBody>
+          <a:bodyPr lIns="0" rIns="0" tIns="0" bIns="0" anchor="t">
             <a:noAutofit/>
           </a:bodyPr>
           <a:p>
@@ -2459,18 +2477,18 @@
         <p:spPr>
           <a:xfrm>
             <a:off x="3884760" y="8685360"/>
-            <a:ext cx="2971440" cy="458280"/>
-          </a:xfrm>
-          <a:prstGeom prst="rect">
-            <a:avLst/>
-          </a:prstGeom>
-          <a:noFill/>
-          <a:ln w="0">
-            <a:noFill/>
-          </a:ln>
-        </p:spPr>
-        <p:txBody>
-          <a:bodyPr anchor="b">
+            <a:ext cx="2971080" cy="457920"/>
+          </a:xfrm>
+          <a:prstGeom prst="rect">
+            <a:avLst/>
+          </a:prstGeom>
+          <a:noFill/>
+          <a:ln w="0">
+            <a:noFill/>
+          </a:ln>
+        </p:spPr>
+        <p:txBody>
+          <a:bodyPr lIns="0" rIns="0" tIns="0" bIns="0" anchor="b">
             <a:noAutofit/>
           </a:bodyPr>
           <a:lstStyle>
@@ -2491,7 +2509,7 @@
               </a:lnSpc>
               <a:buNone/>
             </a:pPr>
-            <a:fld id="{619FA235-7AF0-41C4-965C-3748A3F771CD}" type="slidenum">
+            <a:fld id="{12EF2C84-04EE-46D2-A8CB-2D8F215ADCFD}" type="slidenum">
               <a:rPr b="0" lang="en-US" sz="1200" spc="-1" strike="noStrike">
                 <a:latin typeface="Times New Roman"/>
               </a:rPr>
@@ -2538,7 +2556,7 @@
         <p:spPr>
           <a:xfrm>
             <a:off x="685800" y="1143000"/>
-            <a:ext cx="5486040" cy="3085920"/>
+            <a:ext cx="5485680" cy="3085560"/>
           </a:xfrm>
           <a:prstGeom prst="rect">
             <a:avLst/>
@@ -2561,18 +2579,18 @@
         <p:spPr>
           <a:xfrm>
             <a:off x="685800" y="4400640"/>
-            <a:ext cx="5486040" cy="3600000"/>
-          </a:xfrm>
-          <a:prstGeom prst="rect">
-            <a:avLst/>
-          </a:prstGeom>
-          <a:noFill/>
-          <a:ln w="0">
-            <a:noFill/>
-          </a:ln>
-        </p:spPr>
-        <p:txBody>
-          <a:bodyPr anchor="t">
+            <a:ext cx="5485680" cy="3599640"/>
+          </a:xfrm>
+          <a:prstGeom prst="rect">
+            <a:avLst/>
+          </a:prstGeom>
+          <a:noFill/>
+          <a:ln w="0">
+            <a:noFill/>
+          </a:ln>
+        </p:spPr>
+        <p:txBody>
+          <a:bodyPr lIns="0" rIns="0" tIns="0" bIns="0" anchor="t">
             <a:noAutofit/>
           </a:bodyPr>
           <a:p>
@@ -2595,18 +2613,18 @@
         <p:spPr>
           <a:xfrm>
             <a:off x="3884760" y="8685360"/>
-            <a:ext cx="2971440" cy="458280"/>
-          </a:xfrm>
-          <a:prstGeom prst="rect">
-            <a:avLst/>
-          </a:prstGeom>
-          <a:noFill/>
-          <a:ln w="0">
-            <a:noFill/>
-          </a:ln>
-        </p:spPr>
-        <p:txBody>
-          <a:bodyPr anchor="b">
+            <a:ext cx="2971080" cy="457920"/>
+          </a:xfrm>
+          <a:prstGeom prst="rect">
+            <a:avLst/>
+          </a:prstGeom>
+          <a:noFill/>
+          <a:ln w="0">
+            <a:noFill/>
+          </a:ln>
+        </p:spPr>
+        <p:txBody>
+          <a:bodyPr lIns="0" rIns="0" tIns="0" bIns="0" anchor="b">
             <a:noAutofit/>
           </a:bodyPr>
           <a:lstStyle>
@@ -2627,7 +2645,7 @@
               </a:lnSpc>
               <a:buNone/>
             </a:pPr>
-            <a:fld id="{81DF30CC-CEEC-4766-9EF2-E6D133150A4C}" type="slidenum">
+            <a:fld id="{E60B7AB3-E9D9-40D3-A066-457DE84298BF}" type="slidenum">
               <a:rPr b="0" lang="en-US" sz="1200" spc="-1" strike="noStrike">
                 <a:latin typeface="Times New Roman"/>
               </a:rPr>
@@ -2696,7 +2714,7 @@
         <p:spPr>
           <a:xfrm>
             <a:off x="609480" y="273600"/>
-            <a:ext cx="10972440" cy="1144800"/>
+            <a:ext cx="10973520" cy="1144800"/>
           </a:xfrm>
           <a:prstGeom prst="rect">
             <a:avLst/>
@@ -2715,10 +2733,7 @@
               <a:buNone/>
             </a:pPr>
             <a:endParaRPr b="0" lang="en-HK" sz="4400" spc="-1" strike="noStrike">
-              <a:solidFill>
-                <a:srgbClr val="000000"/>
-              </a:solidFill>
-              <a:latin typeface="Calibri Light"/>
+              <a:latin typeface="Arial"/>
             </a:endParaRPr>
           </a:p>
         </p:txBody>
@@ -2736,7 +2751,7 @@
         <p:spPr>
           <a:xfrm>
             <a:off x="609480" y="1604520"/>
-            <a:ext cx="10972440" cy="1896840"/>
+            <a:ext cx="10973520" cy="1896840"/>
           </a:xfrm>
           <a:prstGeom prst="rect">
             <a:avLst/>
@@ -2752,10 +2767,7 @@
           </a:bodyPr>
           <a:p>
             <a:endParaRPr b="0" lang="en-HK" sz="3200" spc="-1" strike="noStrike">
-              <a:solidFill>
-                <a:srgbClr val="000000"/>
-              </a:solidFill>
-              <a:latin typeface="Calibri"/>
+              <a:latin typeface="Arial"/>
             </a:endParaRPr>
           </a:p>
         </p:txBody>
@@ -2773,7 +2785,7 @@
         <p:spPr>
           <a:xfrm>
             <a:off x="609480" y="3682080"/>
-            <a:ext cx="10972440" cy="1896840"/>
+            <a:ext cx="10973520" cy="1896840"/>
           </a:xfrm>
           <a:prstGeom prst="rect">
             <a:avLst/>
@@ -2789,10 +2801,7 @@
           </a:bodyPr>
           <a:p>
             <a:endParaRPr b="0" lang="en-HK" sz="3200" spc="-1" strike="noStrike">
-              <a:solidFill>
-                <a:srgbClr val="000000"/>
-              </a:solidFill>
-              <a:latin typeface="Calibri"/>
+              <a:latin typeface="Arial"/>
             </a:endParaRPr>
           </a:p>
         </p:txBody>
@@ -2832,7 +2841,7 @@
         <p:spPr>
           <a:xfrm>
             <a:off x="609480" y="273600"/>
-            <a:ext cx="10972440" cy="1144800"/>
+            <a:ext cx="10973520" cy="1144800"/>
           </a:xfrm>
           <a:prstGeom prst="rect">
             <a:avLst/>
@@ -2851,10 +2860,7 @@
               <a:buNone/>
             </a:pPr>
             <a:endParaRPr b="0" lang="en-HK" sz="4400" spc="-1" strike="noStrike">
-              <a:solidFill>
-                <a:srgbClr val="000000"/>
-              </a:solidFill>
-              <a:latin typeface="Calibri Light"/>
+              <a:latin typeface="Arial"/>
             </a:endParaRPr>
           </a:p>
         </p:txBody>
@@ -2872,7 +2878,7 @@
         <p:spPr>
           <a:xfrm>
             <a:off x="609480" y="1604520"/>
-            <a:ext cx="5354280" cy="1896840"/>
+            <a:ext cx="5355000" cy="1896840"/>
           </a:xfrm>
           <a:prstGeom prst="rect">
             <a:avLst/>
@@ -2888,10 +2894,7 @@
           </a:bodyPr>
           <a:p>
             <a:endParaRPr b="0" lang="en-HK" sz="3200" spc="-1" strike="noStrike">
-              <a:solidFill>
-                <a:srgbClr val="000000"/>
-              </a:solidFill>
-              <a:latin typeface="Calibri"/>
+              <a:latin typeface="Arial"/>
             </a:endParaRPr>
           </a:p>
         </p:txBody>
@@ -2908,8 +2911,8 @@
         </p:nvSpPr>
         <p:spPr>
           <a:xfrm>
-            <a:off x="6231960" y="1604520"/>
-            <a:ext cx="5354280" cy="1896840"/>
+            <a:off x="6232680" y="1604520"/>
+            <a:ext cx="5355000" cy="1896840"/>
           </a:xfrm>
           <a:prstGeom prst="rect">
             <a:avLst/>
@@ -2925,10 +2928,7 @@
           </a:bodyPr>
           <a:p>
             <a:endParaRPr b="0" lang="en-HK" sz="3200" spc="-1" strike="noStrike">
-              <a:solidFill>
-                <a:srgbClr val="000000"/>
-              </a:solidFill>
-              <a:latin typeface="Calibri"/>
+              <a:latin typeface="Arial"/>
             </a:endParaRPr>
           </a:p>
         </p:txBody>
@@ -2946,7 +2946,7 @@
         <p:spPr>
           <a:xfrm>
             <a:off x="609480" y="3682080"/>
-            <a:ext cx="5354280" cy="1896840"/>
+            <a:ext cx="5355000" cy="1896840"/>
           </a:xfrm>
           <a:prstGeom prst="rect">
             <a:avLst/>
@@ -2962,10 +2962,7 @@
           </a:bodyPr>
           <a:p>
             <a:endParaRPr b="0" lang="en-HK" sz="3200" spc="-1" strike="noStrike">
-              <a:solidFill>
-                <a:srgbClr val="000000"/>
-              </a:solidFill>
-              <a:latin typeface="Calibri"/>
+              <a:latin typeface="Arial"/>
             </a:endParaRPr>
           </a:p>
         </p:txBody>
@@ -2982,8 +2979,8 @@
         </p:nvSpPr>
         <p:spPr>
           <a:xfrm>
-            <a:off x="6231960" y="3682080"/>
-            <a:ext cx="5354280" cy="1896840"/>
+            <a:off x="6232680" y="3682080"/>
+            <a:ext cx="5355000" cy="1896840"/>
           </a:xfrm>
           <a:prstGeom prst="rect">
             <a:avLst/>
@@ -2999,10 +2996,7 @@
           </a:bodyPr>
           <a:p>
             <a:endParaRPr b="0" lang="en-HK" sz="3200" spc="-1" strike="noStrike">
-              <a:solidFill>
-                <a:srgbClr val="000000"/>
-              </a:solidFill>
-              <a:latin typeface="Calibri"/>
+              <a:latin typeface="Arial"/>
             </a:endParaRPr>
           </a:p>
         </p:txBody>
@@ -3042,7 +3036,7 @@
         <p:spPr>
           <a:xfrm>
             <a:off x="609480" y="273600"/>
-            <a:ext cx="10972440" cy="1144800"/>
+            <a:ext cx="10973520" cy="1144800"/>
           </a:xfrm>
           <a:prstGeom prst="rect">
             <a:avLst/>
@@ -3061,10 +3055,7 @@
               <a:buNone/>
             </a:pPr>
             <a:endParaRPr b="0" lang="en-HK" sz="4400" spc="-1" strike="noStrike">
-              <a:solidFill>
-                <a:srgbClr val="000000"/>
-              </a:solidFill>
-              <a:latin typeface="Calibri Light"/>
+              <a:latin typeface="Arial"/>
             </a:endParaRPr>
           </a:p>
         </p:txBody>
@@ -3082,7 +3073,7 @@
         <p:spPr>
           <a:xfrm>
             <a:off x="609480" y="1604520"/>
-            <a:ext cx="3533040" cy="1896840"/>
+            <a:ext cx="3533400" cy="1896840"/>
           </a:xfrm>
           <a:prstGeom prst="rect">
             <a:avLst/>
@@ -3098,10 +3089,7 @@
           </a:bodyPr>
           <a:p>
             <a:endParaRPr b="0" lang="en-HK" sz="3200" spc="-1" strike="noStrike">
-              <a:solidFill>
-                <a:srgbClr val="000000"/>
-              </a:solidFill>
-              <a:latin typeface="Calibri"/>
+              <a:latin typeface="Arial"/>
             </a:endParaRPr>
           </a:p>
         </p:txBody>
@@ -3118,8 +3106,8 @@
         </p:nvSpPr>
         <p:spPr>
           <a:xfrm>
-            <a:off x="4319640" y="1604520"/>
-            <a:ext cx="3533040" cy="1896840"/>
+            <a:off x="4320000" y="1604520"/>
+            <a:ext cx="3533400" cy="1896840"/>
           </a:xfrm>
           <a:prstGeom prst="rect">
             <a:avLst/>
@@ -3135,10 +3123,7 @@
           </a:bodyPr>
           <a:p>
             <a:endParaRPr b="0" lang="en-HK" sz="3200" spc="-1" strike="noStrike">
-              <a:solidFill>
-                <a:srgbClr val="000000"/>
-              </a:solidFill>
-              <a:latin typeface="Calibri"/>
+              <a:latin typeface="Arial"/>
             </a:endParaRPr>
           </a:p>
         </p:txBody>
@@ -3155,8 +3140,8 @@
         </p:nvSpPr>
         <p:spPr>
           <a:xfrm>
-            <a:off x="8029800" y="1604520"/>
-            <a:ext cx="3533040" cy="1896840"/>
+            <a:off x="8030520" y="1604520"/>
+            <a:ext cx="3533400" cy="1896840"/>
           </a:xfrm>
           <a:prstGeom prst="rect">
             <a:avLst/>
@@ -3172,10 +3157,7 @@
           </a:bodyPr>
           <a:p>
             <a:endParaRPr b="0" lang="en-HK" sz="3200" spc="-1" strike="noStrike">
-              <a:solidFill>
-                <a:srgbClr val="000000"/>
-              </a:solidFill>
-              <a:latin typeface="Calibri"/>
+              <a:latin typeface="Arial"/>
             </a:endParaRPr>
           </a:p>
         </p:txBody>
@@ -3193,7 +3175,7 @@
         <p:spPr>
           <a:xfrm>
             <a:off x="609480" y="3682080"/>
-            <a:ext cx="3533040" cy="1896840"/>
+            <a:ext cx="3533400" cy="1896840"/>
           </a:xfrm>
           <a:prstGeom prst="rect">
             <a:avLst/>
@@ -3209,10 +3191,7 @@
           </a:bodyPr>
           <a:p>
             <a:endParaRPr b="0" lang="en-HK" sz="3200" spc="-1" strike="noStrike">
-              <a:solidFill>
-                <a:srgbClr val="000000"/>
-              </a:solidFill>
-              <a:latin typeface="Calibri"/>
+              <a:latin typeface="Arial"/>
             </a:endParaRPr>
           </a:p>
         </p:txBody>
@@ -3229,8 +3208,8 @@
         </p:nvSpPr>
         <p:spPr>
           <a:xfrm>
-            <a:off x="4319640" y="3682080"/>
-            <a:ext cx="3533040" cy="1896840"/>
+            <a:off x="4320000" y="3682080"/>
+            <a:ext cx="3533400" cy="1896840"/>
           </a:xfrm>
           <a:prstGeom prst="rect">
             <a:avLst/>
@@ -3246,10 +3225,7 @@
           </a:bodyPr>
           <a:p>
             <a:endParaRPr b="0" lang="en-HK" sz="3200" spc="-1" strike="noStrike">
-              <a:solidFill>
-                <a:srgbClr val="000000"/>
-              </a:solidFill>
-              <a:latin typeface="Calibri"/>
+              <a:latin typeface="Arial"/>
             </a:endParaRPr>
           </a:p>
         </p:txBody>
@@ -3266,8 +3242,8 @@
         </p:nvSpPr>
         <p:spPr>
           <a:xfrm>
-            <a:off x="8029800" y="3682080"/>
-            <a:ext cx="3533040" cy="1896840"/>
+            <a:off x="8030520" y="3682080"/>
+            <a:ext cx="3533400" cy="1896840"/>
           </a:xfrm>
           <a:prstGeom prst="rect">
             <a:avLst/>
@@ -3283,10 +3259,7 @@
           </a:bodyPr>
           <a:p>
             <a:endParaRPr b="0" lang="en-HK" sz="3200" spc="-1" strike="noStrike">
-              <a:solidFill>
-                <a:srgbClr val="000000"/>
-              </a:solidFill>
-              <a:latin typeface="Calibri"/>
+              <a:latin typeface="Arial"/>
             </a:endParaRPr>
           </a:p>
         </p:txBody>
@@ -3326,7 +3299,7 @@
         <p:spPr>
           <a:xfrm>
             <a:off x="609480" y="273600"/>
-            <a:ext cx="10972440" cy="1144800"/>
+            <a:ext cx="10973520" cy="1144800"/>
           </a:xfrm>
           <a:prstGeom prst="rect">
             <a:avLst/>
@@ -3345,10 +3318,7 @@
               <a:buNone/>
             </a:pPr>
             <a:endParaRPr b="0" lang="en-HK" sz="4400" spc="-1" strike="noStrike">
-              <a:solidFill>
-                <a:srgbClr val="000000"/>
-              </a:solidFill>
-              <a:latin typeface="Calibri Light"/>
+              <a:latin typeface="Arial"/>
             </a:endParaRPr>
           </a:p>
         </p:txBody>
@@ -3366,7 +3336,7 @@
         <p:spPr>
           <a:xfrm>
             <a:off x="609480" y="1604520"/>
-            <a:ext cx="10972440" cy="3977280"/>
+            <a:ext cx="10973520" cy="3977280"/>
           </a:xfrm>
           <a:prstGeom prst="rect">
             <a:avLst/>
@@ -3425,7 +3395,7 @@
         <p:spPr>
           <a:xfrm>
             <a:off x="609480" y="273600"/>
-            <a:ext cx="10972440" cy="1144800"/>
+            <a:ext cx="10973520" cy="1144800"/>
           </a:xfrm>
           <a:prstGeom prst="rect">
             <a:avLst/>
@@ -3444,10 +3414,7 @@
               <a:buNone/>
             </a:pPr>
             <a:endParaRPr b="0" lang="en-HK" sz="4400" spc="-1" strike="noStrike">
-              <a:solidFill>
-                <a:srgbClr val="000000"/>
-              </a:solidFill>
-              <a:latin typeface="Calibri Light"/>
+              <a:latin typeface="Arial"/>
             </a:endParaRPr>
           </a:p>
         </p:txBody>
@@ -3465,7 +3432,7 @@
         <p:spPr>
           <a:xfrm>
             <a:off x="609480" y="1604520"/>
-            <a:ext cx="10972440" cy="3977280"/>
+            <a:ext cx="10973520" cy="3977280"/>
           </a:xfrm>
           <a:prstGeom prst="rect">
             <a:avLst/>
@@ -3481,10 +3448,7 @@
           </a:bodyPr>
           <a:p>
             <a:endParaRPr b="0" lang="en-HK" sz="3200" spc="-1" strike="noStrike">
-              <a:solidFill>
-                <a:srgbClr val="000000"/>
-              </a:solidFill>
-              <a:latin typeface="Calibri"/>
+              <a:latin typeface="Arial"/>
             </a:endParaRPr>
           </a:p>
         </p:txBody>
@@ -3524,7 +3488,7 @@
         <p:spPr>
           <a:xfrm>
             <a:off x="609480" y="273600"/>
-            <a:ext cx="10972440" cy="1144800"/>
+            <a:ext cx="10973520" cy="1144800"/>
           </a:xfrm>
           <a:prstGeom prst="rect">
             <a:avLst/>
@@ -3543,10 +3507,7 @@
               <a:buNone/>
             </a:pPr>
             <a:endParaRPr b="0" lang="en-HK" sz="4400" spc="-1" strike="noStrike">
-              <a:solidFill>
-                <a:srgbClr val="000000"/>
-              </a:solidFill>
-              <a:latin typeface="Calibri Light"/>
+              <a:latin typeface="Arial"/>
             </a:endParaRPr>
           </a:p>
         </p:txBody>
@@ -3564,7 +3525,7 @@
         <p:spPr>
           <a:xfrm>
             <a:off x="609480" y="1604520"/>
-            <a:ext cx="5354280" cy="3977280"/>
+            <a:ext cx="5355000" cy="3977280"/>
           </a:xfrm>
           <a:prstGeom prst="rect">
             <a:avLst/>
@@ -3580,10 +3541,7 @@
           </a:bodyPr>
           <a:p>
             <a:endParaRPr b="0" lang="en-HK" sz="3200" spc="-1" strike="noStrike">
-              <a:solidFill>
-                <a:srgbClr val="000000"/>
-              </a:solidFill>
-              <a:latin typeface="Calibri"/>
+              <a:latin typeface="Arial"/>
             </a:endParaRPr>
           </a:p>
         </p:txBody>
@@ -3600,8 +3558,8 @@
         </p:nvSpPr>
         <p:spPr>
           <a:xfrm>
-            <a:off x="6231960" y="1604520"/>
-            <a:ext cx="5354280" cy="3977280"/>
+            <a:off x="6232680" y="1604520"/>
+            <a:ext cx="5355000" cy="3977280"/>
           </a:xfrm>
           <a:prstGeom prst="rect">
             <a:avLst/>
@@ -3617,10 +3575,7 @@
           </a:bodyPr>
           <a:p>
             <a:endParaRPr b="0" lang="en-HK" sz="3200" spc="-1" strike="noStrike">
-              <a:solidFill>
-                <a:srgbClr val="000000"/>
-              </a:solidFill>
-              <a:latin typeface="Calibri"/>
+              <a:latin typeface="Arial"/>
             </a:endParaRPr>
           </a:p>
         </p:txBody>
@@ -3660,7 +3615,7 @@
         <p:spPr>
           <a:xfrm>
             <a:off x="609480" y="273600"/>
-            <a:ext cx="10972440" cy="1144800"/>
+            <a:ext cx="10973520" cy="1144800"/>
           </a:xfrm>
           <a:prstGeom prst="rect">
             <a:avLst/>
@@ -3679,10 +3634,7 @@
               <a:buNone/>
             </a:pPr>
             <a:endParaRPr b="0" lang="en-HK" sz="4400" spc="-1" strike="noStrike">
-              <a:solidFill>
-                <a:srgbClr val="000000"/>
-              </a:solidFill>
-              <a:latin typeface="Calibri Light"/>
+              <a:latin typeface="Arial"/>
             </a:endParaRPr>
           </a:p>
         </p:txBody>
@@ -3722,7 +3674,7 @@
         <p:spPr>
           <a:xfrm>
             <a:off x="609480" y="273600"/>
-            <a:ext cx="10972440" cy="5307840"/>
+            <a:ext cx="10973520" cy="5307840"/>
           </a:xfrm>
           <a:prstGeom prst="rect">
             <a:avLst/>
@@ -3781,7 +3733,7 @@
         <p:spPr>
           <a:xfrm>
             <a:off x="609480" y="273600"/>
-            <a:ext cx="10972440" cy="1144800"/>
+            <a:ext cx="10973520" cy="1144800"/>
           </a:xfrm>
           <a:prstGeom prst="rect">
             <a:avLst/>
@@ -3800,10 +3752,7 @@
               <a:buNone/>
             </a:pPr>
             <a:endParaRPr b="0" lang="en-HK" sz="4400" spc="-1" strike="noStrike">
-              <a:solidFill>
-                <a:srgbClr val="000000"/>
-              </a:solidFill>
-              <a:latin typeface="Calibri Light"/>
+              <a:latin typeface="Arial"/>
             </a:endParaRPr>
           </a:p>
         </p:txBody>
@@ -3821,7 +3770,7 @@
         <p:spPr>
           <a:xfrm>
             <a:off x="609480" y="1604520"/>
-            <a:ext cx="5354280" cy="1896840"/>
+            <a:ext cx="5355000" cy="1896840"/>
           </a:xfrm>
           <a:prstGeom prst="rect">
             <a:avLst/>
@@ -3837,10 +3786,7 @@
           </a:bodyPr>
           <a:p>
             <a:endParaRPr b="0" lang="en-HK" sz="3200" spc="-1" strike="noStrike">
-              <a:solidFill>
-                <a:srgbClr val="000000"/>
-              </a:solidFill>
-              <a:latin typeface="Calibri"/>
+              <a:latin typeface="Arial"/>
             </a:endParaRPr>
           </a:p>
         </p:txBody>
@@ -3857,8 +3803,8 @@
         </p:nvSpPr>
         <p:spPr>
           <a:xfrm>
-            <a:off x="6231960" y="1604520"/>
-            <a:ext cx="5354280" cy="3977280"/>
+            <a:off x="6232680" y="1604520"/>
+            <a:ext cx="5355000" cy="3977280"/>
           </a:xfrm>
           <a:prstGeom prst="rect">
             <a:avLst/>
@@ -3874,10 +3820,7 @@
           </a:bodyPr>
           <a:p>
             <a:endParaRPr b="0" lang="en-HK" sz="3200" spc="-1" strike="noStrike">
-              <a:solidFill>
-                <a:srgbClr val="000000"/>
-              </a:solidFill>
-              <a:latin typeface="Calibri"/>
+              <a:latin typeface="Arial"/>
             </a:endParaRPr>
           </a:p>
         </p:txBody>
@@ -3895,7 +3838,7 @@
         <p:spPr>
           <a:xfrm>
             <a:off x="609480" y="3682080"/>
-            <a:ext cx="5354280" cy="1896840"/>
+            <a:ext cx="5355000" cy="1896840"/>
           </a:xfrm>
           <a:prstGeom prst="rect">
             <a:avLst/>
@@ -3911,10 +3854,7 @@
           </a:bodyPr>
           <a:p>
             <a:endParaRPr b="0" lang="en-HK" sz="3200" spc="-1" strike="noStrike">
-              <a:solidFill>
-                <a:srgbClr val="000000"/>
-              </a:solidFill>
-              <a:latin typeface="Calibri"/>
+              <a:latin typeface="Arial"/>
             </a:endParaRPr>
           </a:p>
         </p:txBody>
@@ -3954,7 +3894,7 @@
         <p:spPr>
           <a:xfrm>
             <a:off x="609480" y="273600"/>
-            <a:ext cx="10972440" cy="1144800"/>
+            <a:ext cx="10973520" cy="1144800"/>
           </a:xfrm>
           <a:prstGeom prst="rect">
             <a:avLst/>
@@ -3973,10 +3913,7 @@
               <a:buNone/>
             </a:pPr>
             <a:endParaRPr b="0" lang="en-HK" sz="4400" spc="-1" strike="noStrike">
-              <a:solidFill>
-                <a:srgbClr val="000000"/>
-              </a:solidFill>
-              <a:latin typeface="Calibri Light"/>
+              <a:latin typeface="Arial"/>
             </a:endParaRPr>
           </a:p>
         </p:txBody>
@@ -3994,7 +3931,7 @@
         <p:spPr>
           <a:xfrm>
             <a:off x="609480" y="1604520"/>
-            <a:ext cx="5354280" cy="3977280"/>
+            <a:ext cx="5355000" cy="3977280"/>
           </a:xfrm>
           <a:prstGeom prst="rect">
             <a:avLst/>
@@ -4010,10 +3947,7 @@
           </a:bodyPr>
           <a:p>
             <a:endParaRPr b="0" lang="en-HK" sz="3200" spc="-1" strike="noStrike">
-              <a:solidFill>
-                <a:srgbClr val="000000"/>
-              </a:solidFill>
-              <a:latin typeface="Calibri"/>
+              <a:latin typeface="Arial"/>
             </a:endParaRPr>
           </a:p>
         </p:txBody>
@@ -4030,8 +3964,8 @@
         </p:nvSpPr>
         <p:spPr>
           <a:xfrm>
-            <a:off x="6231960" y="1604520"/>
-            <a:ext cx="5354280" cy="1896840"/>
+            <a:off x="6232680" y="1604520"/>
+            <a:ext cx="5355000" cy="1896840"/>
           </a:xfrm>
           <a:prstGeom prst="rect">
             <a:avLst/>
@@ -4047,10 +3981,7 @@
           </a:bodyPr>
           <a:p>
             <a:endParaRPr b="0" lang="en-HK" sz="3200" spc="-1" strike="noStrike">
-              <a:solidFill>
-                <a:srgbClr val="000000"/>
-              </a:solidFill>
-              <a:latin typeface="Calibri"/>
+              <a:latin typeface="Arial"/>
             </a:endParaRPr>
           </a:p>
         </p:txBody>
@@ -4067,8 +3998,8 @@
         </p:nvSpPr>
         <p:spPr>
           <a:xfrm>
-            <a:off x="6231960" y="3682080"/>
-            <a:ext cx="5354280" cy="1896840"/>
+            <a:off x="6232680" y="3682080"/>
+            <a:ext cx="5355000" cy="1896840"/>
           </a:xfrm>
           <a:prstGeom prst="rect">
             <a:avLst/>
@@ -4084,10 +4015,7 @@
           </a:bodyPr>
           <a:p>
             <a:endParaRPr b="0" lang="en-HK" sz="3200" spc="-1" strike="noStrike">
-              <a:solidFill>
-                <a:srgbClr val="000000"/>
-              </a:solidFill>
-              <a:latin typeface="Calibri"/>
+              <a:latin typeface="Arial"/>
             </a:endParaRPr>
           </a:p>
         </p:txBody>
@@ -4127,7 +4055,7 @@
         <p:spPr>
           <a:xfrm>
             <a:off x="609480" y="273600"/>
-            <a:ext cx="10972440" cy="1144800"/>
+            <a:ext cx="10973520" cy="1144800"/>
           </a:xfrm>
           <a:prstGeom prst="rect">
             <a:avLst/>
@@ -4146,10 +4074,7 @@
               <a:buNone/>
             </a:pPr>
             <a:endParaRPr b="0" lang="en-HK" sz="4400" spc="-1" strike="noStrike">
-              <a:solidFill>
-                <a:srgbClr val="000000"/>
-              </a:solidFill>
-              <a:latin typeface="Calibri Light"/>
+              <a:latin typeface="Arial"/>
             </a:endParaRPr>
           </a:p>
         </p:txBody>
@@ -4167,7 +4092,7 @@
         <p:spPr>
           <a:xfrm>
             <a:off x="609480" y="1604520"/>
-            <a:ext cx="5354280" cy="1896840"/>
+            <a:ext cx="5355000" cy="1896840"/>
           </a:xfrm>
           <a:prstGeom prst="rect">
             <a:avLst/>
@@ -4183,10 +4108,7 @@
           </a:bodyPr>
           <a:p>
             <a:endParaRPr b="0" lang="en-HK" sz="3200" spc="-1" strike="noStrike">
-              <a:solidFill>
-                <a:srgbClr val="000000"/>
-              </a:solidFill>
-              <a:latin typeface="Calibri"/>
+              <a:latin typeface="Arial"/>
             </a:endParaRPr>
           </a:p>
         </p:txBody>
@@ -4203,8 +4125,8 @@
         </p:nvSpPr>
         <p:spPr>
           <a:xfrm>
-            <a:off x="6231960" y="1604520"/>
-            <a:ext cx="5354280" cy="1896840"/>
+            <a:off x="6232680" y="1604520"/>
+            <a:ext cx="5355000" cy="1896840"/>
           </a:xfrm>
           <a:prstGeom prst="rect">
             <a:avLst/>
@@ -4220,10 +4142,7 @@
           </a:bodyPr>
           <a:p>
             <a:endParaRPr b="0" lang="en-HK" sz="3200" spc="-1" strike="noStrike">
-              <a:solidFill>
-                <a:srgbClr val="000000"/>
-              </a:solidFill>
-              <a:latin typeface="Calibri"/>
+              <a:latin typeface="Arial"/>
             </a:endParaRPr>
           </a:p>
         </p:txBody>
@@ -4241,7 +4160,7 @@
         <p:spPr>
           <a:xfrm>
             <a:off x="609480" y="3682080"/>
-            <a:ext cx="10972440" cy="1896840"/>
+            <a:ext cx="10973520" cy="1896840"/>
           </a:xfrm>
           <a:prstGeom prst="rect">
             <a:avLst/>
@@ -4257,10 +4176,7 @@
           </a:bodyPr>
           <a:p>
             <a:endParaRPr b="0" lang="en-HK" sz="3200" spc="-1" strike="noStrike">
-              <a:solidFill>
-                <a:srgbClr val="000000"/>
-              </a:solidFill>
-              <a:latin typeface="Calibri"/>
+              <a:latin typeface="Arial"/>
             </a:endParaRPr>
           </a:p>
         </p:txBody>
@@ -4307,7 +4223,7 @@
         <p:spPr>
           <a:xfrm>
             <a:off x="609480" y="273600"/>
-            <a:ext cx="10972440" cy="1144800"/>
+            <a:ext cx="10973520" cy="1144800"/>
           </a:xfrm>
           <a:prstGeom prst="rect">
             <a:avLst/>
@@ -4327,18 +4243,12 @@
             </a:pPr>
             <a:r>
               <a:rPr b="0" lang="en-HK" sz="4400" spc="-1" strike="noStrike">
-                <a:solidFill>
-                  <a:srgbClr val="000000"/>
-                </a:solidFill>
-                <a:latin typeface="Calibri Light"/>
+                <a:latin typeface="Arial"/>
               </a:rPr>
               <a:t>Click to edit the title text format</a:t>
             </a:r>
             <a:endParaRPr b="0" lang="en-HK" sz="4400" spc="-1" strike="noStrike">
-              <a:solidFill>
-                <a:srgbClr val="000000"/>
-              </a:solidFill>
-              <a:latin typeface="Calibri Light"/>
+              <a:latin typeface="Arial"/>
             </a:endParaRPr>
           </a:p>
         </p:txBody>
@@ -4356,7 +4266,7 @@
         <p:spPr>
           <a:xfrm>
             <a:off x="609480" y="1604520"/>
-            <a:ext cx="10972440" cy="3977280"/>
+            <a:ext cx="10973520" cy="3977280"/>
           </a:xfrm>
           <a:prstGeom prst="rect">
             <a:avLst/>
@@ -4384,18 +4294,12 @@
             </a:pPr>
             <a:r>
               <a:rPr b="0" lang="en-HK" sz="3200" spc="-1" strike="noStrike">
-                <a:solidFill>
-                  <a:srgbClr val="000000"/>
-                </a:solidFill>
-                <a:latin typeface="Calibri"/>
+                <a:latin typeface="Arial"/>
               </a:rPr>
               <a:t>Click to edit the outline text format</a:t>
             </a:r>
             <a:endParaRPr b="0" lang="en-HK" sz="3200" spc="-1" strike="noStrike">
-              <a:solidFill>
-                <a:srgbClr val="000000"/>
-              </a:solidFill>
-              <a:latin typeface="Calibri"/>
+              <a:latin typeface="Arial"/>
             </a:endParaRPr>
           </a:p>
           <a:p>
@@ -4411,19 +4315,13 @@
               <a:buChar char=""/>
             </a:pPr>
             <a:r>
-              <a:rPr b="0" lang="en-HK" sz="2400" spc="-1" strike="noStrike">
-                <a:solidFill>
-                  <a:srgbClr val="000000"/>
-                </a:solidFill>
-                <a:latin typeface="Calibri"/>
+              <a:rPr b="0" lang="en-HK" sz="2800" spc="-1" strike="noStrike">
+                <a:latin typeface="Arial"/>
               </a:rPr>
               <a:t>Second Outline Level</a:t>
             </a:r>
-            <a:endParaRPr b="0" lang="en-HK" sz="2400" spc="-1" strike="noStrike">
-              <a:solidFill>
-                <a:srgbClr val="000000"/>
-              </a:solidFill>
-              <a:latin typeface="Calibri"/>
+            <a:endParaRPr b="0" lang="en-HK" sz="2800" spc="-1" strike="noStrike">
+              <a:latin typeface="Arial"/>
             </a:endParaRPr>
           </a:p>
           <a:p>
@@ -4439,19 +4337,13 @@
               <a:buChar char=""/>
             </a:pPr>
             <a:r>
-              <a:rPr b="0" lang="en-HK" sz="2000" spc="-1" strike="noStrike">
-                <a:solidFill>
-                  <a:srgbClr val="000000"/>
-                </a:solidFill>
-                <a:latin typeface="Calibri"/>
+              <a:rPr b="0" lang="en-HK" sz="2400" spc="-1" strike="noStrike">
+                <a:latin typeface="Arial"/>
               </a:rPr>
               <a:t>Third Outline Level</a:t>
             </a:r>
-            <a:endParaRPr b="0" lang="en-HK" sz="2000" spc="-1" strike="noStrike">
-              <a:solidFill>
-                <a:srgbClr val="000000"/>
-              </a:solidFill>
-              <a:latin typeface="Calibri"/>
+            <a:endParaRPr b="0" lang="en-HK" sz="2400" spc="-1" strike="noStrike">
+              <a:latin typeface="Arial"/>
             </a:endParaRPr>
           </a:p>
           <a:p>
@@ -4468,18 +4360,12 @@
             </a:pPr>
             <a:r>
               <a:rPr b="0" lang="en-HK" sz="2000" spc="-1" strike="noStrike">
-                <a:solidFill>
-                  <a:srgbClr val="000000"/>
-                </a:solidFill>
-                <a:latin typeface="Calibri"/>
+                <a:latin typeface="Arial"/>
               </a:rPr>
               <a:t>Fourth Outline Level</a:t>
             </a:r>
             <a:endParaRPr b="0" lang="en-HK" sz="2000" spc="-1" strike="noStrike">
-              <a:solidFill>
-                <a:srgbClr val="000000"/>
-              </a:solidFill>
-              <a:latin typeface="Calibri"/>
+              <a:latin typeface="Arial"/>
             </a:endParaRPr>
           </a:p>
           <a:p>
@@ -4496,18 +4382,12 @@
             </a:pPr>
             <a:r>
               <a:rPr b="0" lang="en-HK" sz="2000" spc="-1" strike="noStrike">
-                <a:solidFill>
-                  <a:srgbClr val="000000"/>
-                </a:solidFill>
-                <a:latin typeface="Calibri"/>
+                <a:latin typeface="Arial"/>
               </a:rPr>
               <a:t>Fifth Outline Level</a:t>
             </a:r>
             <a:endParaRPr b="0" lang="en-HK" sz="2000" spc="-1" strike="noStrike">
-              <a:solidFill>
-                <a:srgbClr val="000000"/>
-              </a:solidFill>
-              <a:latin typeface="Calibri"/>
+              <a:latin typeface="Arial"/>
             </a:endParaRPr>
           </a:p>
           <a:p>
@@ -4524,18 +4404,12 @@
             </a:pPr>
             <a:r>
               <a:rPr b="0" lang="en-HK" sz="2000" spc="-1" strike="noStrike">
-                <a:solidFill>
-                  <a:srgbClr val="000000"/>
-                </a:solidFill>
-                <a:latin typeface="Calibri"/>
+                <a:latin typeface="Arial"/>
               </a:rPr>
               <a:t>Sixth Outline Level</a:t>
             </a:r>
             <a:endParaRPr b="0" lang="en-HK" sz="2000" spc="-1" strike="noStrike">
-              <a:solidFill>
-                <a:srgbClr val="000000"/>
-              </a:solidFill>
-              <a:latin typeface="Calibri"/>
+              <a:latin typeface="Arial"/>
             </a:endParaRPr>
           </a:p>
           <a:p>
@@ -4552,18 +4426,12 @@
             </a:pPr>
             <a:r>
               <a:rPr b="0" lang="en-HK" sz="2000" spc="-1" strike="noStrike">
-                <a:solidFill>
-                  <a:srgbClr val="000000"/>
-                </a:solidFill>
-                <a:latin typeface="Calibri"/>
+                <a:latin typeface="Arial"/>
               </a:rPr>
               <a:t>Seventh Outline Level</a:t>
             </a:r>
             <a:endParaRPr b="0" lang="en-HK" sz="2000" spc="-1" strike="noStrike">
-              <a:solidFill>
-                <a:srgbClr val="000000"/>
-              </a:solidFill>
-              <a:latin typeface="Calibri"/>
+              <a:latin typeface="Arial"/>
             </a:endParaRPr>
           </a:p>
         </p:txBody>
@@ -4594,7 +4462,7 @@
     <p:bg>
       <p:bgPr>
         <a:solidFill>
-          <a:srgbClr val="e0c2cd"/>
+          <a:srgbClr val="800080"/>
         </a:solidFill>
       </p:bgPr>
     </p:bg>
@@ -4621,7 +4489,7 @@
         <p:spPr>
           <a:xfrm>
             <a:off x="380880" y="1415520"/>
-            <a:ext cx="609120" cy="18720"/>
+            <a:ext cx="608760" cy="18360"/>
           </a:xfrm>
           <a:custGeom>
             <a:avLst/>
@@ -4672,7 +4540,7 @@
         <p:spPr>
           <a:xfrm>
             <a:off x="380880" y="1663200"/>
-            <a:ext cx="2152440" cy="190080"/>
+            <a:ext cx="2152440" cy="189720"/>
           </a:xfrm>
           <a:prstGeom prst="rect">
             <a:avLst/>
@@ -4700,17 +4568,17 @@
               <a:buNone/>
             </a:pPr>
             <a:r>
-              <a:rPr b="0" lang="en-US" sz="1050" spc="313" strike="noStrike">
+              <a:rPr b="1" i="1" lang="en-US" sz="1050" spc="310" strike="noStrike">
                 <a:solidFill>
                   <a:srgbClr val="86868b"/>
                 </a:solidFill>
-                <a:latin typeface="Liter"/>
+                <a:latin typeface="Times New Roman"/>
                 <a:ea typeface="Liter"/>
               </a:rPr>
               <a:t>Probability Theory</a:t>
             </a:r>
-            <a:endParaRPr b="0" lang="en-HK" sz="1050" spc="-1" strike="noStrike">
-              <a:latin typeface="Arial"/>
+            <a:endParaRPr b="1" i="1" lang="en-HK" sz="1050" spc="-1" strike="noStrike">
+              <a:latin typeface="Times New Roman"/>
             </a:endParaRPr>
           </a:p>
         </p:txBody>
@@ -4724,7 +4592,7 @@
         <p:spPr>
           <a:xfrm>
             <a:off x="380880" y="2310840"/>
-            <a:ext cx="6609960" cy="2171520"/>
+            <a:ext cx="6610320" cy="2171160"/>
           </a:xfrm>
           <a:prstGeom prst="rect">
             <a:avLst/>
@@ -4762,9 +4630,6 @@
               <a:t>The Birthday</a:t>
             </a:r>
             <a:endParaRPr b="1" i="1" lang="en-HK" sz="9000" spc="-1" strike="noStrike">
-              <a:solidFill>
-                <a:srgbClr val="ffffff"/>
-              </a:solidFill>
               <a:latin typeface="Times New Roman"/>
             </a:endParaRPr>
           </a:p>
@@ -4786,9 +4651,6 @@
               <a:t>Paradox</a:t>
             </a:r>
             <a:endParaRPr b="1" i="1" lang="en-HK" sz="9000" spc="-1" strike="noStrike">
-              <a:solidFill>
-                <a:srgbClr val="ffffff"/>
-              </a:solidFill>
               <a:latin typeface="Times New Roman"/>
             </a:endParaRPr>
           </a:p>
@@ -4803,7 +4665,7 @@
         <p:spPr>
           <a:xfrm>
             <a:off x="380880" y="4787640"/>
-            <a:ext cx="4266720" cy="466200"/>
+            <a:ext cx="4266720" cy="465840"/>
           </a:xfrm>
           <a:prstGeom prst="rect">
             <a:avLst/>
@@ -4831,17 +4693,17 @@
               <a:buNone/>
             </a:pPr>
             <a:r>
-              <a:rPr b="0" lang="en-US" sz="2250" spc="-1" strike="noStrike">
+              <a:rPr b="1" i="1" lang="en-US" sz="2250" spc="-1" strike="noStrike">
                 <a:solidFill>
                   <a:srgbClr val="86868b"/>
                 </a:solidFill>
-                <a:latin typeface="Liter"/>
+                <a:latin typeface="Times New Roman"/>
                 <a:ea typeface="Liter"/>
               </a:rPr>
               <a:t>When Probability Defies Intuition</a:t>
             </a:r>
-            <a:endParaRPr b="0" lang="en-HK" sz="2250" spc="-1" strike="noStrike">
-              <a:latin typeface="Arial"/>
+            <a:endParaRPr b="1" i="1" lang="en-HK" sz="2250" spc="-1" strike="noStrike">
+              <a:latin typeface="Times New Roman"/>
             </a:endParaRPr>
           </a:p>
         </p:txBody>
@@ -4855,7 +4717,7 @@
         <p:spPr>
           <a:xfrm>
             <a:off x="426240" y="6296040"/>
-            <a:ext cx="128160" cy="171000"/>
+            <a:ext cx="127800" cy="170640"/>
           </a:xfrm>
           <a:custGeom>
             <a:avLst/>
@@ -5160,7 +5022,7 @@
         <p:spPr>
           <a:xfrm>
             <a:off x="709560" y="6286680"/>
-            <a:ext cx="1561680" cy="190080"/>
+            <a:ext cx="1561320" cy="189720"/>
           </a:xfrm>
           <a:prstGeom prst="rect">
             <a:avLst/>
@@ -5188,17 +5050,17 @@
               <a:buNone/>
             </a:pPr>
             <a:r>
-              <a:rPr b="0" lang="en-US" sz="1050" spc="-1" strike="noStrike">
+              <a:rPr b="1" i="1" lang="en-US" sz="1050" spc="-1" strike="noStrike">
                 <a:solidFill>
                   <a:srgbClr val="86868b"/>
                 </a:solidFill>
-                <a:latin typeface="Liter"/>
+                <a:latin typeface="Times New Roman"/>
                 <a:ea typeface="Liter"/>
               </a:rPr>
               <a:t>Mathematical Exploration</a:t>
             </a:r>
-            <a:endParaRPr b="0" lang="en-HK" sz="1050" spc="-1" strike="noStrike">
-              <a:latin typeface="Arial"/>
+            <a:endParaRPr b="1" i="1" lang="en-HK" sz="1050" spc="-1" strike="noStrike">
+              <a:latin typeface="Times New Roman"/>
             </a:endParaRPr>
           </a:p>
         </p:txBody>
@@ -5212,7 +5074,7 @@
         <p:spPr>
           <a:xfrm>
             <a:off x="2689200" y="6296040"/>
-            <a:ext cx="171000" cy="171000"/>
+            <a:ext cx="170640" cy="170640"/>
           </a:xfrm>
           <a:custGeom>
             <a:avLst/>
@@ -5345,7 +5207,7 @@
         <p:spPr>
           <a:xfrm>
             <a:off x="2994120" y="6286680"/>
-            <a:ext cx="1399680" cy="190080"/>
+            <a:ext cx="1399320" cy="189720"/>
           </a:xfrm>
           <a:prstGeom prst="rect">
             <a:avLst/>
@@ -5373,17 +5235,17 @@
               <a:buNone/>
             </a:pPr>
             <a:r>
-              <a:rPr b="0" lang="en-US" sz="1050" spc="-1" strike="noStrike">
+              <a:rPr b="1" i="1" lang="en-US" sz="1050" spc="-1" strike="noStrike">
                 <a:solidFill>
                   <a:srgbClr val="86868b"/>
                 </a:solidFill>
-                <a:latin typeface="Liter"/>
+                <a:latin typeface="Times New Roman"/>
                 <a:ea typeface="Liter"/>
               </a:rPr>
               <a:t>Probability &amp; Statistics</a:t>
             </a:r>
-            <a:endParaRPr b="0" lang="en-HK" sz="1050" spc="-1" strike="noStrike">
-              <a:latin typeface="Arial"/>
+            <a:endParaRPr b="1" i="1" lang="en-HK" sz="1050" spc="-1" strike="noStrike">
+              <a:latin typeface="Times New Roman"/>
             </a:endParaRPr>
           </a:p>
         </p:txBody>
@@ -5434,7 +5296,7 @@
         <p:spPr>
           <a:xfrm>
             <a:off x="380880" y="380880"/>
-            <a:ext cx="11486880" cy="151920"/>
+            <a:ext cx="11487600" cy="151560"/>
           </a:xfrm>
           <a:prstGeom prst="rect">
             <a:avLst/>
@@ -5462,7 +5324,7 @@
               <a:buNone/>
             </a:pPr>
             <a:r>
-              <a:rPr b="0" lang="en-US" sz="900" spc="267" strike="noStrike">
+              <a:rPr b="0" lang="en-US" sz="900" spc="265" strike="noStrike">
                 <a:solidFill>
                   <a:srgbClr val="86868b"/>
                 </a:solidFill>
@@ -5486,7 +5348,7 @@
         <p:spPr>
           <a:xfrm>
             <a:off x="380880" y="609480"/>
-            <a:ext cx="11601000" cy="380520"/>
+            <a:ext cx="11601720" cy="380160"/>
           </a:xfrm>
           <a:prstGeom prst="rect">
             <a:avLst/>
@@ -5538,7 +5400,7 @@
         <p:spPr>
           <a:xfrm>
             <a:off x="380880" y="1995480"/>
-            <a:ext cx="5609880" cy="561600"/>
+            <a:ext cx="5609880" cy="561240"/>
           </a:xfrm>
           <a:prstGeom prst="rect">
             <a:avLst/>
@@ -5610,7 +5472,7 @@
         <p:spPr>
           <a:xfrm>
             <a:off x="385920" y="2786040"/>
-            <a:ext cx="5514480" cy="1418760"/>
+            <a:ext cx="5514480" cy="1418400"/>
           </a:xfrm>
           <a:custGeom>
             <a:avLst/>
@@ -5662,7 +5524,7 @@
         <p:spPr>
           <a:xfrm>
             <a:off x="619200" y="3019320"/>
-            <a:ext cx="5114520" cy="190080"/>
+            <a:ext cx="5114520" cy="189720"/>
           </a:xfrm>
           <a:prstGeom prst="rect">
             <a:avLst/>
@@ -5690,7 +5552,7 @@
               <a:buNone/>
             </a:pPr>
             <a:r>
-              <a:rPr b="0" lang="en-US" sz="1050" spc="208" strike="noStrike">
+              <a:rPr b="0" lang="en-US" sz="1050" spc="205" strike="noStrike">
                 <a:solidFill>
                   <a:srgbClr val="86868b"/>
                 </a:solidFill>
@@ -5714,7 +5576,7 @@
         <p:spPr>
           <a:xfrm>
             <a:off x="619200" y="3324240"/>
-            <a:ext cx="5190840" cy="342720"/>
+            <a:ext cx="5190840" cy="342360"/>
           </a:xfrm>
           <a:prstGeom prst="rect">
             <a:avLst/>
@@ -5766,7 +5628,7 @@
         <p:spPr>
           <a:xfrm>
             <a:off x="619200" y="3743280"/>
-            <a:ext cx="5124240" cy="228240"/>
+            <a:ext cx="5124240" cy="227880"/>
           </a:xfrm>
           <a:prstGeom prst="rect">
             <a:avLst/>
@@ -5817,8 +5679,8 @@
         </p:nvSpPr>
         <p:spPr>
           <a:xfrm>
-            <a:off x="6296040" y="1995480"/>
-            <a:ext cx="18720" cy="685440"/>
+            <a:off x="6296400" y="1995480"/>
+            <a:ext cx="18360" cy="685080"/>
           </a:xfrm>
           <a:custGeom>
             <a:avLst/>
@@ -5868,8 +5730,8 @@
         </p:nvSpPr>
         <p:spPr>
           <a:xfrm>
-            <a:off x="6496200" y="1995480"/>
-            <a:ext cx="437760" cy="342720"/>
+            <a:off x="6496560" y="1995480"/>
+            <a:ext cx="437400" cy="342360"/>
           </a:xfrm>
           <a:prstGeom prst="rect">
             <a:avLst/>
@@ -5920,8 +5782,8 @@
         </p:nvSpPr>
         <p:spPr>
           <a:xfrm>
-            <a:off x="6906960" y="2095560"/>
-            <a:ext cx="533160" cy="228240"/>
+            <a:off x="6907320" y="2095560"/>
+            <a:ext cx="532800" cy="227880"/>
           </a:xfrm>
           <a:prstGeom prst="rect">
             <a:avLst/>
@@ -5972,8 +5834,8 @@
         </p:nvSpPr>
         <p:spPr>
           <a:xfrm>
-            <a:off x="6496200" y="2376360"/>
-            <a:ext cx="5428800" cy="304560"/>
+            <a:off x="6496560" y="2376360"/>
+            <a:ext cx="5428800" cy="304200"/>
           </a:xfrm>
           <a:prstGeom prst="rect">
             <a:avLst/>
@@ -6024,8 +5886,8 @@
         </p:nvSpPr>
         <p:spPr>
           <a:xfrm>
-            <a:off x="6296040" y="2833560"/>
-            <a:ext cx="18720" cy="990360"/>
+            <a:off x="6296400" y="2833560"/>
+            <a:ext cx="18360" cy="990000"/>
           </a:xfrm>
           <a:custGeom>
             <a:avLst/>
@@ -6075,8 +5937,8 @@
         </p:nvSpPr>
         <p:spPr>
           <a:xfrm>
-            <a:off x="6496200" y="2833560"/>
-            <a:ext cx="571320" cy="380520"/>
+            <a:off x="6496560" y="2833560"/>
+            <a:ext cx="570960" cy="380160"/>
           </a:xfrm>
           <a:prstGeom prst="rect">
             <a:avLst/>
@@ -6127,8 +5989,8 @@
         </p:nvSpPr>
         <p:spPr>
           <a:xfrm>
-            <a:off x="7011720" y="2943360"/>
-            <a:ext cx="599760" cy="266400"/>
+            <a:off x="7012080" y="2943360"/>
+            <a:ext cx="599400" cy="266040"/>
           </a:xfrm>
           <a:prstGeom prst="rect">
             <a:avLst/>
@@ -6179,8 +6041,8 @@
         </p:nvSpPr>
         <p:spPr>
           <a:xfrm>
-            <a:off x="6496200" y="3252960"/>
-            <a:ext cx="5457600" cy="342720"/>
+            <a:off x="6496560" y="3252960"/>
+            <a:ext cx="5457600" cy="342360"/>
           </a:xfrm>
           <a:prstGeom prst="rect">
             <a:avLst/>
@@ -6231,8 +6093,8 @@
         </p:nvSpPr>
         <p:spPr>
           <a:xfrm>
-            <a:off x="6496200" y="3633840"/>
-            <a:ext cx="5381280" cy="190080"/>
+            <a:off x="6496560" y="3633840"/>
+            <a:ext cx="5381280" cy="189720"/>
           </a:xfrm>
           <a:prstGeom prst="rect">
             <a:avLst/>
@@ -6283,8 +6145,8 @@
         </p:nvSpPr>
         <p:spPr>
           <a:xfrm>
-            <a:off x="6296040" y="3976560"/>
-            <a:ext cx="18720" cy="685440"/>
+            <a:off x="6296400" y="3976560"/>
+            <a:ext cx="18360" cy="685080"/>
           </a:xfrm>
           <a:custGeom>
             <a:avLst/>
@@ -6334,8 +6196,8 @@
         </p:nvSpPr>
         <p:spPr>
           <a:xfrm>
-            <a:off x="6496200" y="3976560"/>
-            <a:ext cx="485280" cy="342720"/>
+            <a:off x="6496560" y="3976560"/>
+            <a:ext cx="484920" cy="342360"/>
           </a:xfrm>
           <a:prstGeom prst="rect">
             <a:avLst/>
@@ -6386,8 +6248,8 @@
         </p:nvSpPr>
         <p:spPr>
           <a:xfrm>
-            <a:off x="6957360" y="4076640"/>
-            <a:ext cx="533160" cy="228240"/>
+            <a:off x="6957720" y="4076640"/>
+            <a:ext cx="532800" cy="227880"/>
           </a:xfrm>
           <a:prstGeom prst="rect">
             <a:avLst/>
@@ -6438,8 +6300,8 @@
         </p:nvSpPr>
         <p:spPr>
           <a:xfrm>
-            <a:off x="6496200" y="4357800"/>
-            <a:ext cx="5428800" cy="304560"/>
+            <a:off x="6496560" y="4357800"/>
+            <a:ext cx="5428800" cy="304200"/>
           </a:xfrm>
           <a:prstGeom prst="rect">
             <a:avLst/>
@@ -6491,7 +6353,7 @@
         <p:spPr>
           <a:xfrm>
             <a:off x="380880" y="4971960"/>
-            <a:ext cx="11429640" cy="9000"/>
+            <a:ext cx="11430360" cy="8640"/>
           </a:xfrm>
           <a:custGeom>
             <a:avLst/>
@@ -6542,7 +6404,7 @@
         <p:spPr>
           <a:xfrm>
             <a:off x="390600" y="5253120"/>
-            <a:ext cx="171000" cy="151920"/>
+            <a:ext cx="170640" cy="151560"/>
           </a:xfrm>
           <a:custGeom>
             <a:avLst/>
@@ -6656,7 +6518,7 @@
         <p:spPr>
           <a:xfrm>
             <a:off x="628560" y="5205240"/>
-            <a:ext cx="11258280" cy="495000"/>
+            <a:ext cx="11259000" cy="494640"/>
           </a:xfrm>
           <a:prstGeom prst="rect">
             <a:avLst/>
@@ -6755,7 +6617,7 @@
         <p:spPr>
           <a:xfrm>
             <a:off x="380880" y="1850760"/>
-            <a:ext cx="761760" cy="18720"/>
+            <a:ext cx="761400" cy="18360"/>
           </a:xfrm>
           <a:custGeom>
             <a:avLst/>
@@ -6806,7 +6668,7 @@
         <p:spPr>
           <a:xfrm>
             <a:off x="380880" y="2174760"/>
-            <a:ext cx="9153000" cy="190080"/>
+            <a:ext cx="9153360" cy="189720"/>
           </a:xfrm>
           <a:prstGeom prst="rect">
             <a:avLst/>
@@ -6834,7 +6696,7 @@
               <a:buNone/>
             </a:pPr>
             <a:r>
-              <a:rPr b="0" lang="en-US" sz="1050" spc="313" strike="noStrike">
+              <a:rPr b="0" lang="en-US" sz="1050" spc="310" strike="noStrike">
                 <a:solidFill>
                   <a:srgbClr val="86868b"/>
                 </a:solidFill>
@@ -6858,7 +6720,7 @@
         <p:spPr>
           <a:xfrm>
             <a:off x="380880" y="2593800"/>
-            <a:ext cx="9543600" cy="1733040"/>
+            <a:ext cx="9543960" cy="1732680"/>
           </a:xfrm>
           <a:prstGeom prst="rect">
             <a:avLst/>
@@ -6931,7 +6793,7 @@
         <p:spPr>
           <a:xfrm>
             <a:off x="380880" y="4635720"/>
-            <a:ext cx="5600520" cy="371160"/>
+            <a:ext cx="5600520" cy="370800"/>
           </a:xfrm>
           <a:prstGeom prst="rect">
             <a:avLst/>
@@ -6982,8 +6844,8 @@
         </p:nvSpPr>
         <p:spPr>
           <a:xfrm>
-            <a:off x="9471600" y="2476440"/>
-            <a:ext cx="3295440" cy="1904760"/>
+            <a:off x="9472320" y="2476440"/>
+            <a:ext cx="3295440" cy="1904400"/>
           </a:xfrm>
           <a:prstGeom prst="rect">
             <a:avLst/>
@@ -7072,7 +6934,7 @@
         <p:spPr>
           <a:xfrm>
             <a:off x="380880" y="380880"/>
-            <a:ext cx="11486880" cy="151920"/>
+            <a:ext cx="11487600" cy="151560"/>
           </a:xfrm>
           <a:prstGeom prst="rect">
             <a:avLst/>
@@ -7100,7 +6962,7 @@
               <a:buNone/>
             </a:pPr>
             <a:r>
-              <a:rPr b="0" lang="en-US" sz="900" spc="267" strike="noStrike">
+              <a:rPr b="0" lang="en-US" sz="900" spc="265" strike="noStrike">
                 <a:solidFill>
                   <a:srgbClr val="86868b"/>
                 </a:solidFill>
@@ -7124,7 +6986,7 @@
         <p:spPr>
           <a:xfrm>
             <a:off x="380880" y="609480"/>
-            <a:ext cx="11601000" cy="380520"/>
+            <a:ext cx="11601720" cy="380160"/>
           </a:xfrm>
           <a:prstGeom prst="rect">
             <a:avLst/>
@@ -7176,7 +7038,7 @@
         <p:spPr>
           <a:xfrm>
             <a:off x="380880" y="2019240"/>
-            <a:ext cx="8629200" cy="618840"/>
+            <a:ext cx="8629560" cy="618480"/>
           </a:xfrm>
           <a:prstGeom prst="rect">
             <a:avLst/>
@@ -7268,7 +7130,7 @@
         <p:spPr>
           <a:xfrm>
             <a:off x="380880" y="3029040"/>
-            <a:ext cx="5524200" cy="18720"/>
+            <a:ext cx="5524200" cy="18360"/>
           </a:xfrm>
           <a:custGeom>
             <a:avLst/>
@@ -7319,7 +7181,7 @@
         <p:spPr>
           <a:xfrm>
             <a:off x="380880" y="3267000"/>
-            <a:ext cx="5590800" cy="190080"/>
+            <a:ext cx="5590800" cy="189720"/>
           </a:xfrm>
           <a:prstGeom prst="rect">
             <a:avLst/>
@@ -7347,7 +7209,7 @@
               <a:buNone/>
             </a:pPr>
             <a:r>
-              <a:rPr b="0" lang="en-US" sz="1050" spc="208" strike="noStrike">
+              <a:rPr b="0" lang="en-US" sz="1050" spc="205" strike="noStrike">
                 <a:solidFill>
                   <a:srgbClr val="86868b"/>
                 </a:solidFill>
@@ -7371,7 +7233,7 @@
         <p:spPr>
           <a:xfrm>
             <a:off x="380880" y="3610080"/>
-            <a:ext cx="5752800" cy="456840"/>
+            <a:ext cx="5752800" cy="456480"/>
           </a:xfrm>
           <a:prstGeom prst="rect">
             <a:avLst/>
@@ -7423,7 +7285,7 @@
         <p:spPr>
           <a:xfrm>
             <a:off x="380880" y="4143240"/>
-            <a:ext cx="5600520" cy="228240"/>
+            <a:ext cx="5600520" cy="227880"/>
           </a:xfrm>
           <a:prstGeom prst="rect">
             <a:avLst/>
@@ -7475,7 +7337,7 @@
         <p:spPr>
           <a:xfrm>
             <a:off x="380880" y="4524480"/>
-            <a:ext cx="5600520" cy="247320"/>
+            <a:ext cx="5600520" cy="246960"/>
           </a:xfrm>
           <a:prstGeom prst="rect">
             <a:avLst/>
@@ -7527,7 +7389,7 @@
         <p:spPr>
           <a:xfrm>
             <a:off x="380880" y="4886280"/>
-            <a:ext cx="5600520" cy="247320"/>
+            <a:ext cx="5600520" cy="246960"/>
           </a:xfrm>
           <a:prstGeom prst="rect">
             <a:avLst/>
@@ -7578,8 +7440,8 @@
         </p:nvSpPr>
         <p:spPr>
           <a:xfrm>
-            <a:off x="6286680" y="3029040"/>
-            <a:ext cx="5524200" cy="18720"/>
+            <a:off x="6287040" y="3029040"/>
+            <a:ext cx="5524200" cy="18360"/>
           </a:xfrm>
           <a:custGeom>
             <a:avLst/>
@@ -7629,8 +7491,8 @@
         </p:nvSpPr>
         <p:spPr>
           <a:xfrm>
-            <a:off x="6286680" y="3267000"/>
-            <a:ext cx="5590800" cy="190080"/>
+            <a:off x="6287040" y="3267000"/>
+            <a:ext cx="5590800" cy="189720"/>
           </a:xfrm>
           <a:prstGeom prst="rect">
             <a:avLst/>
@@ -7658,7 +7520,7 @@
               <a:buNone/>
             </a:pPr>
             <a:r>
-              <a:rPr b="0" lang="en-US" sz="1050" spc="208" strike="noStrike">
+              <a:rPr b="0" lang="en-US" sz="1050" spc="205" strike="noStrike">
                 <a:solidFill>
                   <a:srgbClr val="0071e3"/>
                 </a:solidFill>
@@ -7681,8 +7543,8 @@
         </p:nvSpPr>
         <p:spPr>
           <a:xfrm>
-            <a:off x="6286680" y="3610080"/>
-            <a:ext cx="5752800" cy="456840"/>
+            <a:off x="6287040" y="3610080"/>
+            <a:ext cx="5752800" cy="456480"/>
           </a:xfrm>
           <a:prstGeom prst="rect">
             <a:avLst/>
@@ -7733,8 +7595,8 @@
         </p:nvSpPr>
         <p:spPr>
           <a:xfrm>
-            <a:off x="6286680" y="4143240"/>
-            <a:ext cx="5600520" cy="228240"/>
+            <a:off x="6287040" y="4143240"/>
+            <a:ext cx="5600520" cy="227880"/>
           </a:xfrm>
           <a:prstGeom prst="rect">
             <a:avLst/>
@@ -7785,8 +7647,8 @@
         </p:nvSpPr>
         <p:spPr>
           <a:xfrm>
-            <a:off x="6286680" y="4524480"/>
-            <a:ext cx="5600520" cy="247320"/>
+            <a:off x="6287040" y="4524480"/>
+            <a:ext cx="5600520" cy="246960"/>
           </a:xfrm>
           <a:prstGeom prst="rect">
             <a:avLst/>
@@ -7837,8 +7699,8 @@
         </p:nvSpPr>
         <p:spPr>
           <a:xfrm>
-            <a:off x="6286680" y="4886280"/>
-            <a:ext cx="5600520" cy="247320"/>
+            <a:off x="6287040" y="4886280"/>
+            <a:ext cx="5600520" cy="246960"/>
           </a:xfrm>
           <a:prstGeom prst="rect">
             <a:avLst/>
@@ -7890,7 +7752,7 @@
         <p:spPr>
           <a:xfrm>
             <a:off x="380880" y="6091200"/>
-            <a:ext cx="11429640" cy="9000"/>
+            <a:ext cx="11430360" cy="8640"/>
           </a:xfrm>
           <a:custGeom>
             <a:avLst/>
@@ -7941,7 +7803,7 @@
         <p:spPr>
           <a:xfrm>
             <a:off x="399960" y="6286680"/>
-            <a:ext cx="151920" cy="151920"/>
+            <a:ext cx="151560" cy="151560"/>
           </a:xfrm>
           <a:custGeom>
             <a:avLst/>
@@ -8118,7 +7980,7 @@
         <p:spPr>
           <a:xfrm>
             <a:off x="628560" y="6248520"/>
-            <a:ext cx="11258280" cy="228240"/>
+            <a:ext cx="11259000" cy="227880"/>
           </a:xfrm>
           <a:prstGeom prst="rect">
             <a:avLst/>
@@ -8217,7 +8079,7 @@
         <p:spPr>
           <a:xfrm>
             <a:off x="380880" y="380880"/>
-            <a:ext cx="11486880" cy="151920"/>
+            <a:ext cx="11487600" cy="151560"/>
           </a:xfrm>
           <a:prstGeom prst="rect">
             <a:avLst/>
@@ -8245,7 +8107,7 @@
               <a:buNone/>
             </a:pPr>
             <a:r>
-              <a:rPr b="0" lang="en-US" sz="900" spc="267" strike="noStrike">
+              <a:rPr b="0" lang="en-US" sz="900" spc="265" strike="noStrike">
                 <a:solidFill>
                   <a:srgbClr val="86868b"/>
                 </a:solidFill>
@@ -8269,7 +8131,7 @@
         <p:spPr>
           <a:xfrm>
             <a:off x="380880" y="609480"/>
-            <a:ext cx="11601000" cy="380520"/>
+            <a:ext cx="11601720" cy="380160"/>
           </a:xfrm>
           <a:prstGeom prst="rect">
             <a:avLst/>
@@ -8321,7 +8183,7 @@
         <p:spPr>
           <a:xfrm>
             <a:off x="380880" y="1962000"/>
-            <a:ext cx="8629200" cy="618840"/>
+            <a:ext cx="8629560" cy="618480"/>
           </a:xfrm>
           <a:prstGeom prst="rect">
             <a:avLst/>
@@ -8393,7 +8255,7 @@
         <p:spPr>
           <a:xfrm>
             <a:off x="380880" y="2886120"/>
-            <a:ext cx="5590800" cy="190080"/>
+            <a:ext cx="5590800" cy="189720"/>
           </a:xfrm>
           <a:prstGeom prst="rect">
             <a:avLst/>
@@ -8421,7 +8283,7 @@
               <a:buNone/>
             </a:pPr>
             <a:r>
-              <a:rPr b="0" lang="en-US" sz="1050" spc="208" strike="noStrike">
+              <a:rPr b="0" lang="en-US" sz="1050" spc="205" strike="noStrike">
                 <a:solidFill>
                   <a:srgbClr val="86868b"/>
                 </a:solidFill>
@@ -8445,7 +8307,7 @@
         <p:spPr>
           <a:xfrm>
             <a:off x="380880" y="3228840"/>
-            <a:ext cx="990360" cy="228240"/>
+            <a:ext cx="990000" cy="227880"/>
           </a:xfrm>
           <a:prstGeom prst="rect">
             <a:avLst/>
@@ -8497,7 +8359,7 @@
         <p:spPr>
           <a:xfrm>
             <a:off x="1447920" y="3305160"/>
-            <a:ext cx="4457520" cy="75960"/>
+            <a:ext cx="4457520" cy="75600"/>
           </a:xfrm>
           <a:custGeom>
             <a:avLst/>
@@ -8548,7 +8410,7 @@
         <p:spPr>
           <a:xfrm>
             <a:off x="1447920" y="3305160"/>
-            <a:ext cx="894960" cy="75960"/>
+            <a:ext cx="894600" cy="75600"/>
           </a:xfrm>
           <a:custGeom>
             <a:avLst/>
@@ -8599,7 +8461,7 @@
         <p:spPr>
           <a:xfrm>
             <a:off x="380880" y="3571920"/>
-            <a:ext cx="990360" cy="228240"/>
+            <a:ext cx="990000" cy="227880"/>
           </a:xfrm>
           <a:prstGeom prst="rect">
             <a:avLst/>
@@ -8651,7 +8513,7 @@
         <p:spPr>
           <a:xfrm>
             <a:off x="1447920" y="3648240"/>
-            <a:ext cx="4457520" cy="75960"/>
+            <a:ext cx="4457520" cy="75600"/>
           </a:xfrm>
           <a:custGeom>
             <a:avLst/>
@@ -8702,7 +8564,7 @@
         <p:spPr>
           <a:xfrm>
             <a:off x="1447920" y="3648240"/>
-            <a:ext cx="1780920" cy="75960"/>
+            <a:ext cx="1780560" cy="75600"/>
           </a:xfrm>
           <a:custGeom>
             <a:avLst/>
@@ -8753,7 +8615,7 @@
         <p:spPr>
           <a:xfrm>
             <a:off x="380880" y="3914640"/>
-            <a:ext cx="990360" cy="228240"/>
+            <a:ext cx="990000" cy="227880"/>
           </a:xfrm>
           <a:prstGeom prst="rect">
             <a:avLst/>
@@ -8805,7 +8667,7 @@
         <p:spPr>
           <a:xfrm>
             <a:off x="1447920" y="3990960"/>
-            <a:ext cx="4457520" cy="75960"/>
+            <a:ext cx="4457520" cy="75600"/>
           </a:xfrm>
           <a:custGeom>
             <a:avLst/>
@@ -8856,7 +8718,7 @@
         <p:spPr>
           <a:xfrm>
             <a:off x="1447920" y="3990960"/>
-            <a:ext cx="2676240" cy="75960"/>
+            <a:ext cx="2676240" cy="75600"/>
           </a:xfrm>
           <a:custGeom>
             <a:avLst/>
@@ -8907,7 +8769,7 @@
         <p:spPr>
           <a:xfrm>
             <a:off x="380880" y="4295880"/>
-            <a:ext cx="5600520" cy="247320"/>
+            <a:ext cx="5600520" cy="246960"/>
           </a:xfrm>
           <a:prstGeom prst="rect">
             <a:avLst/>
@@ -8958,8 +8820,8 @@
         </p:nvSpPr>
         <p:spPr>
           <a:xfrm>
-            <a:off x="6286680" y="2886120"/>
-            <a:ext cx="5590800" cy="190080"/>
+            <a:off x="6287040" y="2886120"/>
+            <a:ext cx="5590800" cy="189720"/>
           </a:xfrm>
           <a:prstGeom prst="rect">
             <a:avLst/>
@@ -8987,7 +8849,7 @@
               <a:buNone/>
             </a:pPr>
             <a:r>
-              <a:rPr b="0" lang="en-US" sz="1050" spc="208" strike="noStrike">
+              <a:rPr b="0" lang="en-US" sz="1050" spc="205" strike="noStrike">
                 <a:solidFill>
                   <a:srgbClr val="0071e3"/>
                 </a:solidFill>
@@ -9010,8 +8872,8 @@
         </p:nvSpPr>
         <p:spPr>
           <a:xfrm>
-            <a:off x="6286680" y="3228840"/>
-            <a:ext cx="990360" cy="228240"/>
+            <a:off x="6287040" y="3228840"/>
+            <a:ext cx="990000" cy="227880"/>
           </a:xfrm>
           <a:prstGeom prst="rect">
             <a:avLst/>
@@ -9062,8 +8924,8 @@
         </p:nvSpPr>
         <p:spPr>
           <a:xfrm>
-            <a:off x="7353360" y="3305160"/>
-            <a:ext cx="3695400" cy="75960"/>
+            <a:off x="7353720" y="3305160"/>
+            <a:ext cx="3695400" cy="75600"/>
           </a:xfrm>
           <a:custGeom>
             <a:avLst/>
@@ -9113,8 +8975,8 @@
         </p:nvSpPr>
         <p:spPr>
           <a:xfrm>
-            <a:off x="7353360" y="3305160"/>
-            <a:ext cx="447480" cy="75960"/>
+            <a:off x="7353720" y="3305160"/>
+            <a:ext cx="447120" cy="75600"/>
           </a:xfrm>
           <a:custGeom>
             <a:avLst/>
@@ -9164,8 +9026,8 @@
         </p:nvSpPr>
         <p:spPr>
           <a:xfrm>
-            <a:off x="11201400" y="3247920"/>
-            <a:ext cx="676080" cy="190080"/>
+            <a:off x="11202120" y="3247920"/>
+            <a:ext cx="675720" cy="189720"/>
           </a:xfrm>
           <a:prstGeom prst="rect">
             <a:avLst/>
@@ -9216,8 +9078,8 @@
         </p:nvSpPr>
         <p:spPr>
           <a:xfrm>
-            <a:off x="6286680" y="3571920"/>
-            <a:ext cx="990360" cy="228240"/>
+            <a:off x="6287040" y="3571920"/>
+            <a:ext cx="990000" cy="227880"/>
           </a:xfrm>
           <a:prstGeom prst="rect">
             <a:avLst/>
@@ -9268,8 +9130,8 @@
         </p:nvSpPr>
         <p:spPr>
           <a:xfrm>
-            <a:off x="7353360" y="3648240"/>
-            <a:ext cx="3695400" cy="75960"/>
+            <a:off x="7353720" y="3648240"/>
+            <a:ext cx="3695400" cy="75600"/>
           </a:xfrm>
           <a:custGeom>
             <a:avLst/>
@@ -9319,8 +9181,8 @@
         </p:nvSpPr>
         <p:spPr>
           <a:xfrm>
-            <a:off x="7353360" y="3648240"/>
-            <a:ext cx="1847520" cy="75960"/>
+            <a:off x="7353720" y="3648240"/>
+            <a:ext cx="1847160" cy="75600"/>
           </a:xfrm>
           <a:custGeom>
             <a:avLst/>
@@ -9370,8 +9232,8 @@
         </p:nvSpPr>
         <p:spPr>
           <a:xfrm>
-            <a:off x="11201400" y="3591000"/>
-            <a:ext cx="676080" cy="190080"/>
+            <a:off x="11202120" y="3591000"/>
+            <a:ext cx="675720" cy="189720"/>
           </a:xfrm>
           <a:prstGeom prst="rect">
             <a:avLst/>
@@ -9422,8 +9284,8 @@
         </p:nvSpPr>
         <p:spPr>
           <a:xfrm>
-            <a:off x="6286680" y="3990960"/>
-            <a:ext cx="990360" cy="228240"/>
+            <a:off x="6287040" y="3990960"/>
+            <a:ext cx="990000" cy="227880"/>
           </a:xfrm>
           <a:prstGeom prst="rect">
             <a:avLst/>
@@ -9474,8 +9336,8 @@
         </p:nvSpPr>
         <p:spPr>
           <a:xfrm>
-            <a:off x="7353360" y="4067280"/>
-            <a:ext cx="3695400" cy="75960"/>
+            <a:off x="7353720" y="4067280"/>
+            <a:ext cx="3695400" cy="75600"/>
           </a:xfrm>
           <a:custGeom>
             <a:avLst/>
@@ -9525,8 +9387,8 @@
         </p:nvSpPr>
         <p:spPr>
           <a:xfrm>
-            <a:off x="7353360" y="4067280"/>
-            <a:ext cx="3580920" cy="75960"/>
+            <a:off x="7353720" y="4067280"/>
+            <a:ext cx="3580920" cy="75600"/>
           </a:xfrm>
           <a:custGeom>
             <a:avLst/>
@@ -9576,8 +9438,8 @@
         </p:nvSpPr>
         <p:spPr>
           <a:xfrm>
-            <a:off x="11201400" y="3914640"/>
-            <a:ext cx="676080" cy="380520"/>
+            <a:off x="11202120" y="3914640"/>
+            <a:ext cx="675720" cy="380160"/>
           </a:xfrm>
           <a:prstGeom prst="rect">
             <a:avLst/>
@@ -9628,8 +9490,8 @@
         </p:nvSpPr>
         <p:spPr>
           <a:xfrm>
-            <a:off x="6286680" y="4448160"/>
-            <a:ext cx="5600520" cy="247320"/>
+            <a:off x="6287040" y="4448160"/>
+            <a:ext cx="5600520" cy="246960"/>
           </a:xfrm>
           <a:prstGeom prst="rect">
             <a:avLst/>
@@ -9681,7 +9543,7 @@
         <p:spPr>
           <a:xfrm>
             <a:off x="380880" y="5005440"/>
-            <a:ext cx="11429640" cy="9000"/>
+            <a:ext cx="11430360" cy="8640"/>
           </a:xfrm>
           <a:custGeom>
             <a:avLst/>
@@ -9732,7 +9594,7 @@
         <p:spPr>
           <a:xfrm>
             <a:off x="399960" y="5286240"/>
-            <a:ext cx="151920" cy="151920"/>
+            <a:ext cx="151560" cy="151560"/>
           </a:xfrm>
           <a:custGeom>
             <a:avLst/>
@@ -9874,7 +9736,7 @@
         <p:spPr>
           <a:xfrm>
             <a:off x="628560" y="5238720"/>
-            <a:ext cx="11258280" cy="495000"/>
+            <a:ext cx="11259000" cy="494640"/>
           </a:xfrm>
           <a:prstGeom prst="rect">
             <a:avLst/>
@@ -9973,7 +9835,7 @@
         <p:spPr>
           <a:xfrm>
             <a:off x="380880" y="1850760"/>
-            <a:ext cx="761760" cy="18720"/>
+            <a:ext cx="761400" cy="18360"/>
           </a:xfrm>
           <a:custGeom>
             <a:avLst/>
@@ -10024,7 +9886,7 @@
         <p:spPr>
           <a:xfrm>
             <a:off x="380880" y="2174760"/>
-            <a:ext cx="9162720" cy="190080"/>
+            <a:ext cx="9163080" cy="189720"/>
           </a:xfrm>
           <a:prstGeom prst="rect">
             <a:avLst/>
@@ -10052,7 +9914,7 @@
               <a:buNone/>
             </a:pPr>
             <a:r>
-              <a:rPr b="0" lang="en-US" sz="1050" spc="313" strike="noStrike">
+              <a:rPr b="0" lang="en-US" sz="1050" spc="310" strike="noStrike">
                 <a:solidFill>
                   <a:srgbClr val="86868b"/>
                 </a:solidFill>
@@ -10076,7 +9938,7 @@
         <p:spPr>
           <a:xfrm>
             <a:off x="380880" y="2593800"/>
-            <a:ext cx="9553320" cy="1733040"/>
+            <a:ext cx="9553680" cy="1732680"/>
           </a:xfrm>
           <a:prstGeom prst="rect">
             <a:avLst/>
@@ -10149,7 +10011,7 @@
         <p:spPr>
           <a:xfrm>
             <a:off x="380880" y="4635720"/>
-            <a:ext cx="5600520" cy="371160"/>
+            <a:ext cx="5600520" cy="370800"/>
           </a:xfrm>
           <a:prstGeom prst="rect">
             <a:avLst/>
@@ -10200,8 +10062,8 @@
         </p:nvSpPr>
         <p:spPr>
           <a:xfrm>
-            <a:off x="9473400" y="2476440"/>
-            <a:ext cx="3285720" cy="1904760"/>
+            <a:off x="9474120" y="2476440"/>
+            <a:ext cx="3285720" cy="1904400"/>
           </a:xfrm>
           <a:prstGeom prst="rect">
             <a:avLst/>
@@ -10290,7 +10152,7 @@
         <p:spPr>
           <a:xfrm>
             <a:off x="380880" y="380880"/>
-            <a:ext cx="11486880" cy="151920"/>
+            <a:ext cx="11487600" cy="151560"/>
           </a:xfrm>
           <a:prstGeom prst="rect">
             <a:avLst/>
@@ -10318,7 +10180,7 @@
               <a:buNone/>
             </a:pPr>
             <a:r>
-              <a:rPr b="0" lang="en-US" sz="900" spc="267" strike="noStrike">
+              <a:rPr b="0" lang="en-US" sz="900" spc="265" strike="noStrike">
                 <a:solidFill>
                   <a:srgbClr val="86868b"/>
                 </a:solidFill>
@@ -10342,7 +10204,7 @@
         <p:spPr>
           <a:xfrm>
             <a:off x="380880" y="609480"/>
-            <a:ext cx="11601000" cy="380520"/>
+            <a:ext cx="11601720" cy="380160"/>
           </a:xfrm>
           <a:prstGeom prst="rect">
             <a:avLst/>
@@ -10394,7 +10256,7 @@
         <p:spPr>
           <a:xfrm>
             <a:off x="380880" y="1848960"/>
-            <a:ext cx="5609880" cy="561600"/>
+            <a:ext cx="5609880" cy="561240"/>
           </a:xfrm>
           <a:prstGeom prst="rect">
             <a:avLst/>
@@ -10466,7 +10328,7 @@
         <p:spPr>
           <a:xfrm>
             <a:off x="380880" y="2596680"/>
-            <a:ext cx="5600520" cy="495000"/>
+            <a:ext cx="5600520" cy="494640"/>
           </a:xfrm>
           <a:prstGeom prst="rect">
             <a:avLst/>
@@ -10528,7 +10390,7 @@
         <p:spPr>
           <a:xfrm>
             <a:off x="380880" y="3244320"/>
-            <a:ext cx="5600520" cy="495000"/>
+            <a:ext cx="5600520" cy="494640"/>
           </a:xfrm>
           <a:prstGeom prst="rect">
             <a:avLst/>
@@ -10579,8 +10441,8 @@
         </p:nvSpPr>
         <p:spPr>
           <a:xfrm>
-            <a:off x="6296040" y="1848960"/>
-            <a:ext cx="18720" cy="799920"/>
+            <a:off x="6296400" y="1848960"/>
+            <a:ext cx="18360" cy="799560"/>
           </a:xfrm>
           <a:custGeom>
             <a:avLst/>
@@ -10630,8 +10492,8 @@
         </p:nvSpPr>
         <p:spPr>
           <a:xfrm>
-            <a:off x="6496200" y="1848960"/>
-            <a:ext cx="5381280" cy="190080"/>
+            <a:off x="6496560" y="1848960"/>
+            <a:ext cx="5381280" cy="189720"/>
           </a:xfrm>
           <a:prstGeom prst="rect">
             <a:avLst/>
@@ -10659,7 +10521,7 @@
               <a:buNone/>
             </a:pPr>
             <a:r>
-              <a:rPr b="0" lang="en-US" sz="1050" spc="208" strike="noStrike">
+              <a:rPr b="0" lang="en-US" sz="1050" spc="205" strike="noStrike">
                 <a:solidFill>
                   <a:srgbClr val="0071e3"/>
                 </a:solidFill>
@@ -10682,8 +10544,8 @@
         </p:nvSpPr>
         <p:spPr>
           <a:xfrm>
-            <a:off x="6496200" y="2115720"/>
-            <a:ext cx="5428800" cy="304560"/>
+            <a:off x="6496560" y="2115720"/>
+            <a:ext cx="5428800" cy="304200"/>
           </a:xfrm>
           <a:prstGeom prst="rect">
             <a:avLst/>
@@ -10734,8 +10596,8 @@
         </p:nvSpPr>
         <p:spPr>
           <a:xfrm>
-            <a:off x="6496200" y="2458800"/>
-            <a:ext cx="5381280" cy="190080"/>
+            <a:off x="6496560" y="2458800"/>
+            <a:ext cx="5381280" cy="189720"/>
           </a:xfrm>
           <a:prstGeom prst="rect">
             <a:avLst/>
@@ -10786,8 +10648,8 @@
         </p:nvSpPr>
         <p:spPr>
           <a:xfrm>
-            <a:off x="6296040" y="2801520"/>
-            <a:ext cx="18720" cy="799920"/>
+            <a:off x="6296400" y="2801520"/>
+            <a:ext cx="18360" cy="799560"/>
           </a:xfrm>
           <a:custGeom>
             <a:avLst/>
@@ -10837,8 +10699,8 @@
         </p:nvSpPr>
         <p:spPr>
           <a:xfrm>
-            <a:off x="6496200" y="2801520"/>
-            <a:ext cx="5381280" cy="190080"/>
+            <a:off x="6496560" y="2801520"/>
+            <a:ext cx="5381280" cy="189720"/>
           </a:xfrm>
           <a:prstGeom prst="rect">
             <a:avLst/>
@@ -10866,7 +10728,7 @@
               <a:buNone/>
             </a:pPr>
             <a:r>
-              <a:rPr b="0" lang="en-US" sz="1050" spc="208" strike="noStrike">
+              <a:rPr b="0" lang="en-US" sz="1050" spc="205" strike="noStrike">
                 <a:solidFill>
                   <a:srgbClr val="86868b"/>
                 </a:solidFill>
@@ -10889,8 +10751,8 @@
         </p:nvSpPr>
         <p:spPr>
           <a:xfrm>
-            <a:off x="6496200" y="3068280"/>
-            <a:ext cx="5428800" cy="304560"/>
+            <a:off x="6496560" y="3068280"/>
+            <a:ext cx="5428800" cy="304200"/>
           </a:xfrm>
           <a:prstGeom prst="rect">
             <a:avLst/>
@@ -10941,8 +10803,8 @@
         </p:nvSpPr>
         <p:spPr>
           <a:xfrm>
-            <a:off x="6496200" y="3411000"/>
-            <a:ext cx="5381280" cy="190080"/>
+            <a:off x="6496560" y="3411000"/>
+            <a:ext cx="5381280" cy="189720"/>
           </a:xfrm>
           <a:prstGeom prst="rect">
             <a:avLst/>
@@ -10993,8 +10855,8 @@
         </p:nvSpPr>
         <p:spPr>
           <a:xfrm>
-            <a:off x="6296040" y="3754080"/>
-            <a:ext cx="18720" cy="799920"/>
+            <a:off x="6296400" y="3754080"/>
+            <a:ext cx="18360" cy="799560"/>
           </a:xfrm>
           <a:custGeom>
             <a:avLst/>
@@ -11044,8 +10906,8 @@
         </p:nvSpPr>
         <p:spPr>
           <a:xfrm>
-            <a:off x="6496200" y="3754080"/>
-            <a:ext cx="5381280" cy="190080"/>
+            <a:off x="6496560" y="3754080"/>
+            <a:ext cx="5381280" cy="189720"/>
           </a:xfrm>
           <a:prstGeom prst="rect">
             <a:avLst/>
@@ -11073,7 +10935,7 @@
               <a:buNone/>
             </a:pPr>
             <a:r>
-              <a:rPr b="0" lang="en-US" sz="1050" spc="208" strike="noStrike">
+              <a:rPr b="0" lang="en-US" sz="1050" spc="205" strike="noStrike">
                 <a:solidFill>
                   <a:srgbClr val="86868b"/>
                 </a:solidFill>
@@ -11096,8 +10958,8 @@
         </p:nvSpPr>
         <p:spPr>
           <a:xfrm>
-            <a:off x="6496200" y="4020840"/>
-            <a:ext cx="5428800" cy="304560"/>
+            <a:off x="6496560" y="4020840"/>
+            <a:ext cx="5428800" cy="304200"/>
           </a:xfrm>
           <a:prstGeom prst="rect">
             <a:avLst/>
@@ -11148,8 +11010,8 @@
         </p:nvSpPr>
         <p:spPr>
           <a:xfrm>
-            <a:off x="6496200" y="4363560"/>
-            <a:ext cx="5381280" cy="190080"/>
+            <a:off x="6496560" y="4363560"/>
+            <a:ext cx="5381280" cy="189720"/>
           </a:xfrm>
           <a:prstGeom prst="rect">
             <a:avLst/>
@@ -11201,7 +11063,7 @@
         <p:spPr>
           <a:xfrm>
             <a:off x="380880" y="4787640"/>
-            <a:ext cx="11429640" cy="9000"/>
+            <a:ext cx="11430360" cy="8640"/>
           </a:xfrm>
           <a:custGeom>
             <a:avLst/>
@@ -11252,7 +11114,7 @@
         <p:spPr>
           <a:xfrm>
             <a:off x="380880" y="5020920"/>
-            <a:ext cx="11496240" cy="190080"/>
+            <a:ext cx="11496960" cy="189720"/>
           </a:xfrm>
           <a:prstGeom prst="rect">
             <a:avLst/>
@@ -11280,7 +11142,7 @@
               <a:buNone/>
             </a:pPr>
             <a:r>
-              <a:rPr b="0" lang="en-US" sz="1050" spc="208" strike="noStrike">
+              <a:rPr b="0" lang="en-US" sz="1050" spc="205" strike="noStrike">
                 <a:solidFill>
                   <a:srgbClr val="86868b"/>
                 </a:solidFill>
@@ -11304,7 +11166,7 @@
         <p:spPr>
           <a:xfrm>
             <a:off x="380880" y="5363640"/>
-            <a:ext cx="190080" cy="151920"/>
+            <a:ext cx="189720" cy="151560"/>
           </a:xfrm>
           <a:custGeom>
             <a:avLst/>
@@ -11546,7 +11408,7 @@
         <p:spPr>
           <a:xfrm>
             <a:off x="628560" y="5325840"/>
-            <a:ext cx="3485880" cy="228240"/>
+            <a:ext cx="3485880" cy="227880"/>
           </a:xfrm>
           <a:prstGeom prst="rect">
             <a:avLst/>
@@ -11598,7 +11460,7 @@
         <p:spPr>
           <a:xfrm>
             <a:off x="380880" y="5630400"/>
-            <a:ext cx="3723840" cy="218880"/>
+            <a:ext cx="3723840" cy="218520"/>
           </a:xfrm>
           <a:prstGeom prst="rect">
             <a:avLst/>
@@ -11649,8 +11511,8 @@
         </p:nvSpPr>
         <p:spPr>
           <a:xfrm>
-            <a:off x="4286160" y="5363640"/>
-            <a:ext cx="151920" cy="151920"/>
+            <a:off x="4286520" y="5363640"/>
+            <a:ext cx="151560" cy="151560"/>
           </a:xfrm>
           <a:custGeom>
             <a:avLst/>
@@ -11747,8 +11609,8 @@
         </p:nvSpPr>
         <p:spPr>
           <a:xfrm>
-            <a:off x="4514760" y="5325840"/>
-            <a:ext cx="3485880" cy="228240"/>
+            <a:off x="4515120" y="5325840"/>
+            <a:ext cx="3485880" cy="227880"/>
           </a:xfrm>
           <a:prstGeom prst="rect">
             <a:avLst/>
@@ -11799,8 +11661,8 @@
         </p:nvSpPr>
         <p:spPr>
           <a:xfrm>
-            <a:off x="4267080" y="5630400"/>
-            <a:ext cx="3723840" cy="218880"/>
+            <a:off x="4267440" y="5630400"/>
+            <a:ext cx="3723840" cy="218520"/>
           </a:xfrm>
           <a:prstGeom prst="rect">
             <a:avLst/>
@@ -11851,8 +11713,8 @@
         </p:nvSpPr>
         <p:spPr>
           <a:xfrm>
-            <a:off x="8172360" y="5363640"/>
-            <a:ext cx="151920" cy="151920"/>
+            <a:off x="8173080" y="5363640"/>
+            <a:ext cx="151560" cy="151560"/>
           </a:xfrm>
           <a:custGeom>
             <a:avLst/>
@@ -11988,8 +11850,8 @@
         </p:nvSpPr>
         <p:spPr>
           <a:xfrm>
-            <a:off x="8400960" y="5325840"/>
-            <a:ext cx="3485880" cy="228240"/>
+            <a:off x="8401680" y="5325840"/>
+            <a:ext cx="3485880" cy="227880"/>
           </a:xfrm>
           <a:prstGeom prst="rect">
             <a:avLst/>
@@ -12040,8 +11902,8 @@
         </p:nvSpPr>
         <p:spPr>
           <a:xfrm>
-            <a:off x="8153280" y="5630400"/>
-            <a:ext cx="3723840" cy="218880"/>
+            <a:off x="8154000" y="5630400"/>
+            <a:ext cx="3723840" cy="218520"/>
           </a:xfrm>
           <a:prstGeom prst="rect">
             <a:avLst/>
@@ -12130,7 +11992,7 @@
         <p:spPr>
           <a:xfrm>
             <a:off x="380880" y="380880"/>
-            <a:ext cx="11486880" cy="151920"/>
+            <a:ext cx="11487600" cy="151560"/>
           </a:xfrm>
           <a:prstGeom prst="rect">
             <a:avLst/>
@@ -12158,7 +12020,7 @@
               <a:buNone/>
             </a:pPr>
             <a:r>
-              <a:rPr b="0" lang="en-US" sz="900" spc="267" strike="noStrike">
+              <a:rPr b="0" lang="en-US" sz="900" spc="265" strike="noStrike">
                 <a:solidFill>
                   <a:srgbClr val="86868b"/>
                 </a:solidFill>
@@ -12182,7 +12044,7 @@
         <p:spPr>
           <a:xfrm>
             <a:off x="380880" y="609480"/>
-            <a:ext cx="11601000" cy="380520"/>
+            <a:ext cx="11601720" cy="380160"/>
           </a:xfrm>
           <a:prstGeom prst="rect">
             <a:avLst/>
@@ -12234,7 +12096,7 @@
         <p:spPr>
           <a:xfrm>
             <a:off x="380880" y="1886040"/>
-            <a:ext cx="3657240" cy="9000"/>
+            <a:ext cx="3657240" cy="8640"/>
           </a:xfrm>
           <a:custGeom>
             <a:avLst/>
@@ -12285,7 +12147,7 @@
         <p:spPr>
           <a:xfrm>
             <a:off x="409680" y="2081160"/>
-            <a:ext cx="228240" cy="228240"/>
+            <a:ext cx="227880" cy="227880"/>
           </a:xfrm>
           <a:custGeom>
             <a:avLst/>
@@ -12486,7 +12348,7 @@
         <p:spPr>
           <a:xfrm>
             <a:off x="380880" y="2424240"/>
-            <a:ext cx="3752640" cy="266400"/>
+            <a:ext cx="3752640" cy="266040"/>
           </a:xfrm>
           <a:prstGeom prst="rect">
             <a:avLst/>
@@ -12538,7 +12400,7 @@
         <p:spPr>
           <a:xfrm>
             <a:off x="380880" y="2843280"/>
-            <a:ext cx="3733560" cy="495000"/>
+            <a:ext cx="3733560" cy="494640"/>
           </a:xfrm>
           <a:prstGeom prst="rect">
             <a:avLst/>
@@ -12589,8 +12451,8 @@
         </p:nvSpPr>
         <p:spPr>
           <a:xfrm>
-            <a:off x="4267080" y="1886040"/>
-            <a:ext cx="3657240" cy="9000"/>
+            <a:off x="4267440" y="1886040"/>
+            <a:ext cx="3657240" cy="8640"/>
           </a:xfrm>
           <a:custGeom>
             <a:avLst/>
@@ -12640,8 +12502,8 @@
         </p:nvSpPr>
         <p:spPr>
           <a:xfrm>
-            <a:off x="4324320" y="2081160"/>
-            <a:ext cx="171000" cy="228240"/>
+            <a:off x="4324680" y="2081160"/>
+            <a:ext cx="170640" cy="227880"/>
           </a:xfrm>
           <a:custGeom>
             <a:avLst/>
@@ -12772,8 +12634,8 @@
         </p:nvSpPr>
         <p:spPr>
           <a:xfrm>
-            <a:off x="4267080" y="2424240"/>
-            <a:ext cx="3752640" cy="266400"/>
+            <a:off x="4267440" y="2424240"/>
+            <a:ext cx="3752640" cy="266040"/>
           </a:xfrm>
           <a:prstGeom prst="rect">
             <a:avLst/>
@@ -12824,8 +12686,8 @@
         </p:nvSpPr>
         <p:spPr>
           <a:xfrm>
-            <a:off x="4267080" y="2843280"/>
-            <a:ext cx="3733560" cy="495000"/>
+            <a:off x="4267440" y="2843280"/>
+            <a:ext cx="3733560" cy="494640"/>
           </a:xfrm>
           <a:prstGeom prst="rect">
             <a:avLst/>
@@ -12876,8 +12738,8 @@
         </p:nvSpPr>
         <p:spPr>
           <a:xfrm>
-            <a:off x="8153280" y="1886040"/>
-            <a:ext cx="3657240" cy="9000"/>
+            <a:off x="8154000" y="1886040"/>
+            <a:ext cx="3657240" cy="8640"/>
           </a:xfrm>
           <a:custGeom>
             <a:avLst/>
@@ -12927,8 +12789,8 @@
         </p:nvSpPr>
         <p:spPr>
           <a:xfrm>
-            <a:off x="8182080" y="2081160"/>
-            <a:ext cx="228240" cy="228240"/>
+            <a:off x="8182800" y="2081160"/>
+            <a:ext cx="227880" cy="227880"/>
           </a:xfrm>
           <a:custGeom>
             <a:avLst/>
@@ -13150,8 +13012,8 @@
         </p:nvSpPr>
         <p:spPr>
           <a:xfrm>
-            <a:off x="8153280" y="2424240"/>
-            <a:ext cx="3752640" cy="266400"/>
+            <a:off x="8154000" y="2424240"/>
+            <a:ext cx="3752640" cy="266040"/>
           </a:xfrm>
           <a:prstGeom prst="rect">
             <a:avLst/>
@@ -13202,8 +13064,8 @@
         </p:nvSpPr>
         <p:spPr>
           <a:xfrm>
-            <a:off x="8153280" y="2843280"/>
-            <a:ext cx="3733560" cy="495000"/>
+            <a:off x="8154000" y="2843280"/>
+            <a:ext cx="3733560" cy="494640"/>
           </a:xfrm>
           <a:prstGeom prst="rect">
             <a:avLst/>
@@ -13255,7 +13117,7 @@
         <p:spPr>
           <a:xfrm>
             <a:off x="380880" y="3571920"/>
-            <a:ext cx="3657240" cy="9000"/>
+            <a:ext cx="3657240" cy="8640"/>
           </a:xfrm>
           <a:custGeom>
             <a:avLst/>
@@ -13306,7 +13168,7 @@
         <p:spPr>
           <a:xfrm>
             <a:off x="380880" y="3767040"/>
-            <a:ext cx="285480" cy="228240"/>
+            <a:ext cx="285120" cy="227880"/>
           </a:xfrm>
           <a:custGeom>
             <a:avLst/>
@@ -13522,7 +13384,7 @@
         <p:spPr>
           <a:xfrm>
             <a:off x="380880" y="4110120"/>
-            <a:ext cx="3752640" cy="266400"/>
+            <a:ext cx="3752640" cy="266040"/>
           </a:xfrm>
           <a:prstGeom prst="rect">
             <a:avLst/>
@@ -13574,7 +13436,7 @@
         <p:spPr>
           <a:xfrm>
             <a:off x="380880" y="4529160"/>
-            <a:ext cx="3733560" cy="742680"/>
+            <a:ext cx="3733560" cy="742320"/>
           </a:xfrm>
           <a:prstGeom prst="rect">
             <a:avLst/>
@@ -13625,8 +13487,8 @@
         </p:nvSpPr>
         <p:spPr>
           <a:xfrm>
-            <a:off x="4267080" y="3571920"/>
-            <a:ext cx="3657240" cy="9000"/>
+            <a:off x="4267440" y="3571920"/>
+            <a:ext cx="3657240" cy="8640"/>
           </a:xfrm>
           <a:custGeom>
             <a:avLst/>
@@ -13676,8 +13538,8 @@
         </p:nvSpPr>
         <p:spPr>
           <a:xfrm>
-            <a:off x="4324320" y="3767040"/>
-            <a:ext cx="171000" cy="228240"/>
+            <a:off x="4324680" y="3767040"/>
+            <a:ext cx="170640" cy="227880"/>
           </a:xfrm>
           <a:custGeom>
             <a:avLst/>
@@ -13875,8 +13737,8 @@
         </p:nvSpPr>
         <p:spPr>
           <a:xfrm>
-            <a:off x="4267080" y="4110120"/>
-            <a:ext cx="3752640" cy="266400"/>
+            <a:off x="4267440" y="4110120"/>
+            <a:ext cx="3752640" cy="266040"/>
           </a:xfrm>
           <a:prstGeom prst="rect">
             <a:avLst/>
@@ -13927,8 +13789,8 @@
         </p:nvSpPr>
         <p:spPr>
           <a:xfrm>
-            <a:off x="4267080" y="4529160"/>
-            <a:ext cx="3733560" cy="495000"/>
+            <a:off x="4267440" y="4529160"/>
+            <a:ext cx="3733560" cy="494640"/>
           </a:xfrm>
           <a:prstGeom prst="rect">
             <a:avLst/>
@@ -13979,8 +13841,8 @@
         </p:nvSpPr>
         <p:spPr>
           <a:xfrm>
-            <a:off x="8153280" y="3571920"/>
-            <a:ext cx="3657240" cy="9000"/>
+            <a:off x="8154000" y="3571920"/>
+            <a:ext cx="3657240" cy="8640"/>
           </a:xfrm>
           <a:custGeom>
             <a:avLst/>
@@ -14030,8 +13892,8 @@
         </p:nvSpPr>
         <p:spPr>
           <a:xfrm>
-            <a:off x="8182080" y="3767040"/>
-            <a:ext cx="228240" cy="228240"/>
+            <a:off x="8182800" y="3767040"/>
+            <a:ext cx="227880" cy="227880"/>
           </a:xfrm>
           <a:custGeom>
             <a:avLst/>
@@ -14269,8 +14131,8 @@
         </p:nvSpPr>
         <p:spPr>
           <a:xfrm>
-            <a:off x="8153280" y="4110120"/>
-            <a:ext cx="3752640" cy="266400"/>
+            <a:off x="8154000" y="4110120"/>
+            <a:ext cx="3752640" cy="266040"/>
           </a:xfrm>
           <a:prstGeom prst="rect">
             <a:avLst/>
@@ -14321,8 +14183,8 @@
         </p:nvSpPr>
         <p:spPr>
           <a:xfrm>
-            <a:off x="8153280" y="4529160"/>
-            <a:ext cx="3733560" cy="495000"/>
+            <a:off x="8154000" y="4529160"/>
+            <a:ext cx="3733560" cy="494640"/>
           </a:xfrm>
           <a:prstGeom prst="rect">
             <a:avLst/>
@@ -14374,7 +14236,7 @@
         <p:spPr>
           <a:xfrm>
             <a:off x="380880" y="6091200"/>
-            <a:ext cx="11429640" cy="9000"/>
+            <a:ext cx="11430360" cy="8640"/>
           </a:xfrm>
           <a:custGeom>
             <a:avLst/>
@@ -14425,7 +14287,7 @@
         <p:spPr>
           <a:xfrm>
             <a:off x="399960" y="6286680"/>
-            <a:ext cx="151920" cy="151920"/>
+            <a:ext cx="151560" cy="151560"/>
           </a:xfrm>
           <a:custGeom>
             <a:avLst/>
@@ -14602,7 +14464,7 @@
         <p:spPr>
           <a:xfrm>
             <a:off x="628560" y="6248520"/>
-            <a:ext cx="11258280" cy="228240"/>
+            <a:ext cx="11259000" cy="227880"/>
           </a:xfrm>
           <a:prstGeom prst="rect">
             <a:avLst/>
@@ -14701,7 +14563,7 @@
         <p:spPr>
           <a:xfrm>
             <a:off x="380880" y="380880"/>
-            <a:ext cx="609120" cy="18720"/>
+            <a:ext cx="608760" cy="18360"/>
           </a:xfrm>
           <a:custGeom>
             <a:avLst/>
@@ -14752,7 +14614,7 @@
         <p:spPr>
           <a:xfrm>
             <a:off x="380880" y="628560"/>
-            <a:ext cx="11496240" cy="190080"/>
+            <a:ext cx="11496960" cy="189720"/>
           </a:xfrm>
           <a:prstGeom prst="rect">
             <a:avLst/>
@@ -14780,7 +14642,7 @@
               <a:buNone/>
             </a:pPr>
             <a:r>
-              <a:rPr b="0" lang="en-US" sz="1050" spc="313" strike="noStrike">
+              <a:rPr b="0" lang="en-US" sz="1050" spc="310" strike="noStrike">
                 <a:solidFill>
                   <a:srgbClr val="86868b"/>
                 </a:solidFill>
@@ -14804,7 +14666,7 @@
         <p:spPr>
           <a:xfrm>
             <a:off x="380880" y="971640"/>
-            <a:ext cx="11715480" cy="571320"/>
+            <a:ext cx="11716200" cy="570960"/>
           </a:xfrm>
           <a:prstGeom prst="rect">
             <a:avLst/>
@@ -14856,7 +14718,7 @@
         <p:spPr>
           <a:xfrm>
             <a:off x="385920" y="2714760"/>
-            <a:ext cx="371160" cy="371160"/>
+            <a:ext cx="370800" cy="370800"/>
           </a:xfrm>
           <a:custGeom>
             <a:avLst/>
@@ -14908,7 +14770,7 @@
         <p:spPr>
           <a:xfrm>
             <a:off x="338040" y="2709720"/>
-            <a:ext cx="447480" cy="361440"/>
+            <a:ext cx="447120" cy="361080"/>
           </a:xfrm>
           <a:prstGeom prst="rect">
             <a:avLst/>
@@ -14960,7 +14822,7 @@
         <p:spPr>
           <a:xfrm>
             <a:off x="914400" y="2709720"/>
-            <a:ext cx="5047920" cy="266400"/>
+            <a:ext cx="5047920" cy="266040"/>
           </a:xfrm>
           <a:prstGeom prst="rect">
             <a:avLst/>
@@ -15012,7 +14874,7 @@
         <p:spPr>
           <a:xfrm>
             <a:off x="914400" y="3052800"/>
-            <a:ext cx="5028840" cy="495000"/>
+            <a:ext cx="5028840" cy="494640"/>
           </a:xfrm>
           <a:prstGeom prst="rect">
             <a:avLst/>
@@ -15083,8 +14945,8 @@
         </p:nvSpPr>
         <p:spPr>
           <a:xfrm>
-            <a:off x="6329520" y="2714760"/>
-            <a:ext cx="371160" cy="371160"/>
+            <a:off x="6329880" y="2714760"/>
+            <a:ext cx="370800" cy="370800"/>
           </a:xfrm>
           <a:custGeom>
             <a:avLst/>
@@ -15135,8 +14997,8 @@
         </p:nvSpPr>
         <p:spPr>
           <a:xfrm>
-            <a:off x="6281640" y="2709720"/>
-            <a:ext cx="447480" cy="361440"/>
+            <a:off x="6282000" y="2709720"/>
+            <a:ext cx="447120" cy="361080"/>
           </a:xfrm>
           <a:prstGeom prst="rect">
             <a:avLst/>
@@ -15187,8 +15049,8 @@
         </p:nvSpPr>
         <p:spPr>
           <a:xfrm>
-            <a:off x="6858000" y="2709720"/>
-            <a:ext cx="5047920" cy="266400"/>
+            <a:off x="6858360" y="2709720"/>
+            <a:ext cx="5047920" cy="266040"/>
           </a:xfrm>
           <a:prstGeom prst="rect">
             <a:avLst/>
@@ -15239,8 +15101,8 @@
         </p:nvSpPr>
         <p:spPr>
           <a:xfrm>
-            <a:off x="6858000" y="3052800"/>
-            <a:ext cx="5028840" cy="495000"/>
+            <a:off x="6858360" y="3052800"/>
+            <a:ext cx="5028840" cy="494640"/>
           </a:xfrm>
           <a:prstGeom prst="rect">
             <a:avLst/>
@@ -15312,7 +15174,7 @@
         <p:spPr>
           <a:xfrm>
             <a:off x="385920" y="3781440"/>
-            <a:ext cx="371160" cy="371160"/>
+            <a:ext cx="370800" cy="370800"/>
           </a:xfrm>
           <a:custGeom>
             <a:avLst/>
@@ -15364,7 +15226,7 @@
         <p:spPr>
           <a:xfrm>
             <a:off x="338040" y="3776760"/>
-            <a:ext cx="447480" cy="361440"/>
+            <a:ext cx="447120" cy="361080"/>
           </a:xfrm>
           <a:prstGeom prst="rect">
             <a:avLst/>
@@ -15416,7 +15278,7 @@
         <p:spPr>
           <a:xfrm>
             <a:off x="914400" y="3776760"/>
-            <a:ext cx="5047920" cy="266400"/>
+            <a:ext cx="5047920" cy="266040"/>
           </a:xfrm>
           <a:prstGeom prst="rect">
             <a:avLst/>
@@ -15468,7 +15330,7 @@
         <p:spPr>
           <a:xfrm>
             <a:off x="914400" y="4119480"/>
-            <a:ext cx="5028840" cy="495000"/>
+            <a:ext cx="5028840" cy="494640"/>
           </a:xfrm>
           <a:prstGeom prst="rect">
             <a:avLst/>
@@ -15559,8 +15421,8 @@
         </p:nvSpPr>
         <p:spPr>
           <a:xfrm>
-            <a:off x="6329520" y="3781440"/>
-            <a:ext cx="371160" cy="371160"/>
+            <a:off x="6329880" y="3781440"/>
+            <a:ext cx="370800" cy="370800"/>
           </a:xfrm>
           <a:custGeom>
             <a:avLst/>
@@ -15611,8 +15473,8 @@
         </p:nvSpPr>
         <p:spPr>
           <a:xfrm>
-            <a:off x="6281640" y="3776760"/>
-            <a:ext cx="447480" cy="361440"/>
+            <a:off x="6282000" y="3776760"/>
+            <a:ext cx="447120" cy="361080"/>
           </a:xfrm>
           <a:prstGeom prst="rect">
             <a:avLst/>
@@ -15663,8 +15525,8 @@
         </p:nvSpPr>
         <p:spPr>
           <a:xfrm>
-            <a:off x="6858000" y="3776760"/>
-            <a:ext cx="5047920" cy="266400"/>
+            <a:off x="6858360" y="3776760"/>
+            <a:ext cx="5047920" cy="266040"/>
           </a:xfrm>
           <a:prstGeom prst="rect">
             <a:avLst/>
@@ -15715,8 +15577,8 @@
         </p:nvSpPr>
         <p:spPr>
           <a:xfrm>
-            <a:off x="6858000" y="4119480"/>
-            <a:ext cx="5028840" cy="495000"/>
+            <a:off x="6858360" y="4119480"/>
+            <a:ext cx="5028840" cy="494640"/>
           </a:xfrm>
           <a:prstGeom prst="rect">
             <a:avLst/>
@@ -15788,7 +15650,7 @@
         <p:spPr>
           <a:xfrm>
             <a:off x="380880" y="5634000"/>
-            <a:ext cx="11429640" cy="9000"/>
+            <a:ext cx="11430360" cy="8640"/>
           </a:xfrm>
           <a:custGeom>
             <a:avLst/>
@@ -15839,7 +15701,7 @@
         <p:spPr>
           <a:xfrm>
             <a:off x="380880" y="5867280"/>
-            <a:ext cx="7772040" cy="304560"/>
+            <a:ext cx="7772400" cy="304200"/>
           </a:xfrm>
           <a:prstGeom prst="rect">
             <a:avLst/>
@@ -15891,7 +15753,7 @@
         <p:spPr>
           <a:xfrm>
             <a:off x="380880" y="6248520"/>
-            <a:ext cx="7733880" cy="228240"/>
+            <a:ext cx="7734240" cy="227880"/>
           </a:xfrm>
           <a:prstGeom prst="rect">
             <a:avLst/>
@@ -15952,8 +15814,8 @@
         </p:nvSpPr>
         <p:spPr>
           <a:xfrm>
-            <a:off x="10064160" y="5981760"/>
-            <a:ext cx="1742760" cy="190080"/>
+            <a:off x="10064880" y="5981760"/>
+            <a:ext cx="1742400" cy="189720"/>
           </a:xfrm>
           <a:prstGeom prst="rect">
             <a:avLst/>
@@ -16004,8 +15866,8 @@
         </p:nvSpPr>
         <p:spPr>
           <a:xfrm>
-            <a:off x="10073880" y="6210360"/>
-            <a:ext cx="1733040" cy="151920"/>
+            <a:off x="10074600" y="6210360"/>
+            <a:ext cx="1732680" cy="151560"/>
           </a:xfrm>
           <a:prstGeom prst="rect">
             <a:avLst/>
@@ -16094,7 +15956,7 @@
         <p:spPr>
           <a:xfrm>
             <a:off x="380880" y="380880"/>
-            <a:ext cx="11486880" cy="151920"/>
+            <a:ext cx="11487600" cy="151560"/>
           </a:xfrm>
           <a:prstGeom prst="rect">
             <a:avLst/>
@@ -16122,7 +15984,7 @@
               <a:buNone/>
             </a:pPr>
             <a:r>
-              <a:rPr b="0" lang="en-US" sz="900" spc="267" strike="noStrike">
+              <a:rPr b="0" lang="en-US" sz="900" spc="265" strike="noStrike">
                 <a:solidFill>
                   <a:srgbClr val="86868b"/>
                 </a:solidFill>
@@ -16146,7 +16008,7 @@
         <p:spPr>
           <a:xfrm>
             <a:off x="380880" y="647640"/>
-            <a:ext cx="11658240" cy="456840"/>
+            <a:ext cx="11658960" cy="456480"/>
           </a:xfrm>
           <a:prstGeom prst="rect">
             <a:avLst/>
@@ -16198,7 +16060,7 @@
         <p:spPr>
           <a:xfrm>
             <a:off x="380880" y="1714680"/>
-            <a:ext cx="875880" cy="571320"/>
+            <a:ext cx="875520" cy="570960"/>
           </a:xfrm>
           <a:prstGeom prst="rect">
             <a:avLst/>
@@ -16250,7 +16112,7 @@
         <p:spPr>
           <a:xfrm>
             <a:off x="1202760" y="1790640"/>
-            <a:ext cx="4628880" cy="304560"/>
+            <a:ext cx="4628880" cy="304200"/>
           </a:xfrm>
           <a:prstGeom prst="rect">
             <a:avLst/>
@@ -16302,7 +16164,7 @@
         <p:spPr>
           <a:xfrm>
             <a:off x="1202760" y="2209680"/>
-            <a:ext cx="4590720" cy="495000"/>
+            <a:ext cx="4590720" cy="494640"/>
           </a:xfrm>
           <a:prstGeom prst="rect">
             <a:avLst/>
@@ -16353,8 +16215,8 @@
         </p:nvSpPr>
         <p:spPr>
           <a:xfrm>
-            <a:off x="6477120" y="1714680"/>
-            <a:ext cx="980640" cy="571320"/>
+            <a:off x="6477480" y="1714680"/>
+            <a:ext cx="980280" cy="570960"/>
           </a:xfrm>
           <a:prstGeom prst="rect">
             <a:avLst/>
@@ -16405,8 +16267,8 @@
         </p:nvSpPr>
         <p:spPr>
           <a:xfrm>
-            <a:off x="7402320" y="1790640"/>
-            <a:ext cx="4524120" cy="304560"/>
+            <a:off x="7402680" y="1790640"/>
+            <a:ext cx="4524120" cy="304200"/>
           </a:xfrm>
           <a:prstGeom prst="rect">
             <a:avLst/>
@@ -16457,8 +16319,8 @@
         </p:nvSpPr>
         <p:spPr>
           <a:xfrm>
-            <a:off x="7402320" y="2209680"/>
-            <a:ext cx="4485960" cy="495000"/>
+            <a:off x="7402680" y="2209680"/>
+            <a:ext cx="4485960" cy="494640"/>
           </a:xfrm>
           <a:prstGeom prst="rect">
             <a:avLst/>
@@ -16510,7 +16372,7 @@
         <p:spPr>
           <a:xfrm>
             <a:off x="380880" y="4324320"/>
-            <a:ext cx="990360" cy="571320"/>
+            <a:ext cx="990000" cy="570960"/>
           </a:xfrm>
           <a:prstGeom prst="rect">
             <a:avLst/>
@@ -16562,7 +16424,7 @@
         <p:spPr>
           <a:xfrm>
             <a:off x="1311480" y="4400640"/>
-            <a:ext cx="4514400" cy="304560"/>
+            <a:ext cx="4514400" cy="304200"/>
           </a:xfrm>
           <a:prstGeom prst="rect">
             <a:avLst/>
@@ -16614,7 +16476,7 @@
         <p:spPr>
           <a:xfrm>
             <a:off x="1311480" y="4819680"/>
-            <a:ext cx="4476240" cy="495000"/>
+            <a:ext cx="4476240" cy="494640"/>
           </a:xfrm>
           <a:prstGeom prst="rect">
             <a:avLst/>
@@ -16665,8 +16527,8 @@
         </p:nvSpPr>
         <p:spPr>
           <a:xfrm>
-            <a:off x="6477120" y="4324320"/>
-            <a:ext cx="990360" cy="571320"/>
+            <a:off x="6477480" y="4324320"/>
+            <a:ext cx="990000" cy="570960"/>
           </a:xfrm>
           <a:prstGeom prst="rect">
             <a:avLst/>
@@ -16717,8 +16579,8 @@
         </p:nvSpPr>
         <p:spPr>
           <a:xfrm>
-            <a:off x="7407000" y="4400640"/>
-            <a:ext cx="4514400" cy="304560"/>
+            <a:off x="7407360" y="4400640"/>
+            <a:ext cx="4514400" cy="304200"/>
           </a:xfrm>
           <a:prstGeom prst="rect">
             <a:avLst/>
@@ -16769,8 +16631,8 @@
         </p:nvSpPr>
         <p:spPr>
           <a:xfrm>
-            <a:off x="7407000" y="4819680"/>
-            <a:ext cx="4476240" cy="247320"/>
+            <a:off x="7407360" y="4819680"/>
+            <a:ext cx="4476240" cy="246960"/>
           </a:xfrm>
           <a:prstGeom prst="rect">
             <a:avLst/>
@@ -16859,7 +16721,7 @@
         <p:spPr>
           <a:xfrm>
             <a:off x="380880" y="1665000"/>
-            <a:ext cx="761760" cy="18720"/>
+            <a:ext cx="761400" cy="18360"/>
           </a:xfrm>
           <a:custGeom>
             <a:avLst/>
@@ -16910,7 +16772,7 @@
         <p:spPr>
           <a:xfrm>
             <a:off x="380880" y="1989000"/>
-            <a:ext cx="9515160" cy="190080"/>
+            <a:ext cx="9515520" cy="189720"/>
           </a:xfrm>
           <a:prstGeom prst="rect">
             <a:avLst/>
@@ -16938,7 +16800,7 @@
               <a:buNone/>
             </a:pPr>
             <a:r>
-              <a:rPr b="0" lang="en-US" sz="1050" spc="313" strike="noStrike">
+              <a:rPr b="0" lang="en-US" sz="1050" spc="310" strike="noStrike">
                 <a:solidFill>
                   <a:srgbClr val="86868b"/>
                 </a:solidFill>
@@ -16962,7 +16824,7 @@
         <p:spPr>
           <a:xfrm>
             <a:off x="380880" y="2408040"/>
-            <a:ext cx="9905760" cy="1733040"/>
+            <a:ext cx="9906120" cy="1732680"/>
           </a:xfrm>
           <a:prstGeom prst="rect">
             <a:avLst/>
@@ -17035,7 +16897,7 @@
         <p:spPr>
           <a:xfrm>
             <a:off x="380880" y="4449960"/>
-            <a:ext cx="5600520" cy="742680"/>
+            <a:ext cx="5600520" cy="742320"/>
           </a:xfrm>
           <a:prstGeom prst="rect">
             <a:avLst/>
@@ -17086,8 +16948,8 @@
         </p:nvSpPr>
         <p:spPr>
           <a:xfrm>
-            <a:off x="9833760" y="2476440"/>
-            <a:ext cx="2933280" cy="1904760"/>
+            <a:off x="9834480" y="2476440"/>
+            <a:ext cx="2933280" cy="1904400"/>
           </a:xfrm>
           <a:prstGeom prst="rect">
             <a:avLst/>
@@ -17176,7 +17038,7 @@
         <p:spPr>
           <a:xfrm>
             <a:off x="380880" y="380880"/>
-            <a:ext cx="11486880" cy="151920"/>
+            <a:ext cx="11487600" cy="151560"/>
           </a:xfrm>
           <a:prstGeom prst="rect">
             <a:avLst/>
@@ -17204,7 +17066,7 @@
               <a:buNone/>
             </a:pPr>
             <a:r>
-              <a:rPr b="0" lang="en-US" sz="900" spc="267" strike="noStrike">
+              <a:rPr b="0" lang="en-US" sz="900" spc="265" strike="noStrike">
                 <a:solidFill>
                   <a:srgbClr val="86868b"/>
                 </a:solidFill>
@@ -17228,7 +17090,7 @@
         <p:spPr>
           <a:xfrm>
             <a:off x="380880" y="609480"/>
-            <a:ext cx="11601000" cy="380520"/>
+            <a:ext cx="11601720" cy="380160"/>
           </a:xfrm>
           <a:prstGeom prst="rect">
             <a:avLst/>
@@ -17256,21 +17118,16 @@
               <a:buNone/>
             </a:pPr>
             <a:r>
-              <a:rPr b="1" lang="en-US" sz="2700" spc="-1" strike="noStrike" u="sng">
+              <a:rPr b="0" lang="en-US" sz="2700" spc="-1" strike="noStrike">
                 <a:solidFill>
                   <a:srgbClr val="7a97ef"/>
                 </a:solidFill>
-                <a:uFillTx/>
                 <a:latin typeface="Liter"/>
                 <a:ea typeface="Liter"/>
               </a:rPr>
               <a:t>The Surprising Question</a:t>
             </a:r>
-            <a:endParaRPr b="1" lang="en-HK" sz="2700" spc="-1" strike="noStrike" u="sng">
-              <a:solidFill>
-                <a:srgbClr val="7a97ef"/>
-              </a:solidFill>
-              <a:uFillTx/>
+            <a:endParaRPr b="0" lang="en-HK" sz="2700" spc="-1" strike="noStrike">
               <a:latin typeface="Arial"/>
             </a:endParaRPr>
           </a:p>
@@ -17285,7 +17142,7 @@
         <p:spPr>
           <a:xfrm>
             <a:off x="380880" y="1824120"/>
-            <a:ext cx="8648280" cy="742680"/>
+            <a:ext cx="8648640" cy="742320"/>
           </a:xfrm>
           <a:prstGeom prst="rect">
             <a:avLst/>
@@ -17347,7 +17204,7 @@
         <p:spPr>
           <a:xfrm>
             <a:off x="380880" y="3338640"/>
-            <a:ext cx="5486040" cy="18720"/>
+            <a:ext cx="5486040" cy="18360"/>
           </a:xfrm>
           <a:custGeom>
             <a:avLst/>
@@ -17398,7 +17255,7 @@
         <p:spPr>
           <a:xfrm>
             <a:off x="380880" y="3576600"/>
-            <a:ext cx="5552640" cy="190080"/>
+            <a:ext cx="5552640" cy="189720"/>
           </a:xfrm>
           <a:prstGeom prst="rect">
             <a:avLst/>
@@ -17426,7 +17283,7 @@
               <a:buNone/>
             </a:pPr>
             <a:r>
-              <a:rPr b="0" lang="en-US" sz="1050" spc="208" strike="noStrike">
+              <a:rPr b="0" lang="en-US" sz="1050" spc="205" strike="noStrike">
                 <a:solidFill>
                   <a:srgbClr val="86868b"/>
                 </a:solidFill>
@@ -17450,7 +17307,7 @@
         <p:spPr>
           <a:xfrm>
             <a:off x="380880" y="3919680"/>
-            <a:ext cx="1837800" cy="685440"/>
+            <a:ext cx="1837440" cy="685080"/>
           </a:xfrm>
           <a:prstGeom prst="rect">
             <a:avLst/>
@@ -17502,7 +17359,7 @@
         <p:spPr>
           <a:xfrm>
             <a:off x="1991160" y="4286160"/>
-            <a:ext cx="666360" cy="266400"/>
+            <a:ext cx="666000" cy="266040"/>
           </a:xfrm>
           <a:prstGeom prst="rect">
             <a:avLst/>
@@ -17554,7 +17411,7 @@
         <p:spPr>
           <a:xfrm>
             <a:off x="380880" y="4757760"/>
-            <a:ext cx="5562360" cy="247320"/>
+            <a:ext cx="5562360" cy="246960"/>
           </a:xfrm>
           <a:prstGeom prst="rect">
             <a:avLst/>
@@ -17605,8 +17462,8 @@
         </p:nvSpPr>
         <p:spPr>
           <a:xfrm>
-            <a:off x="6324480" y="3338640"/>
-            <a:ext cx="5486040" cy="18720"/>
+            <a:off x="6324840" y="3338640"/>
+            <a:ext cx="5486040" cy="18360"/>
           </a:xfrm>
           <a:custGeom>
             <a:avLst/>
@@ -17656,8 +17513,8 @@
         </p:nvSpPr>
         <p:spPr>
           <a:xfrm>
-            <a:off x="6324480" y="3576600"/>
-            <a:ext cx="5552640" cy="190080"/>
+            <a:off x="6324840" y="3576600"/>
+            <a:ext cx="5552640" cy="189720"/>
           </a:xfrm>
           <a:prstGeom prst="rect">
             <a:avLst/>
@@ -17685,7 +17542,7 @@
               <a:buNone/>
             </a:pPr>
             <a:r>
-              <a:rPr b="0" lang="en-US" sz="1050" spc="208" strike="noStrike">
+              <a:rPr b="0" lang="en-US" sz="1050" spc="205" strike="noStrike">
                 <a:solidFill>
                   <a:srgbClr val="0071e3"/>
                 </a:solidFill>
@@ -17708,8 +17565,8 @@
         </p:nvSpPr>
         <p:spPr>
           <a:xfrm>
-            <a:off x="6324480" y="3919680"/>
-            <a:ext cx="1142640" cy="685440"/>
+            <a:off x="6324840" y="3919680"/>
+            <a:ext cx="1142280" cy="685080"/>
           </a:xfrm>
           <a:prstGeom prst="rect">
             <a:avLst/>
@@ -17760,8 +17617,8 @@
         </p:nvSpPr>
         <p:spPr>
           <a:xfrm>
-            <a:off x="7242120" y="4286160"/>
-            <a:ext cx="666360" cy="266400"/>
+            <a:off x="7242480" y="4286160"/>
+            <a:ext cx="666000" cy="266040"/>
           </a:xfrm>
           <a:prstGeom prst="rect">
             <a:avLst/>
@@ -17812,8 +17669,8 @@
         </p:nvSpPr>
         <p:spPr>
           <a:xfrm>
-            <a:off x="6324480" y="4757760"/>
-            <a:ext cx="5562360" cy="495000"/>
+            <a:off x="6324840" y="4757760"/>
+            <a:ext cx="5562360" cy="494640"/>
           </a:xfrm>
           <a:prstGeom prst="rect">
             <a:avLst/>
@@ -17885,7 +17742,7 @@
         <p:spPr>
           <a:xfrm>
             <a:off x="380880" y="6014880"/>
-            <a:ext cx="11429640" cy="9000"/>
+            <a:ext cx="11430360" cy="8640"/>
           </a:xfrm>
           <a:custGeom>
             <a:avLst/>
@@ -17936,7 +17793,7 @@
         <p:spPr>
           <a:xfrm>
             <a:off x="419040" y="6286680"/>
-            <a:ext cx="114120" cy="151920"/>
+            <a:ext cx="113760" cy="151560"/>
           </a:xfrm>
           <a:custGeom>
             <a:avLst/>
@@ -18068,7 +17925,7 @@
         <p:spPr>
           <a:xfrm>
             <a:off x="628560" y="6248520"/>
-            <a:ext cx="11258280" cy="228240"/>
+            <a:ext cx="11259000" cy="227880"/>
           </a:xfrm>
           <a:prstGeom prst="rect">
             <a:avLst/>
@@ -18167,7 +18024,7 @@
         <p:spPr>
           <a:xfrm>
             <a:off x="380880" y="380880"/>
-            <a:ext cx="11486880" cy="151920"/>
+            <a:ext cx="11487600" cy="151560"/>
           </a:xfrm>
           <a:prstGeom prst="rect">
             <a:avLst/>
@@ -18195,7 +18052,7 @@
               <a:buNone/>
             </a:pPr>
             <a:r>
-              <a:rPr b="0" lang="en-US" sz="900" spc="267" strike="noStrike">
+              <a:rPr b="0" lang="en-US" sz="900" spc="265" strike="noStrike">
                 <a:solidFill>
                   <a:srgbClr val="86868b"/>
                 </a:solidFill>
@@ -18219,7 +18076,7 @@
         <p:spPr>
           <a:xfrm>
             <a:off x="380880" y="609480"/>
-            <a:ext cx="11601000" cy="380520"/>
+            <a:ext cx="11601720" cy="380160"/>
           </a:xfrm>
           <a:prstGeom prst="rect">
             <a:avLst/>
@@ -18271,7 +18128,7 @@
         <p:spPr>
           <a:xfrm>
             <a:off x="380880" y="1219320"/>
-            <a:ext cx="6114600" cy="5257440"/>
+            <a:ext cx="6114960" cy="5257080"/>
           </a:xfrm>
           <a:prstGeom prst="roundRect">
             <a:avLst>
@@ -18302,8 +18159,8 @@
         </p:nvSpPr>
         <p:spPr>
           <a:xfrm>
-            <a:off x="6814080" y="1504800"/>
-            <a:ext cx="18720" cy="990360"/>
+            <a:off x="6814440" y="1504800"/>
+            <a:ext cx="18360" cy="990000"/>
           </a:xfrm>
           <a:custGeom>
             <a:avLst/>
@@ -18353,8 +18210,8 @@
         </p:nvSpPr>
         <p:spPr>
           <a:xfrm>
-            <a:off x="7014240" y="1504800"/>
-            <a:ext cx="571320" cy="380520"/>
+            <a:off x="7014600" y="1504800"/>
+            <a:ext cx="570960" cy="380160"/>
           </a:xfrm>
           <a:prstGeom prst="rect">
             <a:avLst/>
@@ -18405,8 +18262,8 @@
         </p:nvSpPr>
         <p:spPr>
           <a:xfrm>
-            <a:off x="7530120" y="1614600"/>
-            <a:ext cx="599760" cy="266400"/>
+            <a:off x="7530480" y="1614600"/>
+            <a:ext cx="599400" cy="266040"/>
           </a:xfrm>
           <a:prstGeom prst="rect">
             <a:avLst/>
@@ -18434,16 +18291,19 @@
               <a:buNone/>
             </a:pPr>
             <a:r>
-              <a:rPr b="0" lang="en-US" sz="1350" spc="-1" strike="noStrike">
-                <a:solidFill>
-                  <a:srgbClr val="1d1d1d"/>
+              <a:rPr b="0" i="1" lang="en-US" sz="1350" spc="-1" strike="noStrike">
+                <a:solidFill>
+                  <a:srgbClr val="2a6099"/>
                 </a:solidFill>
                 <a:latin typeface="Liter"/>
                 <a:ea typeface="Liter"/>
               </a:rPr>
               <a:t>people</a:t>
             </a:r>
-            <a:endParaRPr b="0" lang="en-HK" sz="1350" spc="-1" strike="noStrike">
+            <a:endParaRPr b="0" i="1" lang="en-HK" sz="1350" spc="-1" strike="noStrike">
+              <a:solidFill>
+                <a:srgbClr val="2a6099"/>
+              </a:solidFill>
               <a:latin typeface="Arial"/>
             </a:endParaRPr>
           </a:p>
@@ -18457,8 +18317,8 @@
         </p:nvSpPr>
         <p:spPr>
           <a:xfrm>
-            <a:off x="7014240" y="1924200"/>
-            <a:ext cx="4943160" cy="342720"/>
+            <a:off x="7014600" y="1924200"/>
+            <a:ext cx="4943160" cy="342360"/>
           </a:xfrm>
           <a:prstGeom prst="rect">
             <a:avLst/>
@@ -18509,8 +18369,8 @@
         </p:nvSpPr>
         <p:spPr>
           <a:xfrm>
-            <a:off x="7014240" y="2305080"/>
-            <a:ext cx="4866840" cy="190080"/>
+            <a:off x="7014600" y="2305080"/>
+            <a:ext cx="4866840" cy="189720"/>
           </a:xfrm>
           <a:prstGeom prst="rect">
             <a:avLst/>
@@ -18561,8 +18421,8 @@
         </p:nvSpPr>
         <p:spPr>
           <a:xfrm>
-            <a:off x="6814080" y="2647800"/>
-            <a:ext cx="18720" cy="723600"/>
+            <a:off x="6814440" y="2647800"/>
+            <a:ext cx="18360" cy="723240"/>
           </a:xfrm>
           <a:custGeom>
             <a:avLst/>
@@ -18612,8 +18472,8 @@
         </p:nvSpPr>
         <p:spPr>
           <a:xfrm>
-            <a:off x="7014240" y="2647800"/>
-            <a:ext cx="495000" cy="342720"/>
+            <a:off x="7014600" y="2647800"/>
+            <a:ext cx="494640" cy="342360"/>
           </a:xfrm>
           <a:prstGeom prst="rect">
             <a:avLst/>
@@ -18664,8 +18524,8 @@
         </p:nvSpPr>
         <p:spPr>
           <a:xfrm>
-            <a:off x="7479360" y="2747880"/>
-            <a:ext cx="533160" cy="228240"/>
+            <a:off x="7479720" y="2747880"/>
+            <a:ext cx="532800" cy="227880"/>
           </a:xfrm>
           <a:prstGeom prst="rect">
             <a:avLst/>
@@ -18716,8 +18576,8 @@
         </p:nvSpPr>
         <p:spPr>
           <a:xfrm>
-            <a:off x="7014240" y="3029040"/>
-            <a:ext cx="4914720" cy="304560"/>
+            <a:off x="7014600" y="3029040"/>
+            <a:ext cx="4914720" cy="304200"/>
           </a:xfrm>
           <a:prstGeom prst="rect">
             <a:avLst/>
@@ -18768,8 +18628,8 @@
         </p:nvSpPr>
         <p:spPr>
           <a:xfrm>
-            <a:off x="6814080" y="3524400"/>
-            <a:ext cx="18720" cy="723600"/>
+            <a:off x="6814440" y="3524400"/>
+            <a:ext cx="18360" cy="723240"/>
           </a:xfrm>
           <a:custGeom>
             <a:avLst/>
@@ -18819,8 +18679,8 @@
         </p:nvSpPr>
         <p:spPr>
           <a:xfrm>
-            <a:off x="7014240" y="3524400"/>
-            <a:ext cx="485280" cy="342720"/>
+            <a:off x="7014600" y="3524400"/>
+            <a:ext cx="484920" cy="342360"/>
           </a:xfrm>
           <a:prstGeom prst="rect">
             <a:avLst/>
@@ -18871,8 +18731,8 @@
         </p:nvSpPr>
         <p:spPr>
           <a:xfrm>
-            <a:off x="7475400" y="3624120"/>
-            <a:ext cx="533160" cy="228240"/>
+            <a:off x="7475760" y="3624120"/>
+            <a:ext cx="532800" cy="227880"/>
           </a:xfrm>
           <a:prstGeom prst="rect">
             <a:avLst/>
@@ -18923,8 +18783,8 @@
         </p:nvSpPr>
         <p:spPr>
           <a:xfrm>
-            <a:off x="7014240" y="3905280"/>
-            <a:ext cx="4914720" cy="304560"/>
+            <a:off x="7014600" y="3905280"/>
+            <a:ext cx="4914720" cy="304200"/>
           </a:xfrm>
           <a:prstGeom prst="rect">
             <a:avLst/>
@@ -18975,8 +18835,8 @@
         </p:nvSpPr>
         <p:spPr>
           <a:xfrm>
-            <a:off x="6814080" y="4400640"/>
-            <a:ext cx="18720" cy="723600"/>
+            <a:off x="6814440" y="4400640"/>
+            <a:ext cx="18360" cy="723240"/>
           </a:xfrm>
           <a:custGeom>
             <a:avLst/>
@@ -19026,8 +18886,8 @@
         </p:nvSpPr>
         <p:spPr>
           <a:xfrm>
-            <a:off x="7014240" y="4400640"/>
-            <a:ext cx="495000" cy="342720"/>
+            <a:off x="7014600" y="4400640"/>
+            <a:ext cx="494640" cy="342360"/>
           </a:xfrm>
           <a:prstGeom prst="rect">
             <a:avLst/>
@@ -19078,8 +18938,8 @@
         </p:nvSpPr>
         <p:spPr>
           <a:xfrm>
-            <a:off x="7481880" y="4500720"/>
-            <a:ext cx="533160" cy="228240"/>
+            <a:off x="7482240" y="4500720"/>
+            <a:ext cx="532800" cy="227880"/>
           </a:xfrm>
           <a:prstGeom prst="rect">
             <a:avLst/>
@@ -19130,8 +18990,8 @@
         </p:nvSpPr>
         <p:spPr>
           <a:xfrm>
-            <a:off x="7014240" y="4781520"/>
-            <a:ext cx="4914720" cy="304560"/>
+            <a:off x="7014600" y="4781520"/>
+            <a:ext cx="4914720" cy="304200"/>
           </a:xfrm>
           <a:prstGeom prst="rect">
             <a:avLst/>
@@ -19182,8 +19042,8 @@
         </p:nvSpPr>
         <p:spPr>
           <a:xfrm>
-            <a:off x="6814080" y="5276880"/>
-            <a:ext cx="18720" cy="914040"/>
+            <a:off x="6814440" y="5276880"/>
+            <a:ext cx="18360" cy="913680"/>
           </a:xfrm>
           <a:custGeom>
             <a:avLst/>
@@ -19233,8 +19093,8 @@
         </p:nvSpPr>
         <p:spPr>
           <a:xfrm>
-            <a:off x="7014240" y="5276880"/>
-            <a:ext cx="456840" cy="342720"/>
+            <a:off x="7014600" y="5276880"/>
+            <a:ext cx="456480" cy="342360"/>
           </a:xfrm>
           <a:prstGeom prst="rect">
             <a:avLst/>
@@ -19285,8 +19145,8 @@
         </p:nvSpPr>
         <p:spPr>
           <a:xfrm>
-            <a:off x="7439400" y="5376960"/>
-            <a:ext cx="533160" cy="228240"/>
+            <a:off x="7439760" y="5376960"/>
+            <a:ext cx="532800" cy="227880"/>
           </a:xfrm>
           <a:prstGeom prst="rect">
             <a:avLst/>
@@ -19337,8 +19197,8 @@
         </p:nvSpPr>
         <p:spPr>
           <a:xfrm>
-            <a:off x="7014240" y="5657760"/>
-            <a:ext cx="4914720" cy="304560"/>
+            <a:off x="7014600" y="5657760"/>
+            <a:ext cx="4914720" cy="304200"/>
           </a:xfrm>
           <a:prstGeom prst="rect">
             <a:avLst/>
@@ -19389,8 +19249,8 @@
         </p:nvSpPr>
         <p:spPr>
           <a:xfrm>
-            <a:off x="7014240" y="6000840"/>
-            <a:ext cx="4866840" cy="190080"/>
+            <a:off x="7014600" y="6000840"/>
+            <a:ext cx="4866840" cy="189720"/>
           </a:xfrm>
           <a:prstGeom prst="rect">
             <a:avLst/>
@@ -19489,7 +19349,7 @@
     <p:bg>
       <p:bgPr>
         <a:solidFill>
-          <a:srgbClr val="fafafa"/>
+          <a:srgbClr val="999999"/>
         </a:solidFill>
       </p:bgPr>
     </p:bg>
@@ -19516,7 +19376,7 @@
         <p:spPr>
           <a:xfrm>
             <a:off x="380880" y="1850760"/>
-            <a:ext cx="761760" cy="18720"/>
+            <a:ext cx="761400" cy="18360"/>
           </a:xfrm>
           <a:custGeom>
             <a:avLst/>
@@ -19567,7 +19427,7 @@
         <p:spPr>
           <a:xfrm>
             <a:off x="380880" y="2174760"/>
-            <a:ext cx="9172080" cy="190080"/>
+            <a:ext cx="9172440" cy="189720"/>
           </a:xfrm>
           <a:prstGeom prst="rect">
             <a:avLst/>
@@ -19595,7 +19455,7 @@
               <a:buNone/>
             </a:pPr>
             <a:r>
-              <a:rPr b="0" lang="en-US" sz="1050" spc="313" strike="noStrike">
+              <a:rPr b="0" lang="en-US" sz="1050" spc="310" strike="noStrike">
                 <a:solidFill>
                   <a:srgbClr val="86868b"/>
                 </a:solidFill>
@@ -19619,7 +19479,7 @@
         <p:spPr>
           <a:xfrm>
             <a:off x="380880" y="2593800"/>
-            <a:ext cx="9562680" cy="1733040"/>
+            <a:ext cx="9563040" cy="1732680"/>
           </a:xfrm>
           <a:prstGeom prst="rect">
             <a:avLst/>
@@ -19692,7 +19552,7 @@
         <p:spPr>
           <a:xfrm>
             <a:off x="380880" y="4635720"/>
-            <a:ext cx="5600520" cy="371160"/>
+            <a:ext cx="5600520" cy="370800"/>
           </a:xfrm>
           <a:prstGeom prst="rect">
             <a:avLst/>
@@ -19743,8 +19603,8 @@
         </p:nvSpPr>
         <p:spPr>
           <a:xfrm>
-            <a:off x="9488880" y="2476440"/>
-            <a:ext cx="3276360" cy="1904760"/>
+            <a:off x="9489600" y="2476440"/>
+            <a:ext cx="3276360" cy="1904400"/>
           </a:xfrm>
           <a:prstGeom prst="rect">
             <a:avLst/>
@@ -19833,7 +19693,7 @@
         <p:spPr>
           <a:xfrm>
             <a:off x="380880" y="380880"/>
-            <a:ext cx="11486880" cy="151920"/>
+            <a:ext cx="11487600" cy="151560"/>
           </a:xfrm>
           <a:prstGeom prst="rect">
             <a:avLst/>
@@ -19861,70 +19721,18 @@
               <a:buNone/>
             </a:pPr>
             <a:r>
-              <a:rPr b="0" lang="en-US" sz="900" spc="267" strike="noStrike">
-                <a:solidFill>
-                  <a:srgbClr val="86868b"/>
+              <a:rPr b="1" lang="en-US" sz="3600" spc="265" strike="noStrike">
+                <a:solidFill>
+                  <a:srgbClr val="f10d0c"/>
                 </a:solidFill>
                 <a:latin typeface="Liter"/>
                 <a:ea typeface="Liter"/>
               </a:rPr>
               <a:t>Mathematical Strategy</a:t>
-            </a:r>
-            <a:endParaRPr b="0" lang="en-HK" sz="900" spc="-1" strike="noStrike">
-              <a:latin typeface="Arial"/>
-            </a:endParaRPr>
-          </a:p>
-        </p:txBody>
-      </p:sp>
-      <p:sp>
-        <p:nvSpPr>
-          <p:cNvPr id="118" name="Text 1"/>
-          <p:cNvSpPr/>
-          <p:nvPr/>
-        </p:nvSpPr>
-        <p:spPr>
-          <a:xfrm>
-            <a:off x="380880" y="609480"/>
-            <a:ext cx="11601000" cy="380520"/>
-          </a:xfrm>
-          <a:prstGeom prst="rect">
-            <a:avLst/>
-          </a:prstGeom>
-          <a:noFill/>
-          <a:ln w="0">
-            <a:noFill/>
-          </a:ln>
-        </p:spPr>
-        <p:style>
-          <a:lnRef idx="0"/>
-          <a:fillRef idx="0"/>
-          <a:effectRef idx="0"/>
-          <a:fontRef idx="minor"/>
-        </p:style>
-        <p:txBody>
-          <a:bodyPr lIns="0" rIns="0" tIns="0" bIns="0" anchor="ctr">
-            <a:noAutofit/>
-          </a:bodyPr>
-          <a:p>
-            <a:pPr>
-              <a:lnSpc>
-                <a:spcPct val="90000"/>
-              </a:lnSpc>
-              <a:buNone/>
-            </a:pPr>
-            <a:r>
-              <a:rPr b="1" lang="en-US" sz="3600" spc="-1" strike="noStrike">
-                <a:solidFill>
-                  <a:srgbClr val="fafafa"/>
-                </a:solidFill>
-                <a:latin typeface="Liter"/>
-                <a:ea typeface="Liter"/>
-              </a:rPr>
-              <a:t>The Complementary Approach</a:t>
             </a:r>
             <a:endParaRPr b="1" lang="en-HK" sz="3600" spc="-1" strike="noStrike">
               <a:solidFill>
-                <a:srgbClr val="fafafa"/>
+                <a:srgbClr val="f10d0c"/>
               </a:solidFill>
               <a:latin typeface="Arial"/>
             </a:endParaRPr>
@@ -19933,6 +19741,58 @@
       </p:sp>
       <p:sp>
         <p:nvSpPr>
+          <p:cNvPr id="118" name="Text 1"/>
+          <p:cNvSpPr/>
+          <p:nvPr/>
+        </p:nvSpPr>
+        <p:spPr>
+          <a:xfrm>
+            <a:off x="380880" y="609480"/>
+            <a:ext cx="11601720" cy="380160"/>
+          </a:xfrm>
+          <a:prstGeom prst="rect">
+            <a:avLst/>
+          </a:prstGeom>
+          <a:noFill/>
+          <a:ln w="0">
+            <a:noFill/>
+          </a:ln>
+        </p:spPr>
+        <p:style>
+          <a:lnRef idx="0"/>
+          <a:fillRef idx="0"/>
+          <a:effectRef idx="0"/>
+          <a:fontRef idx="minor"/>
+        </p:style>
+        <p:txBody>
+          <a:bodyPr lIns="0" rIns="0" tIns="0" bIns="0" anchor="ctr">
+            <a:noAutofit/>
+          </a:bodyPr>
+          <a:p>
+            <a:pPr>
+              <a:lnSpc>
+                <a:spcPct val="90000"/>
+              </a:lnSpc>
+              <a:buNone/>
+            </a:pPr>
+            <a:r>
+              <a:rPr b="1" lang="en-US" sz="3600" spc="-1" strike="noStrike">
+                <a:solidFill>
+                  <a:srgbClr val="fafafa"/>
+                </a:solidFill>
+                <a:latin typeface="Liter"/>
+                <a:ea typeface="Liter"/>
+              </a:rPr>
+              <a:t>The Complementary Approach</a:t>
+            </a:r>
+            <a:endParaRPr b="0" lang="en-HK" sz="3600" spc="-1" strike="noStrike">
+              <a:latin typeface="Arial"/>
+            </a:endParaRPr>
+          </a:p>
+        </p:txBody>
+      </p:sp>
+      <p:sp>
+        <p:nvSpPr>
           <p:cNvPr id="119" name="Text 2"/>
           <p:cNvSpPr/>
           <p:nvPr/>
@@ -19940,7 +19800,7 @@
         <p:spPr>
           <a:xfrm>
             <a:off x="380880" y="1952640"/>
-            <a:ext cx="8629200" cy="618840"/>
+            <a:ext cx="8629560" cy="618480"/>
           </a:xfrm>
           <a:prstGeom prst="rect">
             <a:avLst/>
@@ -20032,7 +19892,7 @@
         <p:spPr>
           <a:xfrm>
             <a:off x="385920" y="2805120"/>
-            <a:ext cx="4028760" cy="809280"/>
+            <a:ext cx="4028760" cy="808920"/>
           </a:xfrm>
           <a:custGeom>
             <a:avLst/>
@@ -20084,7 +19944,7 @@
         <p:spPr>
           <a:xfrm>
             <a:off x="695160" y="3038400"/>
-            <a:ext cx="3552480" cy="342720"/>
+            <a:ext cx="3552480" cy="342360"/>
           </a:xfrm>
           <a:prstGeom prst="rect">
             <a:avLst/>
@@ -20136,7 +19996,7 @@
         <p:spPr>
           <a:xfrm>
             <a:off x="380880" y="4000680"/>
-            <a:ext cx="5590800" cy="190080"/>
+            <a:ext cx="5590800" cy="189720"/>
           </a:xfrm>
           <a:prstGeom prst="rect">
             <a:avLst/>
@@ -20164,7 +20024,7 @@
               <a:buNone/>
             </a:pPr>
             <a:r>
-              <a:rPr b="0" lang="en-US" sz="1050" spc="208" strike="noStrike">
+              <a:rPr b="0" lang="en-US" sz="1050" spc="205" strike="noStrike">
                 <a:solidFill>
                   <a:srgbClr val="86868b"/>
                 </a:solidFill>
@@ -20188,7 +20048,7 @@
         <p:spPr>
           <a:xfrm>
             <a:off x="380880" y="4343400"/>
-            <a:ext cx="5600520" cy="495000"/>
+            <a:ext cx="5600520" cy="494640"/>
           </a:xfrm>
           <a:prstGeom prst="rect">
             <a:avLst/>
@@ -20240,7 +20100,7 @@
         <p:spPr>
           <a:xfrm>
             <a:off x="380880" y="4991040"/>
-            <a:ext cx="5600520" cy="247320"/>
+            <a:ext cx="5600520" cy="246960"/>
           </a:xfrm>
           <a:prstGeom prst="rect">
             <a:avLst/>
@@ -20291,8 +20151,8 @@
         </p:nvSpPr>
         <p:spPr>
           <a:xfrm>
-            <a:off x="6286680" y="4000680"/>
-            <a:ext cx="5590800" cy="190080"/>
+            <a:off x="6287040" y="4000680"/>
+            <a:ext cx="5590800" cy="189720"/>
           </a:xfrm>
           <a:prstGeom prst="rect">
             <a:avLst/>
@@ -20320,7 +20180,7 @@
               <a:buNone/>
             </a:pPr>
             <a:r>
-              <a:rPr b="0" lang="en-US" sz="1050" spc="208" strike="noStrike">
+              <a:rPr b="0" lang="en-US" sz="1050" spc="205" strike="noStrike">
                 <a:solidFill>
                   <a:srgbClr val="86868b"/>
                 </a:solidFill>
@@ -20343,8 +20203,8 @@
         </p:nvSpPr>
         <p:spPr>
           <a:xfrm>
-            <a:off x="6286680" y="4343400"/>
-            <a:ext cx="5600520" cy="495000"/>
+            <a:off x="6287040" y="4343400"/>
+            <a:ext cx="5600520" cy="494640"/>
           </a:xfrm>
           <a:prstGeom prst="rect">
             <a:avLst/>
@@ -20395,8 +20255,8 @@
         </p:nvSpPr>
         <p:spPr>
           <a:xfrm>
-            <a:off x="6286680" y="4991040"/>
-            <a:ext cx="5600520" cy="247320"/>
+            <a:off x="6287040" y="4991040"/>
+            <a:ext cx="5600520" cy="246960"/>
           </a:xfrm>
           <a:prstGeom prst="rect">
             <a:avLst/>
@@ -20448,7 +20308,7 @@
         <p:spPr>
           <a:xfrm>
             <a:off x="380880" y="6129360"/>
-            <a:ext cx="11429640" cy="9000"/>
+            <a:ext cx="11430360" cy="8640"/>
           </a:xfrm>
           <a:custGeom>
             <a:avLst/>
@@ -20499,7 +20359,7 @@
         <p:spPr>
           <a:xfrm>
             <a:off x="399960" y="6315120"/>
-            <a:ext cx="132840" cy="132840"/>
+            <a:ext cx="132480" cy="132480"/>
           </a:xfrm>
           <a:custGeom>
             <a:avLst/>
@@ -20642,7 +20502,7 @@
         <p:spPr>
           <a:xfrm>
             <a:off x="609480" y="6286680"/>
-            <a:ext cx="11267640" cy="190080"/>
+            <a:ext cx="11268360" cy="189720"/>
           </a:xfrm>
           <a:prstGeom prst="rect">
             <a:avLst/>
@@ -20741,7 +20601,7 @@
         <p:spPr>
           <a:xfrm>
             <a:off x="380880" y="380880"/>
-            <a:ext cx="11486880" cy="151920"/>
+            <a:ext cx="11487600" cy="151560"/>
           </a:xfrm>
           <a:prstGeom prst="rect">
             <a:avLst/>
@@ -20769,7 +20629,7 @@
               <a:buNone/>
             </a:pPr>
             <a:r>
-              <a:rPr b="0" lang="en-US" sz="900" spc="267" strike="noStrike">
+              <a:rPr b="0" lang="en-US" sz="900" spc="265" strike="noStrike">
                 <a:solidFill>
                   <a:srgbClr val="86868b"/>
                 </a:solidFill>
@@ -20793,7 +20653,7 @@
         <p:spPr>
           <a:xfrm>
             <a:off x="380880" y="609480"/>
-            <a:ext cx="11601000" cy="380520"/>
+            <a:ext cx="11601720" cy="380160"/>
           </a:xfrm>
           <a:prstGeom prst="rect">
             <a:avLst/>
@@ -20845,7 +20705,7 @@
         <p:spPr>
           <a:xfrm>
             <a:off x="385920" y="1576440"/>
-            <a:ext cx="447480" cy="447480"/>
+            <a:ext cx="447120" cy="447120"/>
           </a:xfrm>
           <a:custGeom>
             <a:avLst/>
@@ -20897,7 +20757,7 @@
         <p:spPr>
           <a:xfrm>
             <a:off x="333360" y="1571760"/>
-            <a:ext cx="533160" cy="437760"/>
+            <a:ext cx="532800" cy="437400"/>
           </a:xfrm>
           <a:prstGeom prst="rect">
             <a:avLst/>
@@ -20949,7 +20809,7 @@
         <p:spPr>
           <a:xfrm>
             <a:off x="1066680" y="1533600"/>
-            <a:ext cx="10829520" cy="266400"/>
+            <a:ext cx="10830240" cy="266040"/>
           </a:xfrm>
           <a:prstGeom prst="rect">
             <a:avLst/>
@@ -21001,7 +20861,7 @@
         <p:spPr>
           <a:xfrm>
             <a:off x="1066680" y="1838160"/>
-            <a:ext cx="10820160" cy="228240"/>
+            <a:ext cx="10820880" cy="227880"/>
           </a:xfrm>
           <a:prstGeom prst="rect">
             <a:avLst/>
@@ -21063,7 +20923,7 @@
         <p:spPr>
           <a:xfrm>
             <a:off x="385920" y="2262240"/>
-            <a:ext cx="447480" cy="447480"/>
+            <a:ext cx="447120" cy="447120"/>
           </a:xfrm>
           <a:custGeom>
             <a:avLst/>
@@ -21115,7 +20975,7 @@
         <p:spPr>
           <a:xfrm>
             <a:off x="333360" y="2257560"/>
-            <a:ext cx="533160" cy="437760"/>
+            <a:ext cx="532800" cy="437400"/>
           </a:xfrm>
           <a:prstGeom prst="rect">
             <a:avLst/>
@@ -21167,7 +21027,7 @@
         <p:spPr>
           <a:xfrm>
             <a:off x="1066680" y="2219400"/>
-            <a:ext cx="10829520" cy="266400"/>
+            <a:ext cx="10830240" cy="266040"/>
           </a:xfrm>
           <a:prstGeom prst="rect">
             <a:avLst/>
@@ -21219,7 +21079,7 @@
         <p:spPr>
           <a:xfrm>
             <a:off x="1066680" y="2523960"/>
-            <a:ext cx="10820160" cy="228240"/>
+            <a:ext cx="10820880" cy="227880"/>
           </a:xfrm>
           <a:prstGeom prst="rect">
             <a:avLst/>
@@ -21281,7 +21141,7 @@
         <p:spPr>
           <a:xfrm>
             <a:off x="385920" y="2948040"/>
-            <a:ext cx="447480" cy="447480"/>
+            <a:ext cx="447120" cy="447120"/>
           </a:xfrm>
           <a:custGeom>
             <a:avLst/>
@@ -21333,7 +21193,7 @@
         <p:spPr>
           <a:xfrm>
             <a:off x="333360" y="2943360"/>
-            <a:ext cx="533160" cy="437760"/>
+            <a:ext cx="532800" cy="437400"/>
           </a:xfrm>
           <a:prstGeom prst="rect">
             <a:avLst/>
@@ -21385,7 +21245,7 @@
         <p:spPr>
           <a:xfrm>
             <a:off x="1066680" y="2905200"/>
-            <a:ext cx="10829520" cy="266400"/>
+            <a:ext cx="10830240" cy="266040"/>
           </a:xfrm>
           <a:prstGeom prst="rect">
             <a:avLst/>
@@ -21437,7 +21297,7 @@
         <p:spPr>
           <a:xfrm>
             <a:off x="1066680" y="3209760"/>
-            <a:ext cx="10820160" cy="228240"/>
+            <a:ext cx="10820880" cy="227880"/>
           </a:xfrm>
           <a:prstGeom prst="rect">
             <a:avLst/>
@@ -21499,7 +21359,7 @@
         <p:spPr>
           <a:xfrm>
             <a:off x="385920" y="3595680"/>
-            <a:ext cx="447480" cy="447480"/>
+            <a:ext cx="447120" cy="447120"/>
           </a:xfrm>
           <a:custGeom>
             <a:avLst/>
@@ -21551,7 +21411,7 @@
         <p:spPr>
           <a:xfrm>
             <a:off x="333360" y="3591000"/>
-            <a:ext cx="533160" cy="437760"/>
+            <a:ext cx="532800" cy="437400"/>
           </a:xfrm>
           <a:prstGeom prst="rect">
             <a:avLst/>
@@ -21603,7 +21463,7 @@
         <p:spPr>
           <a:xfrm>
             <a:off x="1066680" y="3686040"/>
-            <a:ext cx="10829520" cy="266400"/>
+            <a:ext cx="10830240" cy="266040"/>
           </a:xfrm>
           <a:prstGeom prst="rect">
             <a:avLst/>
@@ -21655,7 +21515,7 @@
         <p:spPr>
           <a:xfrm>
             <a:off x="385920" y="4243320"/>
-            <a:ext cx="447480" cy="447480"/>
+            <a:ext cx="447120" cy="447120"/>
           </a:xfrm>
           <a:custGeom>
             <a:avLst/>
@@ -21707,7 +21567,7 @@
         <p:spPr>
           <a:xfrm>
             <a:off x="333360" y="4238640"/>
-            <a:ext cx="533160" cy="437760"/>
+            <a:ext cx="532800" cy="437400"/>
           </a:xfrm>
           <a:prstGeom prst="rect">
             <a:avLst/>
@@ -21759,7 +21619,7 @@
         <p:spPr>
           <a:xfrm>
             <a:off x="1066680" y="4200480"/>
-            <a:ext cx="10829520" cy="266400"/>
+            <a:ext cx="10830240" cy="266040"/>
           </a:xfrm>
           <a:prstGeom prst="rect">
             <a:avLst/>
@@ -21811,7 +21671,7 @@
         <p:spPr>
           <a:xfrm>
             <a:off x="1066680" y="4505400"/>
-            <a:ext cx="10820160" cy="228240"/>
+            <a:ext cx="10820880" cy="227880"/>
           </a:xfrm>
           <a:prstGeom prst="rect">
             <a:avLst/>
@@ -21873,7 +21733,7 @@
         <p:spPr>
           <a:xfrm>
             <a:off x="380880" y="4971960"/>
-            <a:ext cx="11429640" cy="18720"/>
+            <a:ext cx="11430360" cy="18360"/>
           </a:xfrm>
           <a:custGeom>
             <a:avLst/>
@@ -21924,7 +21784,7 @@
         <p:spPr>
           <a:xfrm>
             <a:off x="380880" y="5210280"/>
-            <a:ext cx="11496240" cy="190080"/>
+            <a:ext cx="11496960" cy="189720"/>
           </a:xfrm>
           <a:prstGeom prst="rect">
             <a:avLst/>
@@ -21952,7 +21812,7 @@
               <a:buNone/>
             </a:pPr>
             <a:r>
-              <a:rPr b="0" lang="en-US" sz="1050" spc="208" strike="noStrike">
+              <a:rPr b="0" lang="en-US" sz="1050" spc="205" strike="noStrike">
                 <a:solidFill>
                   <a:srgbClr val="86868b"/>
                 </a:solidFill>
@@ -21976,7 +21836,7 @@
         <p:spPr>
           <a:xfrm>
             <a:off x="380880" y="5514840"/>
-            <a:ext cx="11525040" cy="266400"/>
+            <a:ext cx="11525760" cy="266040"/>
           </a:xfrm>
           <a:prstGeom prst="rect">
             <a:avLst/>
@@ -22028,7 +21888,7 @@
         <p:spPr>
           <a:xfrm>
             <a:off x="380880" y="5896080"/>
-            <a:ext cx="11515320" cy="266400"/>
+            <a:ext cx="11516040" cy="266040"/>
           </a:xfrm>
           <a:prstGeom prst="rect">
             <a:avLst/>

--- a/assets/libreoffice_impr_njc/bde97a2f-56de-4c6c-acd6-3aec3d25caff/The Birthday Paradox.pptx
+++ b/assets/libreoffice_impr_njc/bde97a2f-56de-4c6c-acd6-3aec3d25caff/The Birthday Paradox.pptx
@@ -26,7 +26,7 @@
     <p:sldId id="271" r:id="rId19"/>
     <p:sldId id="272" r:id="rId20"/>
   </p:sldIdLst>
-  <p:sldSz cx="12193588" cy="6858000"/>
+  <p:sldSz cx="12192000" cy="6858000"/>
   <p:notesSz cx="6858000" cy="12192000"/>
 </p:presentation>
 </file>
@@ -83,7 +83,13 @@
               <a:rPr b="0" lang="en-HK" sz="4400" spc="-1" strike="noStrike">
                 <a:latin typeface="Arial"/>
               </a:rPr>
-              <a:t>Click to move the slide</a:t>
+              <a:t>Click to move the </a:t>
+            </a:r>
+            <a:r>
+              <a:rPr b="0" lang="en-HK" sz="4400" spc="-1" strike="noStrike">
+                <a:latin typeface="Arial"/>
+              </a:rPr>
+              <a:t>slide</a:t>
             </a:r>
             <a:endParaRPr b="0" lang="en-HK" sz="4400" spc="-1" strike="noStrike">
               <a:latin typeface="Arial"/>
@@ -123,7 +129,79 @@
               <a:rPr b="0" lang="en-HK" sz="2000" spc="-1" strike="noStrike">
                 <a:latin typeface="Arial"/>
               </a:rPr>
-              <a:t>Click to edit the notes format</a:t>
+              <a:t>Clic</a:t>
+            </a:r>
+            <a:r>
+              <a:rPr b="0" lang="en-HK" sz="2000" spc="-1" strike="noStrike">
+                <a:latin typeface="Arial"/>
+              </a:rPr>
+              <a:t>k </a:t>
+            </a:r>
+            <a:r>
+              <a:rPr b="0" lang="en-HK" sz="2000" spc="-1" strike="noStrike">
+                <a:latin typeface="Arial"/>
+              </a:rPr>
+              <a:t>to </a:t>
+            </a:r>
+            <a:r>
+              <a:rPr b="0" lang="en-HK" sz="2000" spc="-1" strike="noStrike">
+                <a:latin typeface="Arial"/>
+              </a:rPr>
+              <a:t>ed</a:t>
+            </a:r>
+            <a:r>
+              <a:rPr b="0" lang="en-HK" sz="2000" spc="-1" strike="noStrike">
+                <a:latin typeface="Arial"/>
+              </a:rPr>
+              <a:t>it </a:t>
+            </a:r>
+            <a:r>
+              <a:rPr b="0" lang="en-HK" sz="2000" spc="-1" strike="noStrike">
+                <a:latin typeface="Arial"/>
+              </a:rPr>
+              <a:t>th</a:t>
+            </a:r>
+            <a:r>
+              <a:rPr b="0" lang="en-HK" sz="2000" spc="-1" strike="noStrike">
+                <a:latin typeface="Arial"/>
+              </a:rPr>
+              <a:t>e </a:t>
+            </a:r>
+            <a:r>
+              <a:rPr b="0" lang="en-HK" sz="2000" spc="-1" strike="noStrike">
+                <a:latin typeface="Arial"/>
+              </a:rPr>
+              <a:t>no</a:t>
+            </a:r>
+            <a:r>
+              <a:rPr b="0" lang="en-HK" sz="2000" spc="-1" strike="noStrike">
+                <a:latin typeface="Arial"/>
+              </a:rPr>
+              <a:t>te</a:t>
+            </a:r>
+            <a:r>
+              <a:rPr b="0" lang="en-HK" sz="2000" spc="-1" strike="noStrike">
+                <a:latin typeface="Arial"/>
+              </a:rPr>
+              <a:t>s </a:t>
+            </a:r>
+            <a:r>
+              <a:rPr b="0" lang="en-HK" sz="2000" spc="-1" strike="noStrike">
+                <a:latin typeface="Arial"/>
+              </a:rPr>
+              <a:t>for</a:t>
+            </a:r>
+            <a:r>
+              <a:rPr b="0" lang="en-HK" sz="2000" spc="-1" strike="noStrike">
+                <a:latin typeface="Arial"/>
+              </a:rPr>
+              <a:t>m</a:t>
+            </a:r>
+            <a:r>
+              <a:rPr b="0" lang="en-HK" sz="2000" spc="-1" strike="noStrike">
+                <a:latin typeface="Arial"/>
+              </a:rPr>
+              <a:t>at</a:t>
             </a:r>
             <a:endParaRPr b="0" lang="en-HK" sz="2000" spc="-1" strike="noStrike">
               <a:latin typeface="Arial"/>
@@ -308,7 +386,7 @@
             <a:pPr algn="r">
               <a:buNone/>
             </a:pPr>
-            <a:fld id="{264ACDED-1FE3-466C-BE2A-21B7A8986AAF}" type="slidenum">
+            <a:fld id="{881BFCED-59A0-4ABB-9282-75DBE0199356}" type="slidenum">
               <a:rPr b="0" lang="en-HK" sz="1400" spc="-1" strike="noStrike">
                 <a:latin typeface="Times New Roman"/>
               </a:rPr>
@@ -356,7 +434,7 @@
         <p:spPr>
           <a:xfrm>
             <a:off x="685800" y="1143000"/>
-            <a:ext cx="5485680" cy="3085560"/>
+            <a:ext cx="5484600" cy="3084480"/>
           </a:xfrm>
           <a:prstGeom prst="rect">
             <a:avLst/>
@@ -379,7 +457,7 @@
         <p:spPr>
           <a:xfrm>
             <a:off x="685800" y="4400640"/>
-            <a:ext cx="5485680" cy="3599640"/>
+            <a:ext cx="5484600" cy="3598560"/>
           </a:xfrm>
           <a:prstGeom prst="rect">
             <a:avLst/>
@@ -413,7 +491,7 @@
         <p:spPr>
           <a:xfrm>
             <a:off x="3884760" y="8685360"/>
-            <a:ext cx="2971080" cy="457920"/>
+            <a:ext cx="2970000" cy="456840"/>
           </a:xfrm>
           <a:prstGeom prst="rect">
             <a:avLst/>
@@ -445,7 +523,7 @@
               </a:lnSpc>
               <a:buNone/>
             </a:pPr>
-            <a:fld id="{19FCC7AA-E511-43EC-B8B9-AEB87CA7753C}" type="slidenum">
+            <a:fld id="{B2819DB8-7506-4170-AC7D-85190126B00E}" type="slidenum">
               <a:rPr b="0" lang="en-US" sz="1200" spc="-1" strike="noStrike">
                 <a:latin typeface="Times New Roman"/>
               </a:rPr>
@@ -492,7 +570,7 @@
         <p:spPr>
           <a:xfrm>
             <a:off x="685800" y="1143000"/>
-            <a:ext cx="5485680" cy="3085560"/>
+            <a:ext cx="5484600" cy="3084480"/>
           </a:xfrm>
           <a:prstGeom prst="rect">
             <a:avLst/>
@@ -515,7 +593,7 @@
         <p:spPr>
           <a:xfrm>
             <a:off x="685800" y="4400640"/>
-            <a:ext cx="5485680" cy="3599640"/>
+            <a:ext cx="5484600" cy="3598560"/>
           </a:xfrm>
           <a:prstGeom prst="rect">
             <a:avLst/>
@@ -549,7 +627,7 @@
         <p:spPr>
           <a:xfrm>
             <a:off x="3884760" y="8685360"/>
-            <a:ext cx="2971080" cy="457920"/>
+            <a:ext cx="2970000" cy="456840"/>
           </a:xfrm>
           <a:prstGeom prst="rect">
             <a:avLst/>
@@ -581,7 +659,7 @@
               </a:lnSpc>
               <a:buNone/>
             </a:pPr>
-            <a:fld id="{39C825CA-1B5D-4F8E-990D-A17084BB73AE}" type="slidenum">
+            <a:fld id="{152AA2F6-A235-45A6-B4BD-06BE56142B61}" type="slidenum">
               <a:rPr b="0" lang="en-US" sz="1200" spc="-1" strike="noStrike">
                 <a:latin typeface="Times New Roman"/>
               </a:rPr>
@@ -628,7 +706,7 @@
         <p:spPr>
           <a:xfrm>
             <a:off x="685800" y="1143000"/>
-            <a:ext cx="5485680" cy="3085560"/>
+            <a:ext cx="5484600" cy="3084480"/>
           </a:xfrm>
           <a:prstGeom prst="rect">
             <a:avLst/>
@@ -651,7 +729,7 @@
         <p:spPr>
           <a:xfrm>
             <a:off x="685800" y="4400640"/>
-            <a:ext cx="5485680" cy="3599640"/>
+            <a:ext cx="5484600" cy="3598560"/>
           </a:xfrm>
           <a:prstGeom prst="rect">
             <a:avLst/>
@@ -685,7 +763,7 @@
         <p:spPr>
           <a:xfrm>
             <a:off x="3884760" y="8685360"/>
-            <a:ext cx="2971080" cy="457920"/>
+            <a:ext cx="2970000" cy="456840"/>
           </a:xfrm>
           <a:prstGeom prst="rect">
             <a:avLst/>
@@ -717,7 +795,7 @@
               </a:lnSpc>
               <a:buNone/>
             </a:pPr>
-            <a:fld id="{35862B41-1193-48F1-9A08-19E495586ED4}" type="slidenum">
+            <a:fld id="{C62AC7D2-EEDC-488E-B172-C2439D15D884}" type="slidenum">
               <a:rPr b="0" lang="en-US" sz="1200" spc="-1" strike="noStrike">
                 <a:latin typeface="Times New Roman"/>
               </a:rPr>
@@ -764,7 +842,7 @@
         <p:spPr>
           <a:xfrm>
             <a:off x="685800" y="1143000"/>
-            <a:ext cx="5485680" cy="3085560"/>
+            <a:ext cx="5484600" cy="3084480"/>
           </a:xfrm>
           <a:prstGeom prst="rect">
             <a:avLst/>
@@ -787,7 +865,7 @@
         <p:spPr>
           <a:xfrm>
             <a:off x="685800" y="4400640"/>
-            <a:ext cx="5485680" cy="3599640"/>
+            <a:ext cx="5484600" cy="3598560"/>
           </a:xfrm>
           <a:prstGeom prst="rect">
             <a:avLst/>
@@ -821,7 +899,7 @@
         <p:spPr>
           <a:xfrm>
             <a:off x="3884760" y="8685360"/>
-            <a:ext cx="2971080" cy="457920"/>
+            <a:ext cx="2970000" cy="456840"/>
           </a:xfrm>
           <a:prstGeom prst="rect">
             <a:avLst/>
@@ -853,7 +931,7 @@
               </a:lnSpc>
               <a:buNone/>
             </a:pPr>
-            <a:fld id="{05946839-8F79-4A54-9D20-8987FC810CC7}" type="slidenum">
+            <a:fld id="{FB921312-8074-4E0E-AB82-4749F586FDFA}" type="slidenum">
               <a:rPr b="0" lang="en-US" sz="1200" spc="-1" strike="noStrike">
                 <a:latin typeface="Times New Roman"/>
               </a:rPr>
@@ -900,7 +978,7 @@
         <p:spPr>
           <a:xfrm>
             <a:off x="685800" y="1143000"/>
-            <a:ext cx="5485680" cy="3085560"/>
+            <a:ext cx="5484600" cy="3084480"/>
           </a:xfrm>
           <a:prstGeom prst="rect">
             <a:avLst/>
@@ -923,7 +1001,7 @@
         <p:spPr>
           <a:xfrm>
             <a:off x="685800" y="4400640"/>
-            <a:ext cx="5485680" cy="3599640"/>
+            <a:ext cx="5484600" cy="3598560"/>
           </a:xfrm>
           <a:prstGeom prst="rect">
             <a:avLst/>
@@ -957,7 +1035,7 @@
         <p:spPr>
           <a:xfrm>
             <a:off x="3884760" y="8685360"/>
-            <a:ext cx="2971080" cy="457920"/>
+            <a:ext cx="2970000" cy="456840"/>
           </a:xfrm>
           <a:prstGeom prst="rect">
             <a:avLst/>
@@ -989,7 +1067,7 @@
               </a:lnSpc>
               <a:buNone/>
             </a:pPr>
-            <a:fld id="{03A70282-BF47-4ADF-8318-7ACD55A6E084}" type="slidenum">
+            <a:fld id="{C11F67F8-AC20-4F3A-9C6A-71FD12BE5F34}" type="slidenum">
               <a:rPr b="0" lang="en-US" sz="1200" spc="-1" strike="noStrike">
                 <a:latin typeface="Times New Roman"/>
               </a:rPr>
@@ -1036,7 +1114,7 @@
         <p:spPr>
           <a:xfrm>
             <a:off x="685800" y="1143000"/>
-            <a:ext cx="5485680" cy="3085560"/>
+            <a:ext cx="5484600" cy="3084480"/>
           </a:xfrm>
           <a:prstGeom prst="rect">
             <a:avLst/>
@@ -1059,7 +1137,7 @@
         <p:spPr>
           <a:xfrm>
             <a:off x="685800" y="4400640"/>
-            <a:ext cx="5485680" cy="3599640"/>
+            <a:ext cx="5484600" cy="3598560"/>
           </a:xfrm>
           <a:prstGeom prst="rect">
             <a:avLst/>
@@ -1093,7 +1171,7 @@
         <p:spPr>
           <a:xfrm>
             <a:off x="3884760" y="8685360"/>
-            <a:ext cx="2971080" cy="457920"/>
+            <a:ext cx="2970000" cy="456840"/>
           </a:xfrm>
           <a:prstGeom prst="rect">
             <a:avLst/>
@@ -1125,7 +1203,7 @@
               </a:lnSpc>
               <a:buNone/>
             </a:pPr>
-            <a:fld id="{B8D2331E-0A3F-471B-AD54-6D80CCD4BF57}" type="slidenum">
+            <a:fld id="{D3BB00D3-7540-4349-9F57-3A55A958B151}" type="slidenum">
               <a:rPr b="0" lang="en-US" sz="1200" spc="-1" strike="noStrike">
                 <a:latin typeface="Times New Roman"/>
               </a:rPr>
@@ -1172,7 +1250,7 @@
         <p:spPr>
           <a:xfrm>
             <a:off x="685800" y="1143000"/>
-            <a:ext cx="5485680" cy="3085560"/>
+            <a:ext cx="5484600" cy="3084480"/>
           </a:xfrm>
           <a:prstGeom prst="rect">
             <a:avLst/>
@@ -1195,7 +1273,7 @@
         <p:spPr>
           <a:xfrm>
             <a:off x="685800" y="4400640"/>
-            <a:ext cx="5485680" cy="3599640"/>
+            <a:ext cx="5484600" cy="3598560"/>
           </a:xfrm>
           <a:prstGeom prst="rect">
             <a:avLst/>
@@ -1229,7 +1307,7 @@
         <p:spPr>
           <a:xfrm>
             <a:off x="3884760" y="8685360"/>
-            <a:ext cx="2971080" cy="457920"/>
+            <a:ext cx="2970000" cy="456840"/>
           </a:xfrm>
           <a:prstGeom prst="rect">
             <a:avLst/>
@@ -1261,7 +1339,7 @@
               </a:lnSpc>
               <a:buNone/>
             </a:pPr>
-            <a:fld id="{44A0A2DF-1E2F-4FDD-8513-AB26B48497C2}" type="slidenum">
+            <a:fld id="{FB2383DF-D831-492C-AA05-F68224E80D1C}" type="slidenum">
               <a:rPr b="0" lang="en-US" sz="1200" spc="-1" strike="noStrike">
                 <a:latin typeface="Times New Roman"/>
               </a:rPr>
@@ -1308,7 +1386,7 @@
         <p:spPr>
           <a:xfrm>
             <a:off x="685800" y="1143000"/>
-            <a:ext cx="5485680" cy="3085560"/>
+            <a:ext cx="5484600" cy="3084480"/>
           </a:xfrm>
           <a:prstGeom prst="rect">
             <a:avLst/>
@@ -1331,7 +1409,7 @@
         <p:spPr>
           <a:xfrm>
             <a:off x="685800" y="4400640"/>
-            <a:ext cx="5485680" cy="3599640"/>
+            <a:ext cx="5484600" cy="3598560"/>
           </a:xfrm>
           <a:prstGeom prst="rect">
             <a:avLst/>
@@ -1365,7 +1443,7 @@
         <p:spPr>
           <a:xfrm>
             <a:off x="3884760" y="8685360"/>
-            <a:ext cx="2971080" cy="457920"/>
+            <a:ext cx="2970000" cy="456840"/>
           </a:xfrm>
           <a:prstGeom prst="rect">
             <a:avLst/>
@@ -1397,7 +1475,7 @@
               </a:lnSpc>
               <a:buNone/>
             </a:pPr>
-            <a:fld id="{6549172F-6574-4DE0-A338-34834B14FD37}" type="slidenum">
+            <a:fld id="{91442F6D-F798-4837-BF42-8C251098E4F0}" type="slidenum">
               <a:rPr b="0" lang="en-US" sz="1200" spc="-1" strike="noStrike">
                 <a:latin typeface="Times New Roman"/>
               </a:rPr>
@@ -1444,7 +1522,7 @@
         <p:spPr>
           <a:xfrm>
             <a:off x="685800" y="1143000"/>
-            <a:ext cx="5485680" cy="3085560"/>
+            <a:ext cx="5484600" cy="3084480"/>
           </a:xfrm>
           <a:prstGeom prst="rect">
             <a:avLst/>
@@ -1467,7 +1545,7 @@
         <p:spPr>
           <a:xfrm>
             <a:off x="685800" y="4400640"/>
-            <a:ext cx="5485680" cy="3599640"/>
+            <a:ext cx="5484600" cy="3598560"/>
           </a:xfrm>
           <a:prstGeom prst="rect">
             <a:avLst/>
@@ -1501,7 +1579,7 @@
         <p:spPr>
           <a:xfrm>
             <a:off x="3884760" y="8685360"/>
-            <a:ext cx="2971080" cy="457920"/>
+            <a:ext cx="2970000" cy="456840"/>
           </a:xfrm>
           <a:prstGeom prst="rect">
             <a:avLst/>
@@ -1533,7 +1611,7 @@
               </a:lnSpc>
               <a:buNone/>
             </a:pPr>
-            <a:fld id="{7B9A0B10-74C7-4BD7-AD87-C5A97968AAC4}" type="slidenum">
+            <a:fld id="{9932DE40-F147-4CF4-85D6-E893B723435A}" type="slidenum">
               <a:rPr b="0" lang="en-US" sz="1200" spc="-1" strike="noStrike">
                 <a:latin typeface="Times New Roman"/>
               </a:rPr>
@@ -1580,7 +1658,7 @@
         <p:spPr>
           <a:xfrm>
             <a:off x="685800" y="1143000"/>
-            <a:ext cx="5485680" cy="3085560"/>
+            <a:ext cx="5484600" cy="3084480"/>
           </a:xfrm>
           <a:prstGeom prst="rect">
             <a:avLst/>
@@ -1603,7 +1681,7 @@
         <p:spPr>
           <a:xfrm>
             <a:off x="685800" y="4400640"/>
-            <a:ext cx="5485680" cy="3599640"/>
+            <a:ext cx="5484600" cy="3598560"/>
           </a:xfrm>
           <a:prstGeom prst="rect">
             <a:avLst/>
@@ -1637,7 +1715,7 @@
         <p:spPr>
           <a:xfrm>
             <a:off x="3884760" y="8685360"/>
-            <a:ext cx="2971080" cy="457920"/>
+            <a:ext cx="2970000" cy="456840"/>
           </a:xfrm>
           <a:prstGeom prst="rect">
             <a:avLst/>
@@ -1669,7 +1747,7 @@
               </a:lnSpc>
               <a:buNone/>
             </a:pPr>
-            <a:fld id="{2F5BD15B-0014-4ED7-8550-4BD2F31E1B98}" type="slidenum">
+            <a:fld id="{A0520053-988B-48EF-BCE4-86A9EFCD96EB}" type="slidenum">
               <a:rPr b="0" lang="en-US" sz="1200" spc="-1" strike="noStrike">
                 <a:latin typeface="Times New Roman"/>
               </a:rPr>
@@ -1716,7 +1794,7 @@
         <p:spPr>
           <a:xfrm>
             <a:off x="685800" y="1143000"/>
-            <a:ext cx="5485680" cy="3085560"/>
+            <a:ext cx="5484600" cy="3084480"/>
           </a:xfrm>
           <a:prstGeom prst="rect">
             <a:avLst/>
@@ -1739,7 +1817,7 @@
         <p:spPr>
           <a:xfrm>
             <a:off x="685800" y="4400640"/>
-            <a:ext cx="5485680" cy="3599640"/>
+            <a:ext cx="5484600" cy="3598560"/>
           </a:xfrm>
           <a:prstGeom prst="rect">
             <a:avLst/>
@@ -1773,7 +1851,7 @@
         <p:spPr>
           <a:xfrm>
             <a:off x="3884760" y="8685360"/>
-            <a:ext cx="2971080" cy="457920"/>
+            <a:ext cx="2970000" cy="456840"/>
           </a:xfrm>
           <a:prstGeom prst="rect">
             <a:avLst/>
@@ -1805,7 +1883,7 @@
               </a:lnSpc>
               <a:buNone/>
             </a:pPr>
-            <a:fld id="{8A22B080-BC38-47E5-98A6-D89E8C7836F6}" type="slidenum">
+            <a:fld id="{E14759A7-2955-403E-91D2-A4B365B1C786}" type="slidenum">
               <a:rPr b="0" lang="en-US" sz="1200" spc="-1" strike="noStrike">
                 <a:latin typeface="Times New Roman"/>
               </a:rPr>
@@ -1852,7 +1930,7 @@
         <p:spPr>
           <a:xfrm>
             <a:off x="685800" y="1143000"/>
-            <a:ext cx="5485680" cy="3085560"/>
+            <a:ext cx="5484600" cy="3084480"/>
           </a:xfrm>
           <a:prstGeom prst="rect">
             <a:avLst/>
@@ -1875,7 +1953,7 @@
         <p:spPr>
           <a:xfrm>
             <a:off x="685800" y="4400640"/>
-            <a:ext cx="5485680" cy="3599640"/>
+            <a:ext cx="5484600" cy="3598560"/>
           </a:xfrm>
           <a:prstGeom prst="rect">
             <a:avLst/>
@@ -1909,7 +1987,7 @@
         <p:spPr>
           <a:xfrm>
             <a:off x="3884760" y="8685360"/>
-            <a:ext cx="2971080" cy="457920"/>
+            <a:ext cx="2970000" cy="456840"/>
           </a:xfrm>
           <a:prstGeom prst="rect">
             <a:avLst/>
@@ -1941,7 +2019,7 @@
               </a:lnSpc>
               <a:buNone/>
             </a:pPr>
-            <a:fld id="{F59EAD94-9E80-428F-92E7-F91F3C6151D5}" type="slidenum">
+            <a:fld id="{A7FF8484-52C5-43CD-A014-0486226DE675}" type="slidenum">
               <a:rPr b="0" lang="en-US" sz="1200" spc="-1" strike="noStrike">
                 <a:latin typeface="Times New Roman"/>
               </a:rPr>
@@ -1988,7 +2066,7 @@
         <p:spPr>
           <a:xfrm>
             <a:off x="685800" y="1143000"/>
-            <a:ext cx="5485680" cy="3085560"/>
+            <a:ext cx="5484600" cy="3084480"/>
           </a:xfrm>
           <a:prstGeom prst="rect">
             <a:avLst/>
@@ -2011,7 +2089,7 @@
         <p:spPr>
           <a:xfrm>
             <a:off x="685800" y="4400640"/>
-            <a:ext cx="5485680" cy="3599640"/>
+            <a:ext cx="5484600" cy="3598560"/>
           </a:xfrm>
           <a:prstGeom prst="rect">
             <a:avLst/>
@@ -2045,7 +2123,7 @@
         <p:spPr>
           <a:xfrm>
             <a:off x="3884760" y="8685360"/>
-            <a:ext cx="2971080" cy="457920"/>
+            <a:ext cx="2970000" cy="456840"/>
           </a:xfrm>
           <a:prstGeom prst="rect">
             <a:avLst/>
@@ -2077,7 +2155,7 @@
               </a:lnSpc>
               <a:buNone/>
             </a:pPr>
-            <a:fld id="{0B2A0CE9-F504-4152-9628-F7A7679D843F}" type="slidenum">
+            <a:fld id="{196AAF2C-1D03-4172-8FBA-350F53903B70}" type="slidenum">
               <a:rPr b="0" lang="en-US" sz="1200" spc="-1" strike="noStrike">
                 <a:latin typeface="Times New Roman"/>
               </a:rPr>
@@ -2124,7 +2202,7 @@
         <p:spPr>
           <a:xfrm>
             <a:off x="685800" y="1143000"/>
-            <a:ext cx="5485680" cy="3085560"/>
+            <a:ext cx="5484600" cy="3084480"/>
           </a:xfrm>
           <a:prstGeom prst="rect">
             <a:avLst/>
@@ -2147,7 +2225,7 @@
         <p:spPr>
           <a:xfrm>
             <a:off x="685800" y="4400640"/>
-            <a:ext cx="5485680" cy="3599640"/>
+            <a:ext cx="5484600" cy="3598560"/>
           </a:xfrm>
           <a:prstGeom prst="rect">
             <a:avLst/>
@@ -2172,19 +2250,7 @@
               <a:rPr b="0" lang="en-HK" sz="1800" spc="-1" strike="noStrike">
                 <a:latin typeface="Arial"/>
               </a:rPr>
-              <a:t>The birthday paradox illustrates how human </a:t>
-            </a:r>
-            <a:r>
-              <a:rPr b="0" lang="en-HK" sz="1800" spc="-1" strike="noStrike">
-                <a:latin typeface="Arial"/>
-              </a:rPr>
-              <a:t>intuition about probability often fails when </a:t>
-            </a:r>
-            <a:r>
-              <a:rPr b="0" lang="en-HK" sz="1800" spc="-1" strike="noStrike">
-                <a:latin typeface="Arial"/>
-              </a:rPr>
-              <a:t>dealing with combinatorial problems.</a:t>
+              <a:t>The birthday paradox illustrates how human intuition about probability often fails when dealing with combinatorial problems.</a:t>
             </a:r>
             <a:endParaRPr b="0" lang="en-HK" sz="1800" spc="-1" strike="noStrike">
               <a:latin typeface="Arial"/>
@@ -2205,7 +2271,7 @@
         <p:spPr>
           <a:xfrm>
             <a:off x="3884760" y="8685360"/>
-            <a:ext cx="2971080" cy="457920"/>
+            <a:ext cx="2970000" cy="456840"/>
           </a:xfrm>
           <a:prstGeom prst="rect">
             <a:avLst/>
@@ -2237,7 +2303,7 @@
               </a:lnSpc>
               <a:buNone/>
             </a:pPr>
-            <a:fld id="{476F5DE3-68DC-4A07-A5E3-93B05F6ECE94}" type="slidenum">
+            <a:fld id="{BE6E2FB8-806D-4EE0-BB74-AA6B927F56B4}" type="slidenum">
               <a:rPr b="0" lang="en-US" sz="1200" spc="-1" strike="noStrike">
                 <a:latin typeface="Times New Roman"/>
               </a:rPr>
@@ -2284,7 +2350,7 @@
         <p:spPr>
           <a:xfrm>
             <a:off x="685800" y="1143000"/>
-            <a:ext cx="5485680" cy="3085560"/>
+            <a:ext cx="5484600" cy="3084480"/>
           </a:xfrm>
           <a:prstGeom prst="rect">
             <a:avLst/>
@@ -2307,7 +2373,7 @@
         <p:spPr>
           <a:xfrm>
             <a:off x="685800" y="4400640"/>
-            <a:ext cx="5485680" cy="3599640"/>
+            <a:ext cx="5484600" cy="3598560"/>
           </a:xfrm>
           <a:prstGeom prst="rect">
             <a:avLst/>
@@ -2341,7 +2407,7 @@
         <p:spPr>
           <a:xfrm>
             <a:off x="3884760" y="8685360"/>
-            <a:ext cx="2971080" cy="457920"/>
+            <a:ext cx="2970000" cy="456840"/>
           </a:xfrm>
           <a:prstGeom prst="rect">
             <a:avLst/>
@@ -2373,7 +2439,7 @@
               </a:lnSpc>
               <a:buNone/>
             </a:pPr>
-            <a:fld id="{98899325-C4FC-49CD-8E00-F2A3852487AD}" type="slidenum">
+            <a:fld id="{A5A2E866-1F93-4F7A-A469-05212B3AC4A2}" type="slidenum">
               <a:rPr b="0" lang="en-US" sz="1200" spc="-1" strike="noStrike">
                 <a:latin typeface="Times New Roman"/>
               </a:rPr>
@@ -2420,7 +2486,7 @@
         <p:spPr>
           <a:xfrm>
             <a:off x="685800" y="1143000"/>
-            <a:ext cx="5485680" cy="3085560"/>
+            <a:ext cx="5484600" cy="3084480"/>
           </a:xfrm>
           <a:prstGeom prst="rect">
             <a:avLst/>
@@ -2443,7 +2509,7 @@
         <p:spPr>
           <a:xfrm>
             <a:off x="685800" y="4400640"/>
-            <a:ext cx="5485680" cy="3599640"/>
+            <a:ext cx="5484600" cy="3598560"/>
           </a:xfrm>
           <a:prstGeom prst="rect">
             <a:avLst/>
@@ -2477,7 +2543,7 @@
         <p:spPr>
           <a:xfrm>
             <a:off x="3884760" y="8685360"/>
-            <a:ext cx="2971080" cy="457920"/>
+            <a:ext cx="2970000" cy="456840"/>
           </a:xfrm>
           <a:prstGeom prst="rect">
             <a:avLst/>
@@ -2509,7 +2575,7 @@
               </a:lnSpc>
               <a:buNone/>
             </a:pPr>
-            <a:fld id="{12EF2C84-04EE-46D2-A8CB-2D8F215ADCFD}" type="slidenum">
+            <a:fld id="{15738D03-431F-4B50-B84C-8242ADC90E79}" type="slidenum">
               <a:rPr b="0" lang="en-US" sz="1200" spc="-1" strike="noStrike">
                 <a:latin typeface="Times New Roman"/>
               </a:rPr>
@@ -2556,7 +2622,7 @@
         <p:spPr>
           <a:xfrm>
             <a:off x="685800" y="1143000"/>
-            <a:ext cx="5485680" cy="3085560"/>
+            <a:ext cx="5484600" cy="3084480"/>
           </a:xfrm>
           <a:prstGeom prst="rect">
             <a:avLst/>
@@ -2579,7 +2645,7 @@
         <p:spPr>
           <a:xfrm>
             <a:off x="685800" y="4400640"/>
-            <a:ext cx="5485680" cy="3599640"/>
+            <a:ext cx="5484600" cy="3598560"/>
           </a:xfrm>
           <a:prstGeom prst="rect">
             <a:avLst/>
@@ -2613,7 +2679,7 @@
         <p:spPr>
           <a:xfrm>
             <a:off x="3884760" y="8685360"/>
-            <a:ext cx="2971080" cy="457920"/>
+            <a:ext cx="2970000" cy="456840"/>
           </a:xfrm>
           <a:prstGeom prst="rect">
             <a:avLst/>
@@ -2645,7 +2711,7 @@
               </a:lnSpc>
               <a:buNone/>
             </a:pPr>
-            <a:fld id="{E60B7AB3-E9D9-40D3-A066-457DE84298BF}" type="slidenum">
+            <a:fld id="{2617A5B0-E997-4836-A949-546A63FB955F}" type="slidenum">
               <a:rPr b="0" lang="en-US" sz="1200" spc="-1" strike="noStrike">
                 <a:latin typeface="Times New Roman"/>
               </a:rPr>
@@ -2714,7 +2780,7 @@
         <p:spPr>
           <a:xfrm>
             <a:off x="609480" y="273600"/>
-            <a:ext cx="10973520" cy="1144800"/>
+            <a:ext cx="10972440" cy="1144800"/>
           </a:xfrm>
           <a:prstGeom prst="rect">
             <a:avLst/>
@@ -2751,7 +2817,7 @@
         <p:spPr>
           <a:xfrm>
             <a:off x="609480" y="1604520"/>
-            <a:ext cx="10973520" cy="1896840"/>
+            <a:ext cx="10972440" cy="1896840"/>
           </a:xfrm>
           <a:prstGeom prst="rect">
             <a:avLst/>
@@ -2785,7 +2851,7 @@
         <p:spPr>
           <a:xfrm>
             <a:off x="609480" y="3682080"/>
-            <a:ext cx="10973520" cy="1896840"/>
+            <a:ext cx="10972440" cy="1896840"/>
           </a:xfrm>
           <a:prstGeom prst="rect">
             <a:avLst/>
@@ -2841,7 +2907,7 @@
         <p:spPr>
           <a:xfrm>
             <a:off x="609480" y="273600"/>
-            <a:ext cx="10973520" cy="1144800"/>
+            <a:ext cx="10972440" cy="1144800"/>
           </a:xfrm>
           <a:prstGeom prst="rect">
             <a:avLst/>
@@ -2878,7 +2944,7 @@
         <p:spPr>
           <a:xfrm>
             <a:off x="609480" y="1604520"/>
-            <a:ext cx="5355000" cy="1896840"/>
+            <a:ext cx="5354280" cy="1896840"/>
           </a:xfrm>
           <a:prstGeom prst="rect">
             <a:avLst/>
@@ -2911,8 +2977,8 @@
         </p:nvSpPr>
         <p:spPr>
           <a:xfrm>
-            <a:off x="6232680" y="1604520"/>
-            <a:ext cx="5355000" cy="1896840"/>
+            <a:off x="6231960" y="1604520"/>
+            <a:ext cx="5354280" cy="1896840"/>
           </a:xfrm>
           <a:prstGeom prst="rect">
             <a:avLst/>
@@ -2946,7 +3012,7 @@
         <p:spPr>
           <a:xfrm>
             <a:off x="609480" y="3682080"/>
-            <a:ext cx="5355000" cy="1896840"/>
+            <a:ext cx="5354280" cy="1896840"/>
           </a:xfrm>
           <a:prstGeom prst="rect">
             <a:avLst/>
@@ -2979,8 +3045,8 @@
         </p:nvSpPr>
         <p:spPr>
           <a:xfrm>
-            <a:off x="6232680" y="3682080"/>
-            <a:ext cx="5355000" cy="1896840"/>
+            <a:off x="6231960" y="3682080"/>
+            <a:ext cx="5354280" cy="1896840"/>
           </a:xfrm>
           <a:prstGeom prst="rect">
             <a:avLst/>
@@ -3036,7 +3102,7 @@
         <p:spPr>
           <a:xfrm>
             <a:off x="609480" y="273600"/>
-            <a:ext cx="10973520" cy="1144800"/>
+            <a:ext cx="10972440" cy="1144800"/>
           </a:xfrm>
           <a:prstGeom prst="rect">
             <a:avLst/>
@@ -3073,7 +3139,7 @@
         <p:spPr>
           <a:xfrm>
             <a:off x="609480" y="1604520"/>
-            <a:ext cx="3533400" cy="1896840"/>
+            <a:ext cx="3533040" cy="1896840"/>
           </a:xfrm>
           <a:prstGeom prst="rect">
             <a:avLst/>
@@ -3106,8 +3172,8 @@
         </p:nvSpPr>
         <p:spPr>
           <a:xfrm>
-            <a:off x="4320000" y="1604520"/>
-            <a:ext cx="3533400" cy="1896840"/>
+            <a:off x="4319640" y="1604520"/>
+            <a:ext cx="3533040" cy="1896840"/>
           </a:xfrm>
           <a:prstGeom prst="rect">
             <a:avLst/>
@@ -3140,8 +3206,8 @@
         </p:nvSpPr>
         <p:spPr>
           <a:xfrm>
-            <a:off x="8030520" y="1604520"/>
-            <a:ext cx="3533400" cy="1896840"/>
+            <a:off x="8029800" y="1604520"/>
+            <a:ext cx="3533040" cy="1896840"/>
           </a:xfrm>
           <a:prstGeom prst="rect">
             <a:avLst/>
@@ -3175,7 +3241,7 @@
         <p:spPr>
           <a:xfrm>
             <a:off x="609480" y="3682080"/>
-            <a:ext cx="3533400" cy="1896840"/>
+            <a:ext cx="3533040" cy="1896840"/>
           </a:xfrm>
           <a:prstGeom prst="rect">
             <a:avLst/>
@@ -3208,8 +3274,8 @@
         </p:nvSpPr>
         <p:spPr>
           <a:xfrm>
-            <a:off x="4320000" y="3682080"/>
-            <a:ext cx="3533400" cy="1896840"/>
+            <a:off x="4319640" y="3682080"/>
+            <a:ext cx="3533040" cy="1896840"/>
           </a:xfrm>
           <a:prstGeom prst="rect">
             <a:avLst/>
@@ -3242,8 +3308,8 @@
         </p:nvSpPr>
         <p:spPr>
           <a:xfrm>
-            <a:off x="8030520" y="3682080"/>
-            <a:ext cx="3533400" cy="1896840"/>
+            <a:off x="8029800" y="3682080"/>
+            <a:ext cx="3533040" cy="1896840"/>
           </a:xfrm>
           <a:prstGeom prst="rect">
             <a:avLst/>
@@ -3299,7 +3365,7 @@
         <p:spPr>
           <a:xfrm>
             <a:off x="609480" y="273600"/>
-            <a:ext cx="10973520" cy="1144800"/>
+            <a:ext cx="10972440" cy="1144800"/>
           </a:xfrm>
           <a:prstGeom prst="rect">
             <a:avLst/>
@@ -3336,7 +3402,7 @@
         <p:spPr>
           <a:xfrm>
             <a:off x="609480" y="1604520"/>
-            <a:ext cx="10973520" cy="3977280"/>
+            <a:ext cx="10972440" cy="3977280"/>
           </a:xfrm>
           <a:prstGeom prst="rect">
             <a:avLst/>
@@ -3395,7 +3461,7 @@
         <p:spPr>
           <a:xfrm>
             <a:off x="609480" y="273600"/>
-            <a:ext cx="10973520" cy="1144800"/>
+            <a:ext cx="10972440" cy="1144800"/>
           </a:xfrm>
           <a:prstGeom prst="rect">
             <a:avLst/>
@@ -3432,7 +3498,7 @@
         <p:spPr>
           <a:xfrm>
             <a:off x="609480" y="1604520"/>
-            <a:ext cx="10973520" cy="3977280"/>
+            <a:ext cx="10972440" cy="3977280"/>
           </a:xfrm>
           <a:prstGeom prst="rect">
             <a:avLst/>
@@ -3488,7 +3554,7 @@
         <p:spPr>
           <a:xfrm>
             <a:off x="609480" y="273600"/>
-            <a:ext cx="10973520" cy="1144800"/>
+            <a:ext cx="10972440" cy="1144800"/>
           </a:xfrm>
           <a:prstGeom prst="rect">
             <a:avLst/>
@@ -3525,7 +3591,7 @@
         <p:spPr>
           <a:xfrm>
             <a:off x="609480" y="1604520"/>
-            <a:ext cx="5355000" cy="3977280"/>
+            <a:ext cx="5354280" cy="3977280"/>
           </a:xfrm>
           <a:prstGeom prst="rect">
             <a:avLst/>
@@ -3558,8 +3624,8 @@
         </p:nvSpPr>
         <p:spPr>
           <a:xfrm>
-            <a:off x="6232680" y="1604520"/>
-            <a:ext cx="5355000" cy="3977280"/>
+            <a:off x="6231960" y="1604520"/>
+            <a:ext cx="5354280" cy="3977280"/>
           </a:xfrm>
           <a:prstGeom prst="rect">
             <a:avLst/>
@@ -3615,7 +3681,7 @@
         <p:spPr>
           <a:xfrm>
             <a:off x="609480" y="273600"/>
-            <a:ext cx="10973520" cy="1144800"/>
+            <a:ext cx="10972440" cy="1144800"/>
           </a:xfrm>
           <a:prstGeom prst="rect">
             <a:avLst/>
@@ -3674,7 +3740,7 @@
         <p:spPr>
           <a:xfrm>
             <a:off x="609480" y="273600"/>
-            <a:ext cx="10973520" cy="5307840"/>
+            <a:ext cx="10972440" cy="5307840"/>
           </a:xfrm>
           <a:prstGeom prst="rect">
             <a:avLst/>
@@ -3733,7 +3799,7 @@
         <p:spPr>
           <a:xfrm>
             <a:off x="609480" y="273600"/>
-            <a:ext cx="10973520" cy="1144800"/>
+            <a:ext cx="10972440" cy="1144800"/>
           </a:xfrm>
           <a:prstGeom prst="rect">
             <a:avLst/>
@@ -3770,7 +3836,7 @@
         <p:spPr>
           <a:xfrm>
             <a:off x="609480" y="1604520"/>
-            <a:ext cx="5355000" cy="1896840"/>
+            <a:ext cx="5354280" cy="1896840"/>
           </a:xfrm>
           <a:prstGeom prst="rect">
             <a:avLst/>
@@ -3803,8 +3869,8 @@
         </p:nvSpPr>
         <p:spPr>
           <a:xfrm>
-            <a:off x="6232680" y="1604520"/>
-            <a:ext cx="5355000" cy="3977280"/>
+            <a:off x="6231960" y="1604520"/>
+            <a:ext cx="5354280" cy="3977280"/>
           </a:xfrm>
           <a:prstGeom prst="rect">
             <a:avLst/>
@@ -3838,7 +3904,7 @@
         <p:spPr>
           <a:xfrm>
             <a:off x="609480" y="3682080"/>
-            <a:ext cx="5355000" cy="1896840"/>
+            <a:ext cx="5354280" cy="1896840"/>
           </a:xfrm>
           <a:prstGeom prst="rect">
             <a:avLst/>
@@ -3894,7 +3960,7 @@
         <p:spPr>
           <a:xfrm>
             <a:off x="609480" y="273600"/>
-            <a:ext cx="10973520" cy="1144800"/>
+            <a:ext cx="10972440" cy="1144800"/>
           </a:xfrm>
           <a:prstGeom prst="rect">
             <a:avLst/>
@@ -3931,7 +3997,7 @@
         <p:spPr>
           <a:xfrm>
             <a:off x="609480" y="1604520"/>
-            <a:ext cx="5355000" cy="3977280"/>
+            <a:ext cx="5354280" cy="3977280"/>
           </a:xfrm>
           <a:prstGeom prst="rect">
             <a:avLst/>
@@ -3964,8 +4030,8 @@
         </p:nvSpPr>
         <p:spPr>
           <a:xfrm>
-            <a:off x="6232680" y="1604520"/>
-            <a:ext cx="5355000" cy="1896840"/>
+            <a:off x="6231960" y="1604520"/>
+            <a:ext cx="5354280" cy="1896840"/>
           </a:xfrm>
           <a:prstGeom prst="rect">
             <a:avLst/>
@@ -3998,8 +4064,8 @@
         </p:nvSpPr>
         <p:spPr>
           <a:xfrm>
-            <a:off x="6232680" y="3682080"/>
-            <a:ext cx="5355000" cy="1896840"/>
+            <a:off x="6231960" y="3682080"/>
+            <a:ext cx="5354280" cy="1896840"/>
           </a:xfrm>
           <a:prstGeom prst="rect">
             <a:avLst/>
@@ -4055,7 +4121,7 @@
         <p:spPr>
           <a:xfrm>
             <a:off x="609480" y="273600"/>
-            <a:ext cx="10973520" cy="1144800"/>
+            <a:ext cx="10972440" cy="1144800"/>
           </a:xfrm>
           <a:prstGeom prst="rect">
             <a:avLst/>
@@ -4092,7 +4158,7 @@
         <p:spPr>
           <a:xfrm>
             <a:off x="609480" y="1604520"/>
-            <a:ext cx="5355000" cy="1896840"/>
+            <a:ext cx="5354280" cy="1896840"/>
           </a:xfrm>
           <a:prstGeom prst="rect">
             <a:avLst/>
@@ -4125,8 +4191,8 @@
         </p:nvSpPr>
         <p:spPr>
           <a:xfrm>
-            <a:off x="6232680" y="1604520"/>
-            <a:ext cx="5355000" cy="1896840"/>
+            <a:off x="6231960" y="1604520"/>
+            <a:ext cx="5354280" cy="1896840"/>
           </a:xfrm>
           <a:prstGeom prst="rect">
             <a:avLst/>
@@ -4160,7 +4226,7 @@
         <p:spPr>
           <a:xfrm>
             <a:off x="609480" y="3682080"/>
-            <a:ext cx="10973520" cy="1896840"/>
+            <a:ext cx="10972440" cy="1896840"/>
           </a:xfrm>
           <a:prstGeom prst="rect">
             <a:avLst/>
@@ -4223,7 +4289,7 @@
         <p:spPr>
           <a:xfrm>
             <a:off x="609480" y="273600"/>
-            <a:ext cx="10973520" cy="1144800"/>
+            <a:ext cx="10972440" cy="1144800"/>
           </a:xfrm>
           <a:prstGeom prst="rect">
             <a:avLst/>
@@ -4245,7 +4311,139 @@
               <a:rPr b="0" lang="en-HK" sz="4400" spc="-1" strike="noStrike">
                 <a:latin typeface="Arial"/>
               </a:rPr>
-              <a:t>Click to edit the title text format</a:t>
+              <a:t>C</a:t>
+            </a:r>
+            <a:r>
+              <a:rPr b="0" lang="en-HK" sz="4400" spc="-1" strike="noStrike">
+                <a:latin typeface="Arial"/>
+              </a:rPr>
+              <a:t>li</a:t>
+            </a:r>
+            <a:r>
+              <a:rPr b="0" lang="en-HK" sz="4400" spc="-1" strike="noStrike">
+                <a:latin typeface="Arial"/>
+              </a:rPr>
+              <a:t>c</a:t>
+            </a:r>
+            <a:r>
+              <a:rPr b="0" lang="en-HK" sz="4400" spc="-1" strike="noStrike">
+                <a:latin typeface="Arial"/>
+              </a:rPr>
+              <a:t>k </a:t>
+            </a:r>
+            <a:r>
+              <a:rPr b="0" lang="en-HK" sz="4400" spc="-1" strike="noStrike">
+                <a:latin typeface="Arial"/>
+              </a:rPr>
+              <a:t>t</a:t>
+            </a:r>
+            <a:r>
+              <a:rPr b="0" lang="en-HK" sz="4400" spc="-1" strike="noStrike">
+                <a:latin typeface="Arial"/>
+              </a:rPr>
+              <a:t>o </a:t>
+            </a:r>
+            <a:r>
+              <a:rPr b="0" lang="en-HK" sz="4400" spc="-1" strike="noStrike">
+                <a:latin typeface="Arial"/>
+              </a:rPr>
+              <a:t>e</a:t>
+            </a:r>
+            <a:r>
+              <a:rPr b="0" lang="en-HK" sz="4400" spc="-1" strike="noStrike">
+                <a:latin typeface="Arial"/>
+              </a:rPr>
+              <a:t>di</a:t>
+            </a:r>
+            <a:r>
+              <a:rPr b="0" lang="en-HK" sz="4400" spc="-1" strike="noStrike">
+                <a:latin typeface="Arial"/>
+              </a:rPr>
+              <a:t>t </a:t>
+            </a:r>
+            <a:r>
+              <a:rPr b="0" lang="en-HK" sz="4400" spc="-1" strike="noStrike">
+                <a:latin typeface="Arial"/>
+              </a:rPr>
+              <a:t>t</a:t>
+            </a:r>
+            <a:r>
+              <a:rPr b="0" lang="en-HK" sz="4400" spc="-1" strike="noStrike">
+                <a:latin typeface="Arial"/>
+              </a:rPr>
+              <a:t>h</a:t>
+            </a:r>
+            <a:r>
+              <a:rPr b="0" lang="en-HK" sz="4400" spc="-1" strike="noStrike">
+                <a:latin typeface="Arial"/>
+              </a:rPr>
+              <a:t>e </a:t>
+            </a:r>
+            <a:r>
+              <a:rPr b="0" lang="en-HK" sz="4400" spc="-1" strike="noStrike">
+                <a:latin typeface="Arial"/>
+              </a:rPr>
+              <a:t>tit</a:t>
+            </a:r>
+            <a:r>
+              <a:rPr b="0" lang="en-HK" sz="4400" spc="-1" strike="noStrike">
+                <a:latin typeface="Arial"/>
+              </a:rPr>
+              <a:t>le </a:t>
+            </a:r>
+            <a:r>
+              <a:rPr b="0" lang="en-HK" sz="4400" spc="-1" strike="noStrike">
+                <a:latin typeface="Arial"/>
+              </a:rPr>
+              <a:t>t</a:t>
+            </a:r>
+            <a:r>
+              <a:rPr b="0" lang="en-HK" sz="4400" spc="-1" strike="noStrike">
+                <a:latin typeface="Arial"/>
+              </a:rPr>
+              <a:t>e</a:t>
+            </a:r>
+            <a:r>
+              <a:rPr b="0" lang="en-HK" sz="4400" spc="-1" strike="noStrike">
+                <a:latin typeface="Arial"/>
+              </a:rPr>
+              <a:t>xt </a:t>
+            </a:r>
+            <a:r>
+              <a:rPr b="0" lang="en-HK" sz="4400" spc="-1" strike="noStrike">
+                <a:latin typeface="Arial"/>
+              </a:rPr>
+              <a:t>f</a:t>
+            </a:r>
+            <a:r>
+              <a:rPr b="0" lang="en-HK" sz="4400" spc="-1" strike="noStrike">
+                <a:latin typeface="Arial"/>
+              </a:rPr>
+              <a:t>o</a:t>
+            </a:r>
+            <a:r>
+              <a:rPr b="0" lang="en-HK" sz="4400" spc="-1" strike="noStrike">
+                <a:latin typeface="Arial"/>
+              </a:rPr>
+              <a:t>r</a:t>
+            </a:r>
+            <a:r>
+              <a:rPr b="0" lang="en-HK" sz="4400" spc="-1" strike="noStrike">
+                <a:latin typeface="Arial"/>
+              </a:rPr>
+              <a:t>m</a:t>
+            </a:r>
+            <a:r>
+              <a:rPr b="0" lang="en-HK" sz="4400" spc="-1" strike="noStrike">
+                <a:latin typeface="Arial"/>
+              </a:rPr>
+              <a:t>a</a:t>
+            </a:r>
+            <a:r>
+              <a:rPr b="0" lang="en-HK" sz="4400" spc="-1" strike="noStrike">
+                <a:latin typeface="Arial"/>
+              </a:rPr>
+              <a:t>t</a:t>
             </a:r>
             <a:endParaRPr b="0" lang="en-HK" sz="4400" spc="-1" strike="noStrike">
               <a:latin typeface="Arial"/>
@@ -4266,7 +4464,7 @@
         <p:spPr>
           <a:xfrm>
             <a:off x="609480" y="1604520"/>
-            <a:ext cx="10973520" cy="3977280"/>
+            <a:ext cx="10972440" cy="3977280"/>
           </a:xfrm>
           <a:prstGeom prst="rect">
             <a:avLst/>
@@ -4462,7 +4660,7 @@
     <p:bg>
       <p:bgPr>
         <a:solidFill>
-          <a:srgbClr val="800080"/>
+          <a:srgbClr val="e0c2cd"/>
         </a:solidFill>
       </p:bgPr>
     </p:bg>
@@ -4489,7 +4687,7 @@
         <p:spPr>
           <a:xfrm>
             <a:off x="380880" y="1415520"/>
-            <a:ext cx="608760" cy="18360"/>
+            <a:ext cx="607680" cy="17280"/>
           </a:xfrm>
           <a:custGeom>
             <a:avLst/>
@@ -4540,7 +4738,7 @@
         <p:spPr>
           <a:xfrm>
             <a:off x="380880" y="1663200"/>
-            <a:ext cx="2152440" cy="189720"/>
+            <a:ext cx="2151000" cy="188640"/>
           </a:xfrm>
           <a:prstGeom prst="rect">
             <a:avLst/>
@@ -4568,31 +4766,116 @@
               <a:buNone/>
             </a:pPr>
             <a:r>
-              <a:rPr b="1" i="1" lang="en-US" sz="1050" spc="310" strike="noStrike">
+              <a:rPr b="0" lang="en-US" sz="1050" spc="301" strike="noStrike">
                 <a:solidFill>
                   <a:srgbClr val="86868b"/>
                 </a:solidFill>
+                <a:latin typeface="Liter"/>
+                <a:ea typeface="Liter"/>
+              </a:rPr>
+              <a:t>Probability Theory</a:t>
+            </a:r>
+            <a:endParaRPr b="0" lang="en-HK" sz="1050" spc="-1" strike="noStrike">
+              <a:latin typeface="Arial"/>
+            </a:endParaRPr>
+          </a:p>
+        </p:txBody>
+      </p:sp>
+      <p:sp>
+        <p:nvSpPr>
+          <p:cNvPr id="46" name="Text 2"/>
+          <p:cNvSpPr/>
+          <p:nvPr/>
+        </p:nvSpPr>
+        <p:spPr>
+          <a:xfrm>
+            <a:off x="380880" y="2310840"/>
+            <a:ext cx="6608520" cy="2170080"/>
+          </a:xfrm>
+          <a:prstGeom prst="rect">
+            <a:avLst/>
+          </a:prstGeom>
+          <a:solidFill>
+            <a:srgbClr val="729fcf"/>
+          </a:solidFill>
+          <a:ln w="0">
+            <a:noFill/>
+          </a:ln>
+        </p:spPr>
+        <p:style>
+          <a:lnRef idx="0"/>
+          <a:fillRef idx="0"/>
+          <a:effectRef idx="0"/>
+          <a:fontRef idx="minor"/>
+        </p:style>
+        <p:txBody>
+          <a:bodyPr lIns="0" rIns="0" tIns="0" bIns="0" anchor="ctr">
+            <a:noAutofit/>
+          </a:bodyPr>
+          <a:p>
+            <a:pPr>
+              <a:lnSpc>
+                <a:spcPct val="80000"/>
+              </a:lnSpc>
+              <a:buNone/>
+            </a:pPr>
+            <a:r>
+              <a:rPr b="0" i="1" lang="en-US" sz="9000" spc="-225" strike="noStrike">
+                <a:solidFill>
+                  <a:srgbClr val="c9211e"/>
+                </a:solidFill>
                 <a:latin typeface="Times New Roman"/>
                 <a:ea typeface="Liter"/>
               </a:rPr>
-              <a:t>Probability Theory</a:t>
-            </a:r>
-            <a:endParaRPr b="1" i="1" lang="en-HK" sz="1050" spc="-1" strike="noStrike">
-              <a:latin typeface="Times New Roman"/>
-            </a:endParaRPr>
-          </a:p>
-        </p:txBody>
-      </p:sp>
-      <p:sp>
-        <p:nvSpPr>
-          <p:cNvPr id="46" name="Text 2"/>
-          <p:cNvSpPr/>
-          <p:nvPr/>
-        </p:nvSpPr>
-        <p:spPr>
-          <a:xfrm>
-            <a:off x="380880" y="2310840"/>
-            <a:ext cx="6610320" cy="2171160"/>
+              <a:t>The</a:t>
+            </a:r>
+            <a:r>
+              <a:rPr b="0" i="1" lang="en-US" sz="9000" spc="-225" strike="noStrike">
+                <a:solidFill>
+                  <a:srgbClr val="c9211e"/>
+                </a:solidFill>
+                <a:latin typeface="Times New Roman"/>
+                <a:ea typeface="Liter"/>
+              </a:rPr>
+              <a:t> Birthday</a:t>
+            </a:r>
+            <a:endParaRPr b="0" lang="en-HK" sz="9000" spc="-1" strike="noStrike">
+              <a:latin typeface="Arial"/>
+            </a:endParaRPr>
+          </a:p>
+          <a:p>
+            <a:pPr>
+              <a:lnSpc>
+                <a:spcPct val="80000"/>
+              </a:lnSpc>
+              <a:buNone/>
+            </a:pPr>
+            <a:r>
+              <a:rPr b="0" i="1" lang="en-US" sz="9000" spc="-225" strike="noStrike">
+                <a:solidFill>
+                  <a:srgbClr val="c9211e"/>
+                </a:solidFill>
+                <a:latin typeface="Times New Roman"/>
+                <a:ea typeface="Liter"/>
+              </a:rPr>
+              <a:t>Paradox</a:t>
+            </a:r>
+            <a:endParaRPr b="0" lang="en-HK" sz="9000" spc="-1" strike="noStrike">
+              <a:latin typeface="Arial"/>
+            </a:endParaRPr>
+          </a:p>
+        </p:txBody>
+      </p:sp>
+      <p:sp>
+        <p:nvSpPr>
+          <p:cNvPr id="47" name="Text 3"/>
+          <p:cNvSpPr/>
+          <p:nvPr/>
+        </p:nvSpPr>
+        <p:spPr>
+          <a:xfrm>
+            <a:off x="380880" y="4787640"/>
+            <a:ext cx="4265280" cy="464760"/>
           </a:xfrm>
           <a:prstGeom prst="rect">
             <a:avLst/>
@@ -4615,95 +4898,32 @@
           <a:p>
             <a:pPr>
               <a:lnSpc>
-                <a:spcPct val="80000"/>
-              </a:lnSpc>
-              <a:buNone/>
-            </a:pPr>
-            <a:r>
-              <a:rPr b="1" i="1" lang="en-US" sz="9000" spc="-225" strike="noStrike">
-                <a:solidFill>
-                  <a:srgbClr val="ffffff"/>
-                </a:solidFill>
-                <a:latin typeface="Times New Roman"/>
-                <a:ea typeface="Liter"/>
-              </a:rPr>
-              <a:t>The Birthday</a:t>
-            </a:r>
-            <a:endParaRPr b="1" i="1" lang="en-HK" sz="9000" spc="-1" strike="noStrike">
-              <a:latin typeface="Times New Roman"/>
-            </a:endParaRPr>
-          </a:p>
-          <a:p>
-            <a:pPr>
-              <a:lnSpc>
-                <a:spcPct val="80000"/>
-              </a:lnSpc>
-              <a:buNone/>
-            </a:pPr>
-            <a:r>
-              <a:rPr b="1" i="1" lang="en-US" sz="9000" spc="-225" strike="noStrike">
-                <a:solidFill>
-                  <a:srgbClr val="ffffff"/>
-                </a:solidFill>
-                <a:latin typeface="Times New Roman"/>
-                <a:ea typeface="Liter"/>
-              </a:rPr>
-              <a:t>Paradox</a:t>
-            </a:r>
-            <a:endParaRPr b="1" i="1" lang="en-HK" sz="9000" spc="-1" strike="noStrike">
-              <a:latin typeface="Times New Roman"/>
-            </a:endParaRPr>
-          </a:p>
-        </p:txBody>
-      </p:sp>
-      <p:sp>
-        <p:nvSpPr>
-          <p:cNvPr id="47" name="Text 3"/>
-          <p:cNvSpPr/>
-          <p:nvPr/>
-        </p:nvSpPr>
-        <p:spPr>
-          <a:xfrm>
-            <a:off x="380880" y="4787640"/>
-            <a:ext cx="4266720" cy="465840"/>
-          </a:xfrm>
-          <a:prstGeom prst="rect">
-            <a:avLst/>
-          </a:prstGeom>
-          <a:noFill/>
-          <a:ln w="0">
-            <a:noFill/>
-          </a:ln>
-        </p:spPr>
-        <p:style>
-          <a:lnRef idx="0"/>
-          <a:fillRef idx="0"/>
-          <a:effectRef idx="0"/>
-          <a:fontRef idx="minor"/>
-        </p:style>
-        <p:txBody>
-          <a:bodyPr lIns="0" rIns="0" tIns="0" bIns="0" anchor="ctr">
-            <a:noAutofit/>
-          </a:bodyPr>
-          <a:p>
-            <a:pPr>
-              <a:lnSpc>
                 <a:spcPct val="140000"/>
               </a:lnSpc>
               <a:buNone/>
             </a:pPr>
             <a:r>
-              <a:rPr b="1" i="1" lang="en-US" sz="2250" spc="-1" strike="noStrike">
+              <a:rPr b="0" lang="en-US" sz="2250" spc="-1" strike="noStrike">
                 <a:solidFill>
                   <a:srgbClr val="86868b"/>
                 </a:solidFill>
-                <a:latin typeface="Times New Roman"/>
-                <a:ea typeface="Liter"/>
-              </a:rPr>
-              <a:t>When Probability Defies Intuition</a:t>
-            </a:r>
-            <a:endParaRPr b="1" i="1" lang="en-HK" sz="2250" spc="-1" strike="noStrike">
-              <a:latin typeface="Times New Roman"/>
+                <a:latin typeface="Liter"/>
+                <a:ea typeface="Liter"/>
+              </a:rPr>
+              <a:t>When </a:t>
+            </a:r>
+            <a:r>
+              <a:rPr b="0" lang="en-US" sz="2250" spc="-1" strike="noStrike">
+                <a:solidFill>
+                  <a:srgbClr val="86868b"/>
+                </a:solidFill>
+                <a:latin typeface="Liter"/>
+                <a:ea typeface="Liter"/>
+              </a:rPr>
+              <a:t>Probability Defies Intuition</a:t>
+            </a:r>
+            <a:endParaRPr b="0" lang="en-HK" sz="2250" spc="-1" strike="noStrike">
+              <a:latin typeface="Arial"/>
             </a:endParaRPr>
           </a:p>
         </p:txBody>
@@ -4717,7 +4937,7 @@
         <p:spPr>
           <a:xfrm>
             <a:off x="426240" y="6296040"/>
-            <a:ext cx="127800" cy="170640"/>
+            <a:ext cx="126720" cy="169560"/>
           </a:xfrm>
           <a:custGeom>
             <a:avLst/>
@@ -5022,7 +5242,7 @@
         <p:spPr>
           <a:xfrm>
             <a:off x="709560" y="6286680"/>
-            <a:ext cx="1561320" cy="189720"/>
+            <a:ext cx="1560240" cy="188640"/>
           </a:xfrm>
           <a:prstGeom prst="rect">
             <a:avLst/>
@@ -5050,17 +5270,17 @@
               <a:buNone/>
             </a:pPr>
             <a:r>
-              <a:rPr b="1" i="1" lang="en-US" sz="1050" spc="-1" strike="noStrike">
+              <a:rPr b="0" lang="en-US" sz="1050" spc="-1" strike="noStrike">
                 <a:solidFill>
                   <a:srgbClr val="86868b"/>
                 </a:solidFill>
-                <a:latin typeface="Times New Roman"/>
+                <a:latin typeface="Liter"/>
                 <a:ea typeface="Liter"/>
               </a:rPr>
               <a:t>Mathematical Exploration</a:t>
             </a:r>
-            <a:endParaRPr b="1" i="1" lang="en-HK" sz="1050" spc="-1" strike="noStrike">
-              <a:latin typeface="Times New Roman"/>
+            <a:endParaRPr b="0" lang="en-HK" sz="1050" spc="-1" strike="noStrike">
+              <a:latin typeface="Arial"/>
             </a:endParaRPr>
           </a:p>
         </p:txBody>
@@ -5074,7 +5294,7 @@
         <p:spPr>
           <a:xfrm>
             <a:off x="2689200" y="6296040"/>
-            <a:ext cx="170640" cy="170640"/>
+            <a:ext cx="169560" cy="169560"/>
           </a:xfrm>
           <a:custGeom>
             <a:avLst/>
@@ -5207,7 +5427,7 @@
         <p:spPr>
           <a:xfrm>
             <a:off x="2994120" y="6286680"/>
-            <a:ext cx="1399320" cy="189720"/>
+            <a:ext cx="1398240" cy="188640"/>
           </a:xfrm>
           <a:prstGeom prst="rect">
             <a:avLst/>
@@ -5235,17 +5455,17 @@
               <a:buNone/>
             </a:pPr>
             <a:r>
-              <a:rPr b="1" i="1" lang="en-US" sz="1050" spc="-1" strike="noStrike">
+              <a:rPr b="0" lang="en-US" sz="1050" spc="-1" strike="noStrike">
                 <a:solidFill>
                   <a:srgbClr val="86868b"/>
                 </a:solidFill>
-                <a:latin typeface="Times New Roman"/>
+                <a:latin typeface="Liter"/>
                 <a:ea typeface="Liter"/>
               </a:rPr>
               <a:t>Probability &amp; Statistics</a:t>
             </a:r>
-            <a:endParaRPr b="1" i="1" lang="en-HK" sz="1050" spc="-1" strike="noStrike">
-              <a:latin typeface="Times New Roman"/>
+            <a:endParaRPr b="0" lang="en-HK" sz="1050" spc="-1" strike="noStrike">
+              <a:latin typeface="Arial"/>
             </a:endParaRPr>
           </a:p>
         </p:txBody>
@@ -5296,7 +5516,7 @@
         <p:spPr>
           <a:xfrm>
             <a:off x="380880" y="380880"/>
-            <a:ext cx="11487600" cy="151560"/>
+            <a:ext cx="11485440" cy="150480"/>
           </a:xfrm>
           <a:prstGeom prst="rect">
             <a:avLst/>
@@ -5324,7 +5544,7 @@
               <a:buNone/>
             </a:pPr>
             <a:r>
-              <a:rPr b="0" lang="en-US" sz="900" spc="265" strike="noStrike">
+              <a:rPr b="0" lang="en-US" sz="900" spc="256" strike="noStrike">
                 <a:solidFill>
                   <a:srgbClr val="86868b"/>
                 </a:solidFill>
@@ -5348,7 +5568,7 @@
         <p:spPr>
           <a:xfrm>
             <a:off x="380880" y="609480"/>
-            <a:ext cx="11601720" cy="380160"/>
+            <a:ext cx="11599560" cy="379080"/>
           </a:xfrm>
           <a:prstGeom prst="rect">
             <a:avLst/>
@@ -5400,7 +5620,7 @@
         <p:spPr>
           <a:xfrm>
             <a:off x="380880" y="1995480"/>
-            <a:ext cx="5609880" cy="561240"/>
+            <a:ext cx="5608440" cy="560160"/>
           </a:xfrm>
           <a:prstGeom prst="rect">
             <a:avLst/>
@@ -5472,7 +5692,7 @@
         <p:spPr>
           <a:xfrm>
             <a:off x="385920" y="2786040"/>
-            <a:ext cx="5514480" cy="1418400"/>
+            <a:ext cx="5513040" cy="1417320"/>
           </a:xfrm>
           <a:custGeom>
             <a:avLst/>
@@ -5524,7 +5744,7 @@
         <p:spPr>
           <a:xfrm>
             <a:off x="619200" y="3019320"/>
-            <a:ext cx="5114520" cy="189720"/>
+            <a:ext cx="5113080" cy="188640"/>
           </a:xfrm>
           <a:prstGeom prst="rect">
             <a:avLst/>
@@ -5552,7 +5772,7 @@
               <a:buNone/>
             </a:pPr>
             <a:r>
-              <a:rPr b="0" lang="en-US" sz="1050" spc="205" strike="noStrike">
+              <a:rPr b="0" lang="en-US" sz="1050" spc="197" strike="noStrike">
                 <a:solidFill>
                   <a:srgbClr val="86868b"/>
                 </a:solidFill>
@@ -5576,7 +5796,7 @@
         <p:spPr>
           <a:xfrm>
             <a:off x="619200" y="3324240"/>
-            <a:ext cx="5190840" cy="342360"/>
+            <a:ext cx="5189400" cy="341280"/>
           </a:xfrm>
           <a:prstGeom prst="rect">
             <a:avLst/>
@@ -5628,7 +5848,7 @@
         <p:spPr>
           <a:xfrm>
             <a:off x="619200" y="3743280"/>
-            <a:ext cx="5124240" cy="227880"/>
+            <a:ext cx="5122800" cy="226800"/>
           </a:xfrm>
           <a:prstGeom prst="rect">
             <a:avLst/>
@@ -5679,8 +5899,8 @@
         </p:nvSpPr>
         <p:spPr>
           <a:xfrm>
-            <a:off x="6296400" y="1995480"/>
-            <a:ext cx="18360" cy="685080"/>
+            <a:off x="6296040" y="1995480"/>
+            <a:ext cx="17280" cy="684000"/>
           </a:xfrm>
           <a:custGeom>
             <a:avLst/>
@@ -5730,8 +5950,8 @@
         </p:nvSpPr>
         <p:spPr>
           <a:xfrm>
-            <a:off x="6496560" y="1995480"/>
-            <a:ext cx="437400" cy="342360"/>
+            <a:off x="6496200" y="1995480"/>
+            <a:ext cx="436320" cy="341280"/>
           </a:xfrm>
           <a:prstGeom prst="rect">
             <a:avLst/>
@@ -5782,8 +6002,8 @@
         </p:nvSpPr>
         <p:spPr>
           <a:xfrm>
-            <a:off x="6907320" y="2095560"/>
-            <a:ext cx="532800" cy="227880"/>
+            <a:off x="6906960" y="2095560"/>
+            <a:ext cx="531720" cy="226800"/>
           </a:xfrm>
           <a:prstGeom prst="rect">
             <a:avLst/>
@@ -5834,8 +6054,8 @@
         </p:nvSpPr>
         <p:spPr>
           <a:xfrm>
-            <a:off x="6496560" y="2376360"/>
-            <a:ext cx="5428800" cy="304200"/>
+            <a:off x="6496200" y="2376360"/>
+            <a:ext cx="5427360" cy="303120"/>
           </a:xfrm>
           <a:prstGeom prst="rect">
             <a:avLst/>
@@ -5886,8 +6106,8 @@
         </p:nvSpPr>
         <p:spPr>
           <a:xfrm>
-            <a:off x="6296400" y="2833560"/>
-            <a:ext cx="18360" cy="990000"/>
+            <a:off x="6296040" y="2833560"/>
+            <a:ext cx="17280" cy="988920"/>
           </a:xfrm>
           <a:custGeom>
             <a:avLst/>
@@ -5937,8 +6157,8 @@
         </p:nvSpPr>
         <p:spPr>
           <a:xfrm>
-            <a:off x="6496560" y="2833560"/>
-            <a:ext cx="570960" cy="380160"/>
+            <a:off x="6496200" y="2833560"/>
+            <a:ext cx="569880" cy="379080"/>
           </a:xfrm>
           <a:prstGeom prst="rect">
             <a:avLst/>
@@ -5989,8 +6209,8 @@
         </p:nvSpPr>
         <p:spPr>
           <a:xfrm>
-            <a:off x="7012080" y="2943360"/>
-            <a:ext cx="599400" cy="266040"/>
+            <a:off x="7011720" y="2943360"/>
+            <a:ext cx="598320" cy="264960"/>
           </a:xfrm>
           <a:prstGeom prst="rect">
             <a:avLst/>
@@ -6041,8 +6261,8 @@
         </p:nvSpPr>
         <p:spPr>
           <a:xfrm>
-            <a:off x="6496560" y="3252960"/>
-            <a:ext cx="5457600" cy="342360"/>
+            <a:off x="6496200" y="3252960"/>
+            <a:ext cx="5456160" cy="341280"/>
           </a:xfrm>
           <a:prstGeom prst="rect">
             <a:avLst/>
@@ -6093,8 +6313,8 @@
         </p:nvSpPr>
         <p:spPr>
           <a:xfrm>
-            <a:off x="6496560" y="3633840"/>
-            <a:ext cx="5381280" cy="189720"/>
+            <a:off x="6496200" y="3633840"/>
+            <a:ext cx="5379840" cy="188640"/>
           </a:xfrm>
           <a:prstGeom prst="rect">
             <a:avLst/>
@@ -6145,8 +6365,8 @@
         </p:nvSpPr>
         <p:spPr>
           <a:xfrm>
-            <a:off x="6296400" y="3976560"/>
-            <a:ext cx="18360" cy="685080"/>
+            <a:off x="6296040" y="3976560"/>
+            <a:ext cx="17280" cy="684000"/>
           </a:xfrm>
           <a:custGeom>
             <a:avLst/>
@@ -6196,8 +6416,8 @@
         </p:nvSpPr>
         <p:spPr>
           <a:xfrm>
-            <a:off x="6496560" y="3976560"/>
-            <a:ext cx="484920" cy="342360"/>
+            <a:off x="6496200" y="3976560"/>
+            <a:ext cx="483840" cy="341280"/>
           </a:xfrm>
           <a:prstGeom prst="rect">
             <a:avLst/>
@@ -6248,8 +6468,8 @@
         </p:nvSpPr>
         <p:spPr>
           <a:xfrm>
-            <a:off x="6957720" y="4076640"/>
-            <a:ext cx="532800" cy="227880"/>
+            <a:off x="6957360" y="4076640"/>
+            <a:ext cx="531720" cy="226800"/>
           </a:xfrm>
           <a:prstGeom prst="rect">
             <a:avLst/>
@@ -6300,8 +6520,8 @@
         </p:nvSpPr>
         <p:spPr>
           <a:xfrm>
-            <a:off x="6496560" y="4357800"/>
-            <a:ext cx="5428800" cy="304200"/>
+            <a:off x="6496200" y="4357800"/>
+            <a:ext cx="5427360" cy="303120"/>
           </a:xfrm>
           <a:prstGeom prst="rect">
             <a:avLst/>
@@ -6353,7 +6573,7 @@
         <p:spPr>
           <a:xfrm>
             <a:off x="380880" y="4971960"/>
-            <a:ext cx="11430360" cy="8640"/>
+            <a:ext cx="11428200" cy="7560"/>
           </a:xfrm>
           <a:custGeom>
             <a:avLst/>
@@ -6404,7 +6624,7 @@
         <p:spPr>
           <a:xfrm>
             <a:off x="390600" y="5253120"/>
-            <a:ext cx="170640" cy="151560"/>
+            <a:ext cx="169560" cy="150480"/>
           </a:xfrm>
           <a:custGeom>
             <a:avLst/>
@@ -6518,7 +6738,7 @@
         <p:spPr>
           <a:xfrm>
             <a:off x="628560" y="5205240"/>
-            <a:ext cx="11259000" cy="494640"/>
+            <a:ext cx="11256840" cy="493560"/>
           </a:xfrm>
           <a:prstGeom prst="rect">
             <a:avLst/>
@@ -6617,7 +6837,7 @@
         <p:spPr>
           <a:xfrm>
             <a:off x="380880" y="1850760"/>
-            <a:ext cx="761400" cy="18360"/>
+            <a:ext cx="760320" cy="17280"/>
           </a:xfrm>
           <a:custGeom>
             <a:avLst/>
@@ -6668,7 +6888,7 @@
         <p:spPr>
           <a:xfrm>
             <a:off x="380880" y="2174760"/>
-            <a:ext cx="9153360" cy="189720"/>
+            <a:ext cx="9151560" cy="188640"/>
           </a:xfrm>
           <a:prstGeom prst="rect">
             <a:avLst/>
@@ -6696,7 +6916,7 @@
               <a:buNone/>
             </a:pPr>
             <a:r>
-              <a:rPr b="0" lang="en-US" sz="1050" spc="310" strike="noStrike">
+              <a:rPr b="0" lang="en-US" sz="1050" spc="301" strike="noStrike">
                 <a:solidFill>
                   <a:srgbClr val="86868b"/>
                 </a:solidFill>
@@ -6720,7 +6940,7 @@
         <p:spPr>
           <a:xfrm>
             <a:off x="380880" y="2593800"/>
-            <a:ext cx="9543960" cy="1732680"/>
+            <a:ext cx="9542160" cy="1731600"/>
           </a:xfrm>
           <a:prstGeom prst="rect">
             <a:avLst/>
@@ -6793,7 +7013,7 @@
         <p:spPr>
           <a:xfrm>
             <a:off x="380880" y="4635720"/>
-            <a:ext cx="5600520" cy="370800"/>
+            <a:ext cx="5599080" cy="369720"/>
           </a:xfrm>
           <a:prstGeom prst="rect">
             <a:avLst/>
@@ -6844,8 +7064,8 @@
         </p:nvSpPr>
         <p:spPr>
           <a:xfrm>
-            <a:off x="9472320" y="2476440"/>
-            <a:ext cx="3295440" cy="1904400"/>
+            <a:off x="9471600" y="2476440"/>
+            <a:ext cx="3294000" cy="1903320"/>
           </a:xfrm>
           <a:prstGeom prst="rect">
             <a:avLst/>
@@ -6934,7 +7154,7 @@
         <p:spPr>
           <a:xfrm>
             <a:off x="380880" y="380880"/>
-            <a:ext cx="11487600" cy="151560"/>
+            <a:ext cx="11485440" cy="150480"/>
           </a:xfrm>
           <a:prstGeom prst="rect">
             <a:avLst/>
@@ -6962,7 +7182,7 @@
               <a:buNone/>
             </a:pPr>
             <a:r>
-              <a:rPr b="0" lang="en-US" sz="900" spc="265" strike="noStrike">
+              <a:rPr b="0" lang="en-US" sz="900" spc="256" strike="noStrike">
                 <a:solidFill>
                   <a:srgbClr val="86868b"/>
                 </a:solidFill>
@@ -6986,7 +7206,7 @@
         <p:spPr>
           <a:xfrm>
             <a:off x="380880" y="609480"/>
-            <a:ext cx="11601720" cy="380160"/>
+            <a:ext cx="11599560" cy="379080"/>
           </a:xfrm>
           <a:prstGeom prst="rect">
             <a:avLst/>
@@ -7038,7 +7258,7 @@
         <p:spPr>
           <a:xfrm>
             <a:off x="380880" y="2019240"/>
-            <a:ext cx="8629560" cy="618480"/>
+            <a:ext cx="8627760" cy="617400"/>
           </a:xfrm>
           <a:prstGeom prst="rect">
             <a:avLst/>
@@ -7130,7 +7350,7 @@
         <p:spPr>
           <a:xfrm>
             <a:off x="380880" y="3029040"/>
-            <a:ext cx="5524200" cy="18360"/>
+            <a:ext cx="5522760" cy="17280"/>
           </a:xfrm>
           <a:custGeom>
             <a:avLst/>
@@ -7181,7 +7401,7 @@
         <p:spPr>
           <a:xfrm>
             <a:off x="380880" y="3267000"/>
-            <a:ext cx="5590800" cy="189720"/>
+            <a:ext cx="5589360" cy="188640"/>
           </a:xfrm>
           <a:prstGeom prst="rect">
             <a:avLst/>
@@ -7209,7 +7429,7 @@
               <a:buNone/>
             </a:pPr>
             <a:r>
-              <a:rPr b="0" lang="en-US" sz="1050" spc="205" strike="noStrike">
+              <a:rPr b="0" lang="en-US" sz="1050" spc="197" strike="noStrike">
                 <a:solidFill>
                   <a:srgbClr val="86868b"/>
                 </a:solidFill>
@@ -7233,7 +7453,7 @@
         <p:spPr>
           <a:xfrm>
             <a:off x="380880" y="3610080"/>
-            <a:ext cx="5752800" cy="456480"/>
+            <a:ext cx="5751360" cy="455400"/>
           </a:xfrm>
           <a:prstGeom prst="rect">
             <a:avLst/>
@@ -7285,7 +7505,7 @@
         <p:spPr>
           <a:xfrm>
             <a:off x="380880" y="4143240"/>
-            <a:ext cx="5600520" cy="227880"/>
+            <a:ext cx="5599080" cy="226800"/>
           </a:xfrm>
           <a:prstGeom prst="rect">
             <a:avLst/>
@@ -7337,7 +7557,7 @@
         <p:spPr>
           <a:xfrm>
             <a:off x="380880" y="4524480"/>
-            <a:ext cx="5600520" cy="246960"/>
+            <a:ext cx="5599080" cy="245880"/>
           </a:xfrm>
           <a:prstGeom prst="rect">
             <a:avLst/>
@@ -7389,7 +7609,7 @@
         <p:spPr>
           <a:xfrm>
             <a:off x="380880" y="4886280"/>
-            <a:ext cx="5600520" cy="246960"/>
+            <a:ext cx="5599080" cy="245880"/>
           </a:xfrm>
           <a:prstGeom prst="rect">
             <a:avLst/>
@@ -7440,8 +7660,8 @@
         </p:nvSpPr>
         <p:spPr>
           <a:xfrm>
-            <a:off x="6287040" y="3029040"/>
-            <a:ext cx="5524200" cy="18360"/>
+            <a:off x="6286680" y="3029040"/>
+            <a:ext cx="5522760" cy="17280"/>
           </a:xfrm>
           <a:custGeom>
             <a:avLst/>
@@ -7491,8 +7711,8 @@
         </p:nvSpPr>
         <p:spPr>
           <a:xfrm>
-            <a:off x="6287040" y="3267000"/>
-            <a:ext cx="5590800" cy="189720"/>
+            <a:off x="6286680" y="3267000"/>
+            <a:ext cx="5589360" cy="188640"/>
           </a:xfrm>
           <a:prstGeom prst="rect">
             <a:avLst/>
@@ -7520,7 +7740,7 @@
               <a:buNone/>
             </a:pPr>
             <a:r>
-              <a:rPr b="0" lang="en-US" sz="1050" spc="205" strike="noStrike">
+              <a:rPr b="0" lang="en-US" sz="1050" spc="197" strike="noStrike">
                 <a:solidFill>
                   <a:srgbClr val="0071e3"/>
                 </a:solidFill>
@@ -7543,8 +7763,8 @@
         </p:nvSpPr>
         <p:spPr>
           <a:xfrm>
-            <a:off x="6287040" y="3610080"/>
-            <a:ext cx="5752800" cy="456480"/>
+            <a:off x="6286680" y="3610080"/>
+            <a:ext cx="5751360" cy="455400"/>
           </a:xfrm>
           <a:prstGeom prst="rect">
             <a:avLst/>
@@ -7595,8 +7815,8 @@
         </p:nvSpPr>
         <p:spPr>
           <a:xfrm>
-            <a:off x="6287040" y="4143240"/>
-            <a:ext cx="5600520" cy="227880"/>
+            <a:off x="6286680" y="4143240"/>
+            <a:ext cx="5599080" cy="226800"/>
           </a:xfrm>
           <a:prstGeom prst="rect">
             <a:avLst/>
@@ -7647,8 +7867,8 @@
         </p:nvSpPr>
         <p:spPr>
           <a:xfrm>
-            <a:off x="6287040" y="4524480"/>
-            <a:ext cx="5600520" cy="246960"/>
+            <a:off x="6286680" y="4524480"/>
+            <a:ext cx="5599080" cy="245880"/>
           </a:xfrm>
           <a:prstGeom prst="rect">
             <a:avLst/>
@@ -7699,8 +7919,8 @@
         </p:nvSpPr>
         <p:spPr>
           <a:xfrm>
-            <a:off x="6287040" y="4886280"/>
-            <a:ext cx="5600520" cy="246960"/>
+            <a:off x="6286680" y="4886280"/>
+            <a:ext cx="5599080" cy="245880"/>
           </a:xfrm>
           <a:prstGeom prst="rect">
             <a:avLst/>
@@ -7752,7 +7972,7 @@
         <p:spPr>
           <a:xfrm>
             <a:off x="380880" y="6091200"/>
-            <a:ext cx="11430360" cy="8640"/>
+            <a:ext cx="11428200" cy="7560"/>
           </a:xfrm>
           <a:custGeom>
             <a:avLst/>
@@ -7803,7 +8023,7 @@
         <p:spPr>
           <a:xfrm>
             <a:off x="399960" y="6286680"/>
-            <a:ext cx="151560" cy="151560"/>
+            <a:ext cx="150480" cy="150480"/>
           </a:xfrm>
           <a:custGeom>
             <a:avLst/>
@@ -7980,7 +8200,7 @@
         <p:spPr>
           <a:xfrm>
             <a:off x="628560" y="6248520"/>
-            <a:ext cx="11259000" cy="227880"/>
+            <a:ext cx="11256840" cy="226800"/>
           </a:xfrm>
           <a:prstGeom prst="rect">
             <a:avLst/>
@@ -8079,7 +8299,7 @@
         <p:spPr>
           <a:xfrm>
             <a:off x="380880" y="380880"/>
-            <a:ext cx="11487600" cy="151560"/>
+            <a:ext cx="11485440" cy="150480"/>
           </a:xfrm>
           <a:prstGeom prst="rect">
             <a:avLst/>
@@ -8107,7 +8327,7 @@
               <a:buNone/>
             </a:pPr>
             <a:r>
-              <a:rPr b="0" lang="en-US" sz="900" spc="265" strike="noStrike">
+              <a:rPr b="0" lang="en-US" sz="900" spc="256" strike="noStrike">
                 <a:solidFill>
                   <a:srgbClr val="86868b"/>
                 </a:solidFill>
@@ -8131,7 +8351,7 @@
         <p:spPr>
           <a:xfrm>
             <a:off x="380880" y="609480"/>
-            <a:ext cx="11601720" cy="380160"/>
+            <a:ext cx="11599560" cy="379080"/>
           </a:xfrm>
           <a:prstGeom prst="rect">
             <a:avLst/>
@@ -8183,7 +8403,7 @@
         <p:spPr>
           <a:xfrm>
             <a:off x="380880" y="1962000"/>
-            <a:ext cx="8629560" cy="618480"/>
+            <a:ext cx="8627760" cy="617400"/>
           </a:xfrm>
           <a:prstGeom prst="rect">
             <a:avLst/>
@@ -8255,7 +8475,7 @@
         <p:spPr>
           <a:xfrm>
             <a:off x="380880" y="2886120"/>
-            <a:ext cx="5590800" cy="189720"/>
+            <a:ext cx="5589360" cy="188640"/>
           </a:xfrm>
           <a:prstGeom prst="rect">
             <a:avLst/>
@@ -8283,7 +8503,7 @@
               <a:buNone/>
             </a:pPr>
             <a:r>
-              <a:rPr b="0" lang="en-US" sz="1050" spc="205" strike="noStrike">
+              <a:rPr b="0" lang="en-US" sz="1050" spc="197" strike="noStrike">
                 <a:solidFill>
                   <a:srgbClr val="86868b"/>
                 </a:solidFill>
@@ -8307,7 +8527,7 @@
         <p:spPr>
           <a:xfrm>
             <a:off x="380880" y="3228840"/>
-            <a:ext cx="990000" cy="227880"/>
+            <a:ext cx="988920" cy="226800"/>
           </a:xfrm>
           <a:prstGeom prst="rect">
             <a:avLst/>
@@ -8359,7 +8579,7 @@
         <p:spPr>
           <a:xfrm>
             <a:off x="1447920" y="3305160"/>
-            <a:ext cx="4457520" cy="75600"/>
+            <a:ext cx="4456080" cy="74520"/>
           </a:xfrm>
           <a:custGeom>
             <a:avLst/>
@@ -8410,7 +8630,7 @@
         <p:spPr>
           <a:xfrm>
             <a:off x="1447920" y="3305160"/>
-            <a:ext cx="894600" cy="75600"/>
+            <a:ext cx="893520" cy="74520"/>
           </a:xfrm>
           <a:custGeom>
             <a:avLst/>
@@ -8461,7 +8681,7 @@
         <p:spPr>
           <a:xfrm>
             <a:off x="380880" y="3571920"/>
-            <a:ext cx="990000" cy="227880"/>
+            <a:ext cx="988920" cy="226800"/>
           </a:xfrm>
           <a:prstGeom prst="rect">
             <a:avLst/>
@@ -8513,7 +8733,7 @@
         <p:spPr>
           <a:xfrm>
             <a:off x="1447920" y="3648240"/>
-            <a:ext cx="4457520" cy="75600"/>
+            <a:ext cx="4456080" cy="74520"/>
           </a:xfrm>
           <a:custGeom>
             <a:avLst/>
@@ -8564,7 +8784,7 @@
         <p:spPr>
           <a:xfrm>
             <a:off x="1447920" y="3648240"/>
-            <a:ext cx="1780560" cy="75600"/>
+            <a:ext cx="1779480" cy="74520"/>
           </a:xfrm>
           <a:custGeom>
             <a:avLst/>
@@ -8615,7 +8835,7 @@
         <p:spPr>
           <a:xfrm>
             <a:off x="380880" y="3914640"/>
-            <a:ext cx="990000" cy="227880"/>
+            <a:ext cx="988920" cy="226800"/>
           </a:xfrm>
           <a:prstGeom prst="rect">
             <a:avLst/>
@@ -8667,7 +8887,7 @@
         <p:spPr>
           <a:xfrm>
             <a:off x="1447920" y="3990960"/>
-            <a:ext cx="4457520" cy="75600"/>
+            <a:ext cx="4456080" cy="74520"/>
           </a:xfrm>
           <a:custGeom>
             <a:avLst/>
@@ -8718,7 +8938,7 @@
         <p:spPr>
           <a:xfrm>
             <a:off x="1447920" y="3990960"/>
-            <a:ext cx="2676240" cy="75600"/>
+            <a:ext cx="2674800" cy="74520"/>
           </a:xfrm>
           <a:custGeom>
             <a:avLst/>
@@ -8769,7 +8989,7 @@
         <p:spPr>
           <a:xfrm>
             <a:off x="380880" y="4295880"/>
-            <a:ext cx="5600520" cy="246960"/>
+            <a:ext cx="5599080" cy="245880"/>
           </a:xfrm>
           <a:prstGeom prst="rect">
             <a:avLst/>
@@ -8820,8 +9040,8 @@
         </p:nvSpPr>
         <p:spPr>
           <a:xfrm>
-            <a:off x="6287040" y="2886120"/>
-            <a:ext cx="5590800" cy="189720"/>
+            <a:off x="6286680" y="2886120"/>
+            <a:ext cx="5589360" cy="188640"/>
           </a:xfrm>
           <a:prstGeom prst="rect">
             <a:avLst/>
@@ -8849,7 +9069,7 @@
               <a:buNone/>
             </a:pPr>
             <a:r>
-              <a:rPr b="0" lang="en-US" sz="1050" spc="205" strike="noStrike">
+              <a:rPr b="0" lang="en-US" sz="1050" spc="197" strike="noStrike">
                 <a:solidFill>
                   <a:srgbClr val="0071e3"/>
                 </a:solidFill>
@@ -8872,8 +9092,8 @@
         </p:nvSpPr>
         <p:spPr>
           <a:xfrm>
-            <a:off x="6287040" y="3228840"/>
-            <a:ext cx="990000" cy="227880"/>
+            <a:off x="6286680" y="3228840"/>
+            <a:ext cx="988920" cy="226800"/>
           </a:xfrm>
           <a:prstGeom prst="rect">
             <a:avLst/>
@@ -8924,8 +9144,8 @@
         </p:nvSpPr>
         <p:spPr>
           <a:xfrm>
-            <a:off x="7353720" y="3305160"/>
-            <a:ext cx="3695400" cy="75600"/>
+            <a:off x="7353360" y="3305160"/>
+            <a:ext cx="3693960" cy="74520"/>
           </a:xfrm>
           <a:custGeom>
             <a:avLst/>
@@ -8975,8 +9195,8 @@
         </p:nvSpPr>
         <p:spPr>
           <a:xfrm>
-            <a:off x="7353720" y="3305160"/>
-            <a:ext cx="447120" cy="75600"/>
+            <a:off x="7353360" y="3305160"/>
+            <a:ext cx="446040" cy="74520"/>
           </a:xfrm>
           <a:custGeom>
             <a:avLst/>
@@ -9026,8 +9246,8 @@
         </p:nvSpPr>
         <p:spPr>
           <a:xfrm>
-            <a:off x="11202120" y="3247920"/>
-            <a:ext cx="675720" cy="189720"/>
+            <a:off x="11201400" y="3247920"/>
+            <a:ext cx="674640" cy="188640"/>
           </a:xfrm>
           <a:prstGeom prst="rect">
             <a:avLst/>
@@ -9078,8 +9298,8 @@
         </p:nvSpPr>
         <p:spPr>
           <a:xfrm>
-            <a:off x="6287040" y="3571920"/>
-            <a:ext cx="990000" cy="227880"/>
+            <a:off x="6286680" y="3571920"/>
+            <a:ext cx="988920" cy="226800"/>
           </a:xfrm>
           <a:prstGeom prst="rect">
             <a:avLst/>
@@ -9130,8 +9350,8 @@
         </p:nvSpPr>
         <p:spPr>
           <a:xfrm>
-            <a:off x="7353720" y="3648240"/>
-            <a:ext cx="3695400" cy="75600"/>
+            <a:off x="7353360" y="3648240"/>
+            <a:ext cx="3693960" cy="74520"/>
           </a:xfrm>
           <a:custGeom>
             <a:avLst/>
@@ -9181,8 +9401,8 @@
         </p:nvSpPr>
         <p:spPr>
           <a:xfrm>
-            <a:off x="7353720" y="3648240"/>
-            <a:ext cx="1847160" cy="75600"/>
+            <a:off x="7353360" y="3648240"/>
+            <a:ext cx="1846080" cy="74520"/>
           </a:xfrm>
           <a:custGeom>
             <a:avLst/>
@@ -9232,8 +9452,8 @@
         </p:nvSpPr>
         <p:spPr>
           <a:xfrm>
-            <a:off x="11202120" y="3591000"/>
-            <a:ext cx="675720" cy="189720"/>
+            <a:off x="11201400" y="3591000"/>
+            <a:ext cx="674640" cy="188640"/>
           </a:xfrm>
           <a:prstGeom prst="rect">
             <a:avLst/>
@@ -9284,8 +9504,8 @@
         </p:nvSpPr>
         <p:spPr>
           <a:xfrm>
-            <a:off x="6287040" y="3990960"/>
-            <a:ext cx="990000" cy="227880"/>
+            <a:off x="6286680" y="3990960"/>
+            <a:ext cx="988920" cy="226800"/>
           </a:xfrm>
           <a:prstGeom prst="rect">
             <a:avLst/>
@@ -9336,8 +9556,8 @@
         </p:nvSpPr>
         <p:spPr>
           <a:xfrm>
-            <a:off x="7353720" y="4067280"/>
-            <a:ext cx="3695400" cy="75600"/>
+            <a:off x="7353360" y="4067280"/>
+            <a:ext cx="3693960" cy="74520"/>
           </a:xfrm>
           <a:custGeom>
             <a:avLst/>
@@ -9387,8 +9607,8 @@
         </p:nvSpPr>
         <p:spPr>
           <a:xfrm>
-            <a:off x="7353720" y="4067280"/>
-            <a:ext cx="3580920" cy="75600"/>
+            <a:off x="7353360" y="4067280"/>
+            <a:ext cx="3579480" cy="74520"/>
           </a:xfrm>
           <a:custGeom>
             <a:avLst/>
@@ -9438,8 +9658,8 @@
         </p:nvSpPr>
         <p:spPr>
           <a:xfrm>
-            <a:off x="11202120" y="3914640"/>
-            <a:ext cx="675720" cy="380160"/>
+            <a:off x="11201400" y="3914640"/>
+            <a:ext cx="674640" cy="379080"/>
           </a:xfrm>
           <a:prstGeom prst="rect">
             <a:avLst/>
@@ -9490,8 +9710,8 @@
         </p:nvSpPr>
         <p:spPr>
           <a:xfrm>
-            <a:off x="6287040" y="4448160"/>
-            <a:ext cx="5600520" cy="246960"/>
+            <a:off x="6286680" y="4448160"/>
+            <a:ext cx="5599080" cy="245880"/>
           </a:xfrm>
           <a:prstGeom prst="rect">
             <a:avLst/>
@@ -9543,7 +9763,7 @@
         <p:spPr>
           <a:xfrm>
             <a:off x="380880" y="5005440"/>
-            <a:ext cx="11430360" cy="8640"/>
+            <a:ext cx="11428200" cy="7560"/>
           </a:xfrm>
           <a:custGeom>
             <a:avLst/>
@@ -9594,7 +9814,7 @@
         <p:spPr>
           <a:xfrm>
             <a:off x="399960" y="5286240"/>
-            <a:ext cx="151560" cy="151560"/>
+            <a:ext cx="150480" cy="150480"/>
           </a:xfrm>
           <a:custGeom>
             <a:avLst/>
@@ -9736,7 +9956,7 @@
         <p:spPr>
           <a:xfrm>
             <a:off x="628560" y="5238720"/>
-            <a:ext cx="11259000" cy="494640"/>
+            <a:ext cx="11256840" cy="493560"/>
           </a:xfrm>
           <a:prstGeom prst="rect">
             <a:avLst/>
@@ -9835,7 +10055,7 @@
         <p:spPr>
           <a:xfrm>
             <a:off x="380880" y="1850760"/>
-            <a:ext cx="761400" cy="18360"/>
+            <a:ext cx="760320" cy="17280"/>
           </a:xfrm>
           <a:custGeom>
             <a:avLst/>
@@ -9886,7 +10106,7 @@
         <p:spPr>
           <a:xfrm>
             <a:off x="380880" y="2174760"/>
-            <a:ext cx="9163080" cy="189720"/>
+            <a:ext cx="9161280" cy="188640"/>
           </a:xfrm>
           <a:prstGeom prst="rect">
             <a:avLst/>
@@ -9914,7 +10134,7 @@
               <a:buNone/>
             </a:pPr>
             <a:r>
-              <a:rPr b="0" lang="en-US" sz="1050" spc="310" strike="noStrike">
+              <a:rPr b="0" lang="en-US" sz="1050" spc="301" strike="noStrike">
                 <a:solidFill>
                   <a:srgbClr val="86868b"/>
                 </a:solidFill>
@@ -9938,7 +10158,7 @@
         <p:spPr>
           <a:xfrm>
             <a:off x="380880" y="2593800"/>
-            <a:ext cx="9553680" cy="1732680"/>
+            <a:ext cx="9551880" cy="1731600"/>
           </a:xfrm>
           <a:prstGeom prst="rect">
             <a:avLst/>
@@ -10011,7 +10231,7 @@
         <p:spPr>
           <a:xfrm>
             <a:off x="380880" y="4635720"/>
-            <a:ext cx="5600520" cy="370800"/>
+            <a:ext cx="5599080" cy="369720"/>
           </a:xfrm>
           <a:prstGeom prst="rect">
             <a:avLst/>
@@ -10062,8 +10282,8 @@
         </p:nvSpPr>
         <p:spPr>
           <a:xfrm>
-            <a:off x="9474120" y="2476440"/>
-            <a:ext cx="3285720" cy="1904400"/>
+            <a:off x="9473400" y="2476440"/>
+            <a:ext cx="3284280" cy="1903320"/>
           </a:xfrm>
           <a:prstGeom prst="rect">
             <a:avLst/>
@@ -10152,7 +10372,7 @@
         <p:spPr>
           <a:xfrm>
             <a:off x="380880" y="380880"/>
-            <a:ext cx="11487600" cy="151560"/>
+            <a:ext cx="11485440" cy="150480"/>
           </a:xfrm>
           <a:prstGeom prst="rect">
             <a:avLst/>
@@ -10180,7 +10400,7 @@
               <a:buNone/>
             </a:pPr>
             <a:r>
-              <a:rPr b="0" lang="en-US" sz="900" spc="265" strike="noStrike">
+              <a:rPr b="0" lang="en-US" sz="900" spc="256" strike="noStrike">
                 <a:solidFill>
                   <a:srgbClr val="86868b"/>
                 </a:solidFill>
@@ -10204,7 +10424,7 @@
         <p:spPr>
           <a:xfrm>
             <a:off x="380880" y="609480"/>
-            <a:ext cx="11601720" cy="380160"/>
+            <a:ext cx="11599560" cy="379080"/>
           </a:xfrm>
           <a:prstGeom prst="rect">
             <a:avLst/>
@@ -10256,7 +10476,7 @@
         <p:spPr>
           <a:xfrm>
             <a:off x="380880" y="1848960"/>
-            <a:ext cx="5609880" cy="561240"/>
+            <a:ext cx="5608440" cy="560160"/>
           </a:xfrm>
           <a:prstGeom prst="rect">
             <a:avLst/>
@@ -10328,7 +10548,7 @@
         <p:spPr>
           <a:xfrm>
             <a:off x="380880" y="2596680"/>
-            <a:ext cx="5600520" cy="494640"/>
+            <a:ext cx="5599080" cy="493560"/>
           </a:xfrm>
           <a:prstGeom prst="rect">
             <a:avLst/>
@@ -10390,7 +10610,7 @@
         <p:spPr>
           <a:xfrm>
             <a:off x="380880" y="3244320"/>
-            <a:ext cx="5600520" cy="494640"/>
+            <a:ext cx="5599080" cy="493560"/>
           </a:xfrm>
           <a:prstGeom prst="rect">
             <a:avLst/>
@@ -10441,8 +10661,8 @@
         </p:nvSpPr>
         <p:spPr>
           <a:xfrm>
-            <a:off x="6296400" y="1848960"/>
-            <a:ext cx="18360" cy="799560"/>
+            <a:off x="6296040" y="1848960"/>
+            <a:ext cx="17280" cy="798480"/>
           </a:xfrm>
           <a:custGeom>
             <a:avLst/>
@@ -10492,8 +10712,8 @@
         </p:nvSpPr>
         <p:spPr>
           <a:xfrm>
-            <a:off x="6496560" y="1848960"/>
-            <a:ext cx="5381280" cy="189720"/>
+            <a:off x="6496200" y="1848960"/>
+            <a:ext cx="5379840" cy="188640"/>
           </a:xfrm>
           <a:prstGeom prst="rect">
             <a:avLst/>
@@ -10521,7 +10741,7 @@
               <a:buNone/>
             </a:pPr>
             <a:r>
-              <a:rPr b="0" lang="en-US" sz="1050" spc="205" strike="noStrike">
+              <a:rPr b="0" lang="en-US" sz="1050" spc="197" strike="noStrike">
                 <a:solidFill>
                   <a:srgbClr val="0071e3"/>
                 </a:solidFill>
@@ -10544,8 +10764,8 @@
         </p:nvSpPr>
         <p:spPr>
           <a:xfrm>
-            <a:off x="6496560" y="2115720"/>
-            <a:ext cx="5428800" cy="304200"/>
+            <a:off x="6496200" y="2115720"/>
+            <a:ext cx="5427360" cy="303120"/>
           </a:xfrm>
           <a:prstGeom prst="rect">
             <a:avLst/>
@@ -10596,8 +10816,8 @@
         </p:nvSpPr>
         <p:spPr>
           <a:xfrm>
-            <a:off x="6496560" y="2458800"/>
-            <a:ext cx="5381280" cy="189720"/>
+            <a:off x="6496200" y="2458800"/>
+            <a:ext cx="5379840" cy="188640"/>
           </a:xfrm>
           <a:prstGeom prst="rect">
             <a:avLst/>
@@ -10648,8 +10868,8 @@
         </p:nvSpPr>
         <p:spPr>
           <a:xfrm>
-            <a:off x="6296400" y="2801520"/>
-            <a:ext cx="18360" cy="799560"/>
+            <a:off x="6296040" y="2801520"/>
+            <a:ext cx="17280" cy="798480"/>
           </a:xfrm>
           <a:custGeom>
             <a:avLst/>
@@ -10699,8 +10919,8 @@
         </p:nvSpPr>
         <p:spPr>
           <a:xfrm>
-            <a:off x="6496560" y="2801520"/>
-            <a:ext cx="5381280" cy="189720"/>
+            <a:off x="6496200" y="2801520"/>
+            <a:ext cx="5379840" cy="188640"/>
           </a:xfrm>
           <a:prstGeom prst="rect">
             <a:avLst/>
@@ -10728,7 +10948,7 @@
               <a:buNone/>
             </a:pPr>
             <a:r>
-              <a:rPr b="0" lang="en-US" sz="1050" spc="205" strike="noStrike">
+              <a:rPr b="0" lang="en-US" sz="1050" spc="197" strike="noStrike">
                 <a:solidFill>
                   <a:srgbClr val="86868b"/>
                 </a:solidFill>
@@ -10751,8 +10971,8 @@
         </p:nvSpPr>
         <p:spPr>
           <a:xfrm>
-            <a:off x="6496560" y="3068280"/>
-            <a:ext cx="5428800" cy="304200"/>
+            <a:off x="6496200" y="3068280"/>
+            <a:ext cx="5427360" cy="303120"/>
           </a:xfrm>
           <a:prstGeom prst="rect">
             <a:avLst/>
@@ -10803,8 +11023,8 @@
         </p:nvSpPr>
         <p:spPr>
           <a:xfrm>
-            <a:off x="6496560" y="3411000"/>
-            <a:ext cx="5381280" cy="189720"/>
+            <a:off x="6496200" y="3411000"/>
+            <a:ext cx="5379840" cy="188640"/>
           </a:xfrm>
           <a:prstGeom prst="rect">
             <a:avLst/>
@@ -10855,8 +11075,8 @@
         </p:nvSpPr>
         <p:spPr>
           <a:xfrm>
-            <a:off x="6296400" y="3754080"/>
-            <a:ext cx="18360" cy="799560"/>
+            <a:off x="6296040" y="3754080"/>
+            <a:ext cx="17280" cy="798480"/>
           </a:xfrm>
           <a:custGeom>
             <a:avLst/>
@@ -10906,8 +11126,8 @@
         </p:nvSpPr>
         <p:spPr>
           <a:xfrm>
-            <a:off x="6496560" y="3754080"/>
-            <a:ext cx="5381280" cy="189720"/>
+            <a:off x="6496200" y="3754080"/>
+            <a:ext cx="5379840" cy="188640"/>
           </a:xfrm>
           <a:prstGeom prst="rect">
             <a:avLst/>
@@ -10935,7 +11155,7 @@
               <a:buNone/>
             </a:pPr>
             <a:r>
-              <a:rPr b="0" lang="en-US" sz="1050" spc="205" strike="noStrike">
+              <a:rPr b="0" lang="en-US" sz="1050" spc="197" strike="noStrike">
                 <a:solidFill>
                   <a:srgbClr val="86868b"/>
                 </a:solidFill>
@@ -10958,8 +11178,8 @@
         </p:nvSpPr>
         <p:spPr>
           <a:xfrm>
-            <a:off x="6496560" y="4020840"/>
-            <a:ext cx="5428800" cy="304200"/>
+            <a:off x="6496200" y="4020840"/>
+            <a:ext cx="5427360" cy="303120"/>
           </a:xfrm>
           <a:prstGeom prst="rect">
             <a:avLst/>
@@ -11010,8 +11230,8 @@
         </p:nvSpPr>
         <p:spPr>
           <a:xfrm>
-            <a:off x="6496560" y="4363560"/>
-            <a:ext cx="5381280" cy="189720"/>
+            <a:off x="6496200" y="4363560"/>
+            <a:ext cx="5379840" cy="188640"/>
           </a:xfrm>
           <a:prstGeom prst="rect">
             <a:avLst/>
@@ -11063,7 +11283,7 @@
         <p:spPr>
           <a:xfrm>
             <a:off x="380880" y="4787640"/>
-            <a:ext cx="11430360" cy="8640"/>
+            <a:ext cx="11428200" cy="7560"/>
           </a:xfrm>
           <a:custGeom>
             <a:avLst/>
@@ -11114,7 +11334,7 @@
         <p:spPr>
           <a:xfrm>
             <a:off x="380880" y="5020920"/>
-            <a:ext cx="11496960" cy="189720"/>
+            <a:ext cx="11494800" cy="188640"/>
           </a:xfrm>
           <a:prstGeom prst="rect">
             <a:avLst/>
@@ -11142,7 +11362,7 @@
               <a:buNone/>
             </a:pPr>
             <a:r>
-              <a:rPr b="0" lang="en-US" sz="1050" spc="205" strike="noStrike">
+              <a:rPr b="0" lang="en-US" sz="1050" spc="197" strike="noStrike">
                 <a:solidFill>
                   <a:srgbClr val="86868b"/>
                 </a:solidFill>
@@ -11166,7 +11386,7 @@
         <p:spPr>
           <a:xfrm>
             <a:off x="380880" y="5363640"/>
-            <a:ext cx="189720" cy="151560"/>
+            <a:ext cx="188640" cy="150480"/>
           </a:xfrm>
           <a:custGeom>
             <a:avLst/>
@@ -11408,7 +11628,7 @@
         <p:spPr>
           <a:xfrm>
             <a:off x="628560" y="5325840"/>
-            <a:ext cx="3485880" cy="227880"/>
+            <a:ext cx="3484440" cy="226800"/>
           </a:xfrm>
           <a:prstGeom prst="rect">
             <a:avLst/>
@@ -11460,7 +11680,7 @@
         <p:spPr>
           <a:xfrm>
             <a:off x="380880" y="5630400"/>
-            <a:ext cx="3723840" cy="218520"/>
+            <a:ext cx="3722400" cy="217440"/>
           </a:xfrm>
           <a:prstGeom prst="rect">
             <a:avLst/>
@@ -11511,8 +11731,8 @@
         </p:nvSpPr>
         <p:spPr>
           <a:xfrm>
-            <a:off x="4286520" y="5363640"/>
-            <a:ext cx="151560" cy="151560"/>
+            <a:off x="4286160" y="5363640"/>
+            <a:ext cx="150480" cy="150480"/>
           </a:xfrm>
           <a:custGeom>
             <a:avLst/>
@@ -11609,8 +11829,8 @@
         </p:nvSpPr>
         <p:spPr>
           <a:xfrm>
-            <a:off x="4515120" y="5325840"/>
-            <a:ext cx="3485880" cy="227880"/>
+            <a:off x="4514760" y="5325840"/>
+            <a:ext cx="3484440" cy="226800"/>
           </a:xfrm>
           <a:prstGeom prst="rect">
             <a:avLst/>
@@ -11661,8 +11881,8 @@
         </p:nvSpPr>
         <p:spPr>
           <a:xfrm>
-            <a:off x="4267440" y="5630400"/>
-            <a:ext cx="3723840" cy="218520"/>
+            <a:off x="4267080" y="5630400"/>
+            <a:ext cx="3722400" cy="217440"/>
           </a:xfrm>
           <a:prstGeom prst="rect">
             <a:avLst/>
@@ -11713,8 +11933,8 @@
         </p:nvSpPr>
         <p:spPr>
           <a:xfrm>
-            <a:off x="8173080" y="5363640"/>
-            <a:ext cx="151560" cy="151560"/>
+            <a:off x="8172360" y="5363640"/>
+            <a:ext cx="150480" cy="150480"/>
           </a:xfrm>
           <a:custGeom>
             <a:avLst/>
@@ -11850,8 +12070,8 @@
         </p:nvSpPr>
         <p:spPr>
           <a:xfrm>
-            <a:off x="8401680" y="5325840"/>
-            <a:ext cx="3485880" cy="227880"/>
+            <a:off x="8400960" y="5325840"/>
+            <a:ext cx="3484440" cy="226800"/>
           </a:xfrm>
           <a:prstGeom prst="rect">
             <a:avLst/>
@@ -11902,8 +12122,8 @@
         </p:nvSpPr>
         <p:spPr>
           <a:xfrm>
-            <a:off x="8154000" y="5630400"/>
-            <a:ext cx="3723840" cy="218520"/>
+            <a:off x="8153280" y="5630400"/>
+            <a:ext cx="3722400" cy="217440"/>
           </a:xfrm>
           <a:prstGeom prst="rect">
             <a:avLst/>
@@ -11992,7 +12212,7 @@
         <p:spPr>
           <a:xfrm>
             <a:off x="380880" y="380880"/>
-            <a:ext cx="11487600" cy="151560"/>
+            <a:ext cx="11485440" cy="150480"/>
           </a:xfrm>
           <a:prstGeom prst="rect">
             <a:avLst/>
@@ -12020,7 +12240,7 @@
               <a:buNone/>
             </a:pPr>
             <a:r>
-              <a:rPr b="0" lang="en-US" sz="900" spc="265" strike="noStrike">
+              <a:rPr b="0" lang="en-US" sz="900" spc="256" strike="noStrike">
                 <a:solidFill>
                   <a:srgbClr val="86868b"/>
                 </a:solidFill>
@@ -12044,7 +12264,7 @@
         <p:spPr>
           <a:xfrm>
             <a:off x="380880" y="609480"/>
-            <a:ext cx="11601720" cy="380160"/>
+            <a:ext cx="11599560" cy="379080"/>
           </a:xfrm>
           <a:prstGeom prst="rect">
             <a:avLst/>
@@ -12096,7 +12316,7 @@
         <p:spPr>
           <a:xfrm>
             <a:off x="380880" y="1886040"/>
-            <a:ext cx="3657240" cy="8640"/>
+            <a:ext cx="3655800" cy="7560"/>
           </a:xfrm>
           <a:custGeom>
             <a:avLst/>
@@ -12147,7 +12367,7 @@
         <p:spPr>
           <a:xfrm>
             <a:off x="409680" y="2081160"/>
-            <a:ext cx="227880" cy="227880"/>
+            <a:ext cx="226800" cy="226800"/>
           </a:xfrm>
           <a:custGeom>
             <a:avLst/>
@@ -12348,7 +12568,7 @@
         <p:spPr>
           <a:xfrm>
             <a:off x="380880" y="2424240"/>
-            <a:ext cx="3752640" cy="266040"/>
+            <a:ext cx="3751200" cy="264960"/>
           </a:xfrm>
           <a:prstGeom prst="rect">
             <a:avLst/>
@@ -12400,7 +12620,7 @@
         <p:spPr>
           <a:xfrm>
             <a:off x="380880" y="2843280"/>
-            <a:ext cx="3733560" cy="494640"/>
+            <a:ext cx="3732120" cy="493560"/>
           </a:xfrm>
           <a:prstGeom prst="rect">
             <a:avLst/>
@@ -12451,8 +12671,8 @@
         </p:nvSpPr>
         <p:spPr>
           <a:xfrm>
-            <a:off x="4267440" y="1886040"/>
-            <a:ext cx="3657240" cy="8640"/>
+            <a:off x="4267080" y="1886040"/>
+            <a:ext cx="3655800" cy="7560"/>
           </a:xfrm>
           <a:custGeom>
             <a:avLst/>
@@ -12502,8 +12722,8 @@
         </p:nvSpPr>
         <p:spPr>
           <a:xfrm>
-            <a:off x="4324680" y="2081160"/>
-            <a:ext cx="170640" cy="227880"/>
+            <a:off x="4324320" y="2081160"/>
+            <a:ext cx="169560" cy="226800"/>
           </a:xfrm>
           <a:custGeom>
             <a:avLst/>
@@ -12634,8 +12854,8 @@
         </p:nvSpPr>
         <p:spPr>
           <a:xfrm>
-            <a:off x="4267440" y="2424240"/>
-            <a:ext cx="3752640" cy="266040"/>
+            <a:off x="4267080" y="2424240"/>
+            <a:ext cx="3751200" cy="264960"/>
           </a:xfrm>
           <a:prstGeom prst="rect">
             <a:avLst/>
@@ -12686,8 +12906,8 @@
         </p:nvSpPr>
         <p:spPr>
           <a:xfrm>
-            <a:off x="4267440" y="2843280"/>
-            <a:ext cx="3733560" cy="494640"/>
+            <a:off x="4267080" y="2843280"/>
+            <a:ext cx="3732120" cy="493560"/>
           </a:xfrm>
           <a:prstGeom prst="rect">
             <a:avLst/>
@@ -12738,8 +12958,8 @@
         </p:nvSpPr>
         <p:spPr>
           <a:xfrm>
-            <a:off x="8154000" y="1886040"/>
-            <a:ext cx="3657240" cy="8640"/>
+            <a:off x="8153280" y="1886040"/>
+            <a:ext cx="3655800" cy="7560"/>
           </a:xfrm>
           <a:custGeom>
             <a:avLst/>
@@ -12789,8 +13009,8 @@
         </p:nvSpPr>
         <p:spPr>
           <a:xfrm>
-            <a:off x="8182800" y="2081160"/>
-            <a:ext cx="227880" cy="227880"/>
+            <a:off x="8182080" y="2081160"/>
+            <a:ext cx="226800" cy="226800"/>
           </a:xfrm>
           <a:custGeom>
             <a:avLst/>
@@ -13012,8 +13232,8 @@
         </p:nvSpPr>
         <p:spPr>
           <a:xfrm>
-            <a:off x="8154000" y="2424240"/>
-            <a:ext cx="3752640" cy="266040"/>
+            <a:off x="8153280" y="2424240"/>
+            <a:ext cx="3751200" cy="264960"/>
           </a:xfrm>
           <a:prstGeom prst="rect">
             <a:avLst/>
@@ -13064,8 +13284,8 @@
         </p:nvSpPr>
         <p:spPr>
           <a:xfrm>
-            <a:off x="8154000" y="2843280"/>
-            <a:ext cx="3733560" cy="494640"/>
+            <a:off x="8153280" y="2843280"/>
+            <a:ext cx="3732120" cy="493560"/>
           </a:xfrm>
           <a:prstGeom prst="rect">
             <a:avLst/>
@@ -13117,7 +13337,7 @@
         <p:spPr>
           <a:xfrm>
             <a:off x="380880" y="3571920"/>
-            <a:ext cx="3657240" cy="8640"/>
+            <a:ext cx="3655800" cy="7560"/>
           </a:xfrm>
           <a:custGeom>
             <a:avLst/>
@@ -13168,7 +13388,7 @@
         <p:spPr>
           <a:xfrm>
             <a:off x="380880" y="3767040"/>
-            <a:ext cx="285120" cy="227880"/>
+            <a:ext cx="284040" cy="226800"/>
           </a:xfrm>
           <a:custGeom>
             <a:avLst/>
@@ -13384,7 +13604,7 @@
         <p:spPr>
           <a:xfrm>
             <a:off x="380880" y="4110120"/>
-            <a:ext cx="3752640" cy="266040"/>
+            <a:ext cx="3751200" cy="264960"/>
           </a:xfrm>
           <a:prstGeom prst="rect">
             <a:avLst/>
@@ -13436,7 +13656,7 @@
         <p:spPr>
           <a:xfrm>
             <a:off x="380880" y="4529160"/>
-            <a:ext cx="3733560" cy="742320"/>
+            <a:ext cx="3732120" cy="741240"/>
           </a:xfrm>
           <a:prstGeom prst="rect">
             <a:avLst/>
@@ -13487,8 +13707,8 @@
         </p:nvSpPr>
         <p:spPr>
           <a:xfrm>
-            <a:off x="4267440" y="3571920"/>
-            <a:ext cx="3657240" cy="8640"/>
+            <a:off x="4267080" y="3571920"/>
+            <a:ext cx="3655800" cy="7560"/>
           </a:xfrm>
           <a:custGeom>
             <a:avLst/>
@@ -13538,8 +13758,8 @@
         </p:nvSpPr>
         <p:spPr>
           <a:xfrm>
-            <a:off x="4324680" y="3767040"/>
-            <a:ext cx="170640" cy="227880"/>
+            <a:off x="4324320" y="3767040"/>
+            <a:ext cx="169560" cy="226800"/>
           </a:xfrm>
           <a:custGeom>
             <a:avLst/>
@@ -13737,8 +13957,8 @@
         </p:nvSpPr>
         <p:spPr>
           <a:xfrm>
-            <a:off x="4267440" y="4110120"/>
-            <a:ext cx="3752640" cy="266040"/>
+            <a:off x="4267080" y="4110120"/>
+            <a:ext cx="3751200" cy="264960"/>
           </a:xfrm>
           <a:prstGeom prst="rect">
             <a:avLst/>
@@ -13789,8 +14009,8 @@
         </p:nvSpPr>
         <p:spPr>
           <a:xfrm>
-            <a:off x="4267440" y="4529160"/>
-            <a:ext cx="3733560" cy="494640"/>
+            <a:off x="4267080" y="4529160"/>
+            <a:ext cx="3732120" cy="493560"/>
           </a:xfrm>
           <a:prstGeom prst="rect">
             <a:avLst/>
@@ -13841,8 +14061,8 @@
         </p:nvSpPr>
         <p:spPr>
           <a:xfrm>
-            <a:off x="8154000" y="3571920"/>
-            <a:ext cx="3657240" cy="8640"/>
+            <a:off x="8153280" y="3571920"/>
+            <a:ext cx="3655800" cy="7560"/>
           </a:xfrm>
           <a:custGeom>
             <a:avLst/>
@@ -13892,8 +14112,8 @@
         </p:nvSpPr>
         <p:spPr>
           <a:xfrm>
-            <a:off x="8182800" y="3767040"/>
-            <a:ext cx="227880" cy="227880"/>
+            <a:off x="8182080" y="3767040"/>
+            <a:ext cx="226800" cy="226800"/>
           </a:xfrm>
           <a:custGeom>
             <a:avLst/>
@@ -14131,8 +14351,8 @@
         </p:nvSpPr>
         <p:spPr>
           <a:xfrm>
-            <a:off x="8154000" y="4110120"/>
-            <a:ext cx="3752640" cy="266040"/>
+            <a:off x="8153280" y="4110120"/>
+            <a:ext cx="3751200" cy="264960"/>
           </a:xfrm>
           <a:prstGeom prst="rect">
             <a:avLst/>
@@ -14183,8 +14403,8 @@
         </p:nvSpPr>
         <p:spPr>
           <a:xfrm>
-            <a:off x="8154000" y="4529160"/>
-            <a:ext cx="3733560" cy="494640"/>
+            <a:off x="8153280" y="4529160"/>
+            <a:ext cx="3732120" cy="493560"/>
           </a:xfrm>
           <a:prstGeom prst="rect">
             <a:avLst/>
@@ -14236,7 +14456,7 @@
         <p:spPr>
           <a:xfrm>
             <a:off x="380880" y="6091200"/>
-            <a:ext cx="11430360" cy="8640"/>
+            <a:ext cx="11428200" cy="7560"/>
           </a:xfrm>
           <a:custGeom>
             <a:avLst/>
@@ -14287,7 +14507,7 @@
         <p:spPr>
           <a:xfrm>
             <a:off x="399960" y="6286680"/>
-            <a:ext cx="151560" cy="151560"/>
+            <a:ext cx="150480" cy="150480"/>
           </a:xfrm>
           <a:custGeom>
             <a:avLst/>
@@ -14464,7 +14684,7 @@
         <p:spPr>
           <a:xfrm>
             <a:off x="628560" y="6248520"/>
-            <a:ext cx="11259000" cy="227880"/>
+            <a:ext cx="11256840" cy="226800"/>
           </a:xfrm>
           <a:prstGeom prst="rect">
             <a:avLst/>
@@ -14563,7 +14783,7 @@
         <p:spPr>
           <a:xfrm>
             <a:off x="380880" y="380880"/>
-            <a:ext cx="608760" cy="18360"/>
+            <a:ext cx="607680" cy="17280"/>
           </a:xfrm>
           <a:custGeom>
             <a:avLst/>
@@ -14614,7 +14834,7 @@
         <p:spPr>
           <a:xfrm>
             <a:off x="380880" y="628560"/>
-            <a:ext cx="11496960" cy="189720"/>
+            <a:ext cx="11494800" cy="188640"/>
           </a:xfrm>
           <a:prstGeom prst="rect">
             <a:avLst/>
@@ -14642,7 +14862,7 @@
               <a:buNone/>
             </a:pPr>
             <a:r>
-              <a:rPr b="0" lang="en-US" sz="1050" spc="310" strike="noStrike">
+              <a:rPr b="0" lang="en-US" sz="1050" spc="301" strike="noStrike">
                 <a:solidFill>
                   <a:srgbClr val="86868b"/>
                 </a:solidFill>
@@ -14666,7 +14886,7 @@
         <p:spPr>
           <a:xfrm>
             <a:off x="380880" y="971640"/>
-            <a:ext cx="11716200" cy="570960"/>
+            <a:ext cx="11714040" cy="569880"/>
           </a:xfrm>
           <a:prstGeom prst="rect">
             <a:avLst/>
@@ -14718,7 +14938,7 @@
         <p:spPr>
           <a:xfrm>
             <a:off x="385920" y="2714760"/>
-            <a:ext cx="370800" cy="370800"/>
+            <a:ext cx="369720" cy="369720"/>
           </a:xfrm>
           <a:custGeom>
             <a:avLst/>
@@ -14770,7 +14990,7 @@
         <p:spPr>
           <a:xfrm>
             <a:off x="338040" y="2709720"/>
-            <a:ext cx="447120" cy="361080"/>
+            <a:ext cx="446040" cy="360000"/>
           </a:xfrm>
           <a:prstGeom prst="rect">
             <a:avLst/>
@@ -14822,7 +15042,7 @@
         <p:spPr>
           <a:xfrm>
             <a:off x="914400" y="2709720"/>
-            <a:ext cx="5047920" cy="266040"/>
+            <a:ext cx="5046480" cy="264960"/>
           </a:xfrm>
           <a:prstGeom prst="rect">
             <a:avLst/>
@@ -14874,7 +15094,7 @@
         <p:spPr>
           <a:xfrm>
             <a:off x="914400" y="3052800"/>
-            <a:ext cx="5028840" cy="494640"/>
+            <a:ext cx="5027400" cy="493560"/>
           </a:xfrm>
           <a:prstGeom prst="rect">
             <a:avLst/>
@@ -14945,8 +15165,8 @@
         </p:nvSpPr>
         <p:spPr>
           <a:xfrm>
-            <a:off x="6329880" y="2714760"/>
-            <a:ext cx="370800" cy="370800"/>
+            <a:off x="6329520" y="2714760"/>
+            <a:ext cx="369720" cy="369720"/>
           </a:xfrm>
           <a:custGeom>
             <a:avLst/>
@@ -14997,8 +15217,8 @@
         </p:nvSpPr>
         <p:spPr>
           <a:xfrm>
-            <a:off x="6282000" y="2709720"/>
-            <a:ext cx="447120" cy="361080"/>
+            <a:off x="6281640" y="2709720"/>
+            <a:ext cx="446040" cy="360000"/>
           </a:xfrm>
           <a:prstGeom prst="rect">
             <a:avLst/>
@@ -15049,8 +15269,8 @@
         </p:nvSpPr>
         <p:spPr>
           <a:xfrm>
-            <a:off x="6858360" y="2709720"/>
-            <a:ext cx="5047920" cy="266040"/>
+            <a:off x="6858000" y="2709720"/>
+            <a:ext cx="5046480" cy="264960"/>
           </a:xfrm>
           <a:prstGeom prst="rect">
             <a:avLst/>
@@ -15101,8 +15321,8 @@
         </p:nvSpPr>
         <p:spPr>
           <a:xfrm>
-            <a:off x="6858360" y="3052800"/>
-            <a:ext cx="5028840" cy="494640"/>
+            <a:off x="6858000" y="3052800"/>
+            <a:ext cx="5027400" cy="493560"/>
           </a:xfrm>
           <a:prstGeom prst="rect">
             <a:avLst/>
@@ -15174,7 +15394,7 @@
         <p:spPr>
           <a:xfrm>
             <a:off x="385920" y="3781440"/>
-            <a:ext cx="370800" cy="370800"/>
+            <a:ext cx="369720" cy="369720"/>
           </a:xfrm>
           <a:custGeom>
             <a:avLst/>
@@ -15226,7 +15446,7 @@
         <p:spPr>
           <a:xfrm>
             <a:off x="338040" y="3776760"/>
-            <a:ext cx="447120" cy="361080"/>
+            <a:ext cx="446040" cy="360000"/>
           </a:xfrm>
           <a:prstGeom prst="rect">
             <a:avLst/>
@@ -15278,7 +15498,7 @@
         <p:spPr>
           <a:xfrm>
             <a:off x="914400" y="3776760"/>
-            <a:ext cx="5047920" cy="266040"/>
+            <a:ext cx="5046480" cy="264960"/>
           </a:xfrm>
           <a:prstGeom prst="rect">
             <a:avLst/>
@@ -15330,7 +15550,7 @@
         <p:spPr>
           <a:xfrm>
             <a:off x="914400" y="4119480"/>
-            <a:ext cx="5028840" cy="494640"/>
+            <a:ext cx="5027400" cy="493560"/>
           </a:xfrm>
           <a:prstGeom prst="rect">
             <a:avLst/>
@@ -15421,8 +15641,8 @@
         </p:nvSpPr>
         <p:spPr>
           <a:xfrm>
-            <a:off x="6329880" y="3781440"/>
-            <a:ext cx="370800" cy="370800"/>
+            <a:off x="6329520" y="3781440"/>
+            <a:ext cx="369720" cy="369720"/>
           </a:xfrm>
           <a:custGeom>
             <a:avLst/>
@@ -15473,8 +15693,8 @@
         </p:nvSpPr>
         <p:spPr>
           <a:xfrm>
-            <a:off x="6282000" y="3776760"/>
-            <a:ext cx="447120" cy="361080"/>
+            <a:off x="6281640" y="3776760"/>
+            <a:ext cx="446040" cy="360000"/>
           </a:xfrm>
           <a:prstGeom prst="rect">
             <a:avLst/>
@@ -15525,8 +15745,8 @@
         </p:nvSpPr>
         <p:spPr>
           <a:xfrm>
-            <a:off x="6858360" y="3776760"/>
-            <a:ext cx="5047920" cy="266040"/>
+            <a:off x="6858000" y="3776760"/>
+            <a:ext cx="5046480" cy="264960"/>
           </a:xfrm>
           <a:prstGeom prst="rect">
             <a:avLst/>
@@ -15577,8 +15797,8 @@
         </p:nvSpPr>
         <p:spPr>
           <a:xfrm>
-            <a:off x="6858360" y="4119480"/>
-            <a:ext cx="5028840" cy="494640"/>
+            <a:off x="6858000" y="4119480"/>
+            <a:ext cx="5027400" cy="493560"/>
           </a:xfrm>
           <a:prstGeom prst="rect">
             <a:avLst/>
@@ -15650,7 +15870,7 @@
         <p:spPr>
           <a:xfrm>
             <a:off x="380880" y="5634000"/>
-            <a:ext cx="11430360" cy="8640"/>
+            <a:ext cx="11428200" cy="7560"/>
           </a:xfrm>
           <a:custGeom>
             <a:avLst/>
@@ -15701,7 +15921,7 @@
         <p:spPr>
           <a:xfrm>
             <a:off x="380880" y="5867280"/>
-            <a:ext cx="7772400" cy="304200"/>
+            <a:ext cx="7770600" cy="303120"/>
           </a:xfrm>
           <a:prstGeom prst="rect">
             <a:avLst/>
@@ -15753,7 +15973,7 @@
         <p:spPr>
           <a:xfrm>
             <a:off x="380880" y="6248520"/>
-            <a:ext cx="7734240" cy="227880"/>
+            <a:ext cx="7732440" cy="226800"/>
           </a:xfrm>
           <a:prstGeom prst="rect">
             <a:avLst/>
@@ -15814,8 +16034,8 @@
         </p:nvSpPr>
         <p:spPr>
           <a:xfrm>
-            <a:off x="10064880" y="5981760"/>
-            <a:ext cx="1742400" cy="189720"/>
+            <a:off x="10064160" y="5981760"/>
+            <a:ext cx="1741320" cy="188640"/>
           </a:xfrm>
           <a:prstGeom prst="rect">
             <a:avLst/>
@@ -15866,8 +16086,8 @@
         </p:nvSpPr>
         <p:spPr>
           <a:xfrm>
-            <a:off x="10074600" y="6210360"/>
-            <a:ext cx="1732680" cy="151560"/>
+            <a:off x="10073880" y="6210360"/>
+            <a:ext cx="1731600" cy="150480"/>
           </a:xfrm>
           <a:prstGeom prst="rect">
             <a:avLst/>
@@ -15956,7 +16176,7 @@
         <p:spPr>
           <a:xfrm>
             <a:off x="380880" y="380880"/>
-            <a:ext cx="11487600" cy="151560"/>
+            <a:ext cx="11485440" cy="150480"/>
           </a:xfrm>
           <a:prstGeom prst="rect">
             <a:avLst/>
@@ -15984,7 +16204,7 @@
               <a:buNone/>
             </a:pPr>
             <a:r>
-              <a:rPr b="0" lang="en-US" sz="900" spc="265" strike="noStrike">
+              <a:rPr b="0" lang="en-US" sz="900" spc="256" strike="noStrike">
                 <a:solidFill>
                   <a:srgbClr val="86868b"/>
                 </a:solidFill>
@@ -16008,7 +16228,7 @@
         <p:spPr>
           <a:xfrm>
             <a:off x="380880" y="647640"/>
-            <a:ext cx="11658960" cy="456480"/>
+            <a:ext cx="11656800" cy="455400"/>
           </a:xfrm>
           <a:prstGeom prst="rect">
             <a:avLst/>
@@ -16060,7 +16280,7 @@
         <p:spPr>
           <a:xfrm>
             <a:off x="380880" y="1714680"/>
-            <a:ext cx="875520" cy="570960"/>
+            <a:ext cx="874440" cy="569880"/>
           </a:xfrm>
           <a:prstGeom prst="rect">
             <a:avLst/>
@@ -16112,7 +16332,7 @@
         <p:spPr>
           <a:xfrm>
             <a:off x="1202760" y="1790640"/>
-            <a:ext cx="4628880" cy="304200"/>
+            <a:ext cx="4627440" cy="303120"/>
           </a:xfrm>
           <a:prstGeom prst="rect">
             <a:avLst/>
@@ -16164,7 +16384,7 @@
         <p:spPr>
           <a:xfrm>
             <a:off x="1202760" y="2209680"/>
-            <a:ext cx="4590720" cy="494640"/>
+            <a:ext cx="4589280" cy="493560"/>
           </a:xfrm>
           <a:prstGeom prst="rect">
             <a:avLst/>
@@ -16215,8 +16435,8 @@
         </p:nvSpPr>
         <p:spPr>
           <a:xfrm>
-            <a:off x="6477480" y="1714680"/>
-            <a:ext cx="980280" cy="570960"/>
+            <a:off x="6477120" y="1714680"/>
+            <a:ext cx="979200" cy="569880"/>
           </a:xfrm>
           <a:prstGeom prst="rect">
             <a:avLst/>
@@ -16267,8 +16487,8 @@
         </p:nvSpPr>
         <p:spPr>
           <a:xfrm>
-            <a:off x="7402680" y="1790640"/>
-            <a:ext cx="4524120" cy="304200"/>
+            <a:off x="7402320" y="1790640"/>
+            <a:ext cx="4522680" cy="303120"/>
           </a:xfrm>
           <a:prstGeom prst="rect">
             <a:avLst/>
@@ -16319,8 +16539,8 @@
         </p:nvSpPr>
         <p:spPr>
           <a:xfrm>
-            <a:off x="7402680" y="2209680"/>
-            <a:ext cx="4485960" cy="494640"/>
+            <a:off x="7402320" y="2209680"/>
+            <a:ext cx="4484520" cy="493560"/>
           </a:xfrm>
           <a:prstGeom prst="rect">
             <a:avLst/>
@@ -16372,7 +16592,7 @@
         <p:spPr>
           <a:xfrm>
             <a:off x="380880" y="4324320"/>
-            <a:ext cx="990000" cy="570960"/>
+            <a:ext cx="988920" cy="569880"/>
           </a:xfrm>
           <a:prstGeom prst="rect">
             <a:avLst/>
@@ -16424,7 +16644,7 @@
         <p:spPr>
           <a:xfrm>
             <a:off x="1311480" y="4400640"/>
-            <a:ext cx="4514400" cy="304200"/>
+            <a:ext cx="4512960" cy="303120"/>
           </a:xfrm>
           <a:prstGeom prst="rect">
             <a:avLst/>
@@ -16476,7 +16696,7 @@
         <p:spPr>
           <a:xfrm>
             <a:off x="1311480" y="4819680"/>
-            <a:ext cx="4476240" cy="494640"/>
+            <a:ext cx="4474800" cy="493560"/>
           </a:xfrm>
           <a:prstGeom prst="rect">
             <a:avLst/>
@@ -16527,8 +16747,8 @@
         </p:nvSpPr>
         <p:spPr>
           <a:xfrm>
-            <a:off x="6477480" y="4324320"/>
-            <a:ext cx="990000" cy="570960"/>
+            <a:off x="6477120" y="4324320"/>
+            <a:ext cx="988920" cy="569880"/>
           </a:xfrm>
           <a:prstGeom prst="rect">
             <a:avLst/>
@@ -16579,8 +16799,8 @@
         </p:nvSpPr>
         <p:spPr>
           <a:xfrm>
-            <a:off x="7407360" y="4400640"/>
-            <a:ext cx="4514400" cy="304200"/>
+            <a:off x="7407000" y="4400640"/>
+            <a:ext cx="4512960" cy="303120"/>
           </a:xfrm>
           <a:prstGeom prst="rect">
             <a:avLst/>
@@ -16631,8 +16851,8 @@
         </p:nvSpPr>
         <p:spPr>
           <a:xfrm>
-            <a:off x="7407360" y="4819680"/>
-            <a:ext cx="4476240" cy="246960"/>
+            <a:off x="7407000" y="4819680"/>
+            <a:ext cx="4474800" cy="245880"/>
           </a:xfrm>
           <a:prstGeom prst="rect">
             <a:avLst/>
@@ -16721,7 +16941,7 @@
         <p:spPr>
           <a:xfrm>
             <a:off x="380880" y="1665000"/>
-            <a:ext cx="761400" cy="18360"/>
+            <a:ext cx="760320" cy="17280"/>
           </a:xfrm>
           <a:custGeom>
             <a:avLst/>
@@ -16772,7 +16992,7 @@
         <p:spPr>
           <a:xfrm>
             <a:off x="380880" y="1989000"/>
-            <a:ext cx="9515520" cy="189720"/>
+            <a:ext cx="9513720" cy="188640"/>
           </a:xfrm>
           <a:prstGeom prst="rect">
             <a:avLst/>
@@ -16800,7 +17020,7 @@
               <a:buNone/>
             </a:pPr>
             <a:r>
-              <a:rPr b="0" lang="en-US" sz="1050" spc="310" strike="noStrike">
+              <a:rPr b="0" lang="en-US" sz="1050" spc="301" strike="noStrike">
                 <a:solidFill>
                   <a:srgbClr val="86868b"/>
                 </a:solidFill>
@@ -16824,7 +17044,7 @@
         <p:spPr>
           <a:xfrm>
             <a:off x="380880" y="2408040"/>
-            <a:ext cx="9906120" cy="1732680"/>
+            <a:ext cx="9904320" cy="1731600"/>
           </a:xfrm>
           <a:prstGeom prst="rect">
             <a:avLst/>
@@ -16897,7 +17117,7 @@
         <p:spPr>
           <a:xfrm>
             <a:off x="380880" y="4449960"/>
-            <a:ext cx="5600520" cy="742320"/>
+            <a:ext cx="5599080" cy="741240"/>
           </a:xfrm>
           <a:prstGeom prst="rect">
             <a:avLst/>
@@ -16948,8 +17168,8 @@
         </p:nvSpPr>
         <p:spPr>
           <a:xfrm>
-            <a:off x="9834480" y="2476440"/>
-            <a:ext cx="2933280" cy="1904400"/>
+            <a:off x="9833760" y="2476440"/>
+            <a:ext cx="2931840" cy="1903320"/>
           </a:xfrm>
           <a:prstGeom prst="rect">
             <a:avLst/>
@@ -17038,7 +17258,7 @@
         <p:spPr>
           <a:xfrm>
             <a:off x="380880" y="380880"/>
-            <a:ext cx="11487600" cy="151560"/>
+            <a:ext cx="11485440" cy="150480"/>
           </a:xfrm>
           <a:prstGeom prst="rect">
             <a:avLst/>
@@ -17066,7 +17286,7 @@
               <a:buNone/>
             </a:pPr>
             <a:r>
-              <a:rPr b="0" lang="en-US" sz="900" spc="265" strike="noStrike">
+              <a:rPr b="0" lang="en-US" sz="900" spc="256" strike="noStrike">
                 <a:solidFill>
                   <a:srgbClr val="86868b"/>
                 </a:solidFill>
@@ -17090,7 +17310,7 @@
         <p:spPr>
           <a:xfrm>
             <a:off x="380880" y="609480"/>
-            <a:ext cx="11601720" cy="380160"/>
+            <a:ext cx="11599560" cy="379080"/>
           </a:xfrm>
           <a:prstGeom prst="rect">
             <a:avLst/>
@@ -17118,14 +17338,26 @@
               <a:buNone/>
             </a:pPr>
             <a:r>
-              <a:rPr b="0" lang="en-US" sz="2700" spc="-1" strike="noStrike">
-                <a:solidFill>
-                  <a:srgbClr val="7a97ef"/>
-                </a:solidFill>
-                <a:latin typeface="Liter"/>
-                <a:ea typeface="Liter"/>
-              </a:rPr>
-              <a:t>The Surprising Question</a:t>
+              <a:rPr b="1" lang="en-US" sz="2700" spc="-1" strike="noStrike" u="sng">
+                <a:solidFill>
+                  <a:srgbClr val="c9211e"/>
+                </a:solidFill>
+                <a:uFillTx/>
+                <a:latin typeface="Liter"/>
+                <a:ea typeface="Liter"/>
+              </a:rPr>
+              <a:t>Th</a:t>
+            </a:r>
+            <a:r>
+              <a:rPr b="1" lang="en-US" sz="2700" spc="-1" strike="noStrike" u="sng">
+                <a:solidFill>
+                  <a:srgbClr val="000000"/>
+                </a:solidFill>
+                <a:uFillTx/>
+                <a:latin typeface="Liter"/>
+                <a:ea typeface="Liter"/>
+              </a:rPr>
+              <a:t>e Surprising Question</a:t>
             </a:r>
             <a:endParaRPr b="0" lang="en-HK" sz="2700" spc="-1" strike="noStrike">
               <a:latin typeface="Arial"/>
@@ -17142,7 +17374,7 @@
         <p:spPr>
           <a:xfrm>
             <a:off x="380880" y="1824120"/>
-            <a:ext cx="8648640" cy="742320"/>
+            <a:ext cx="8646840" cy="741240"/>
           </a:xfrm>
           <a:prstGeom prst="rect">
             <a:avLst/>
@@ -17204,7 +17436,7 @@
         <p:spPr>
           <a:xfrm>
             <a:off x="380880" y="3338640"/>
-            <a:ext cx="5486040" cy="18360"/>
+            <a:ext cx="5484600" cy="17280"/>
           </a:xfrm>
           <a:custGeom>
             <a:avLst/>
@@ -17255,7 +17487,7 @@
         <p:spPr>
           <a:xfrm>
             <a:off x="380880" y="3576600"/>
-            <a:ext cx="5552640" cy="189720"/>
+            <a:ext cx="5551200" cy="188640"/>
           </a:xfrm>
           <a:prstGeom prst="rect">
             <a:avLst/>
@@ -17283,7 +17515,7 @@
               <a:buNone/>
             </a:pPr>
             <a:r>
-              <a:rPr b="0" lang="en-US" sz="1050" spc="205" strike="noStrike">
+              <a:rPr b="0" lang="en-US" sz="1050" spc="197" strike="noStrike">
                 <a:solidFill>
                   <a:srgbClr val="86868b"/>
                 </a:solidFill>
@@ -17307,7 +17539,7 @@
         <p:spPr>
           <a:xfrm>
             <a:off x="380880" y="3919680"/>
-            <a:ext cx="1837440" cy="685080"/>
+            <a:ext cx="1836360" cy="684000"/>
           </a:xfrm>
           <a:prstGeom prst="rect">
             <a:avLst/>
@@ -17359,7 +17591,7 @@
         <p:spPr>
           <a:xfrm>
             <a:off x="1991160" y="4286160"/>
-            <a:ext cx="666000" cy="266040"/>
+            <a:ext cx="664920" cy="264960"/>
           </a:xfrm>
           <a:prstGeom prst="rect">
             <a:avLst/>
@@ -17411,7 +17643,7 @@
         <p:spPr>
           <a:xfrm>
             <a:off x="380880" y="4757760"/>
-            <a:ext cx="5562360" cy="246960"/>
+            <a:ext cx="5560920" cy="245880"/>
           </a:xfrm>
           <a:prstGeom prst="rect">
             <a:avLst/>
@@ -17462,8 +17694,8 @@
         </p:nvSpPr>
         <p:spPr>
           <a:xfrm>
-            <a:off x="6324840" y="3338640"/>
-            <a:ext cx="5486040" cy="18360"/>
+            <a:off x="6324480" y="3338640"/>
+            <a:ext cx="5484600" cy="17280"/>
           </a:xfrm>
           <a:custGeom>
             <a:avLst/>
@@ -17513,8 +17745,8 @@
         </p:nvSpPr>
         <p:spPr>
           <a:xfrm>
-            <a:off x="6324840" y="3576600"/>
-            <a:ext cx="5552640" cy="189720"/>
+            <a:off x="6324480" y="3576600"/>
+            <a:ext cx="5551200" cy="188640"/>
           </a:xfrm>
           <a:prstGeom prst="rect">
             <a:avLst/>
@@ -17542,7 +17774,7 @@
               <a:buNone/>
             </a:pPr>
             <a:r>
-              <a:rPr b="0" lang="en-US" sz="1050" spc="205" strike="noStrike">
+              <a:rPr b="0" lang="en-US" sz="1050" spc="197" strike="noStrike">
                 <a:solidFill>
                   <a:srgbClr val="0071e3"/>
                 </a:solidFill>
@@ -17565,8 +17797,8 @@
         </p:nvSpPr>
         <p:spPr>
           <a:xfrm>
-            <a:off x="6324840" y="3919680"/>
-            <a:ext cx="1142280" cy="685080"/>
+            <a:off x="6324480" y="3919680"/>
+            <a:ext cx="1141200" cy="684000"/>
           </a:xfrm>
           <a:prstGeom prst="rect">
             <a:avLst/>
@@ -17617,8 +17849,8 @@
         </p:nvSpPr>
         <p:spPr>
           <a:xfrm>
-            <a:off x="7242480" y="4286160"/>
-            <a:ext cx="666000" cy="266040"/>
+            <a:off x="7242120" y="4286160"/>
+            <a:ext cx="664920" cy="264960"/>
           </a:xfrm>
           <a:prstGeom prst="rect">
             <a:avLst/>
@@ -17669,8 +17901,8 @@
         </p:nvSpPr>
         <p:spPr>
           <a:xfrm>
-            <a:off x="6324840" y="4757760"/>
-            <a:ext cx="5562360" cy="494640"/>
+            <a:off x="6324480" y="4757760"/>
+            <a:ext cx="5560920" cy="493560"/>
           </a:xfrm>
           <a:prstGeom prst="rect">
             <a:avLst/>
@@ -17742,7 +17974,7 @@
         <p:spPr>
           <a:xfrm>
             <a:off x="380880" y="6014880"/>
-            <a:ext cx="11430360" cy="8640"/>
+            <a:ext cx="11428200" cy="7560"/>
           </a:xfrm>
           <a:custGeom>
             <a:avLst/>
@@ -17793,7 +18025,7 @@
         <p:spPr>
           <a:xfrm>
             <a:off x="419040" y="6286680"/>
-            <a:ext cx="113760" cy="151560"/>
+            <a:ext cx="112680" cy="150480"/>
           </a:xfrm>
           <a:custGeom>
             <a:avLst/>
@@ -17925,7 +18157,7 @@
         <p:spPr>
           <a:xfrm>
             <a:off x="628560" y="6248520"/>
-            <a:ext cx="11259000" cy="227880"/>
+            <a:ext cx="11256840" cy="226800"/>
           </a:xfrm>
           <a:prstGeom prst="rect">
             <a:avLst/>
@@ -18024,7 +18256,7 @@
         <p:spPr>
           <a:xfrm>
             <a:off x="380880" y="380880"/>
-            <a:ext cx="11487600" cy="151560"/>
+            <a:ext cx="11485440" cy="150480"/>
           </a:xfrm>
           <a:prstGeom prst="rect">
             <a:avLst/>
@@ -18052,7 +18284,7 @@
               <a:buNone/>
             </a:pPr>
             <a:r>
-              <a:rPr b="0" lang="en-US" sz="900" spc="265" strike="noStrike">
+              <a:rPr b="0" lang="en-US" sz="900" spc="256" strike="noStrike">
                 <a:solidFill>
                   <a:srgbClr val="86868b"/>
                 </a:solidFill>
@@ -18076,7 +18308,7 @@
         <p:spPr>
           <a:xfrm>
             <a:off x="380880" y="609480"/>
-            <a:ext cx="11601720" cy="380160"/>
+            <a:ext cx="11599560" cy="379080"/>
           </a:xfrm>
           <a:prstGeom prst="rect">
             <a:avLst/>
@@ -18111,7 +18343,27 @@
                 <a:latin typeface="Liter"/>
                 <a:ea typeface="Liter"/>
               </a:rPr>
-              <a:t>Key Probability Milestones</a:t>
+              <a:t>Key </a:t>
+            </a:r>
+            <a:r>
+              <a:rPr b="0" i="1" lang="en-US" sz="2700" spc="-1" strike="noStrike">
+                <a:solidFill>
+                  <a:srgbClr val="2a6099"/>
+                </a:solidFill>
+                <a:latin typeface="Liter"/>
+                <a:ea typeface="Liter"/>
+              </a:rPr>
+              <a:t>Probability</a:t>
+            </a:r>
+            <a:r>
+              <a:rPr b="0" lang="en-US" sz="2700" spc="-1" strike="noStrike">
+                <a:solidFill>
+                  <a:srgbClr val="1d1d1d"/>
+                </a:solidFill>
+                <a:latin typeface="Liter"/>
+                <a:ea typeface="Liter"/>
+              </a:rPr>
+              <a:t> Milestones</a:t>
             </a:r>
             <a:endParaRPr b="0" lang="en-HK" sz="2700" spc="-1" strike="noStrike">
               <a:latin typeface="Arial"/>
@@ -18128,7 +18380,7 @@
         <p:spPr>
           <a:xfrm>
             <a:off x="380880" y="1219320"/>
-            <a:ext cx="6114960" cy="5257080"/>
+            <a:ext cx="6113160" cy="5256000"/>
           </a:xfrm>
           <a:prstGeom prst="roundRect">
             <a:avLst>
@@ -18159,8 +18411,8 @@
         </p:nvSpPr>
         <p:spPr>
           <a:xfrm>
-            <a:off x="6814440" y="1504800"/>
-            <a:ext cx="18360" cy="990000"/>
+            <a:off x="6814080" y="1504800"/>
+            <a:ext cx="17280" cy="988920"/>
           </a:xfrm>
           <a:custGeom>
             <a:avLst/>
@@ -18210,8 +18462,8 @@
         </p:nvSpPr>
         <p:spPr>
           <a:xfrm>
-            <a:off x="7014600" y="1504800"/>
-            <a:ext cx="570960" cy="380160"/>
+            <a:off x="7014240" y="1504800"/>
+            <a:ext cx="569880" cy="379080"/>
           </a:xfrm>
           <a:prstGeom prst="rect">
             <a:avLst/>
@@ -18262,8 +18514,8 @@
         </p:nvSpPr>
         <p:spPr>
           <a:xfrm>
-            <a:off x="7530480" y="1614600"/>
-            <a:ext cx="599400" cy="266040"/>
+            <a:off x="7530120" y="1614600"/>
+            <a:ext cx="598320" cy="264960"/>
           </a:xfrm>
           <a:prstGeom prst="rect">
             <a:avLst/>
@@ -18291,19 +18543,16 @@
               <a:buNone/>
             </a:pPr>
             <a:r>
-              <a:rPr b="0" i="1" lang="en-US" sz="1350" spc="-1" strike="noStrike">
-                <a:solidFill>
-                  <a:srgbClr val="2a6099"/>
+              <a:rPr b="0" lang="en-US" sz="1350" spc="-1" strike="noStrike">
+                <a:solidFill>
+                  <a:srgbClr val="1d1d1d"/>
                 </a:solidFill>
                 <a:latin typeface="Liter"/>
                 <a:ea typeface="Liter"/>
               </a:rPr>
               <a:t>people</a:t>
             </a:r>
-            <a:endParaRPr b="0" i="1" lang="en-HK" sz="1350" spc="-1" strike="noStrike">
-              <a:solidFill>
-                <a:srgbClr val="2a6099"/>
-              </a:solidFill>
+            <a:endParaRPr b="0" lang="en-HK" sz="1350" spc="-1" strike="noStrike">
               <a:latin typeface="Arial"/>
             </a:endParaRPr>
           </a:p>
@@ -18317,8 +18566,8 @@
         </p:nvSpPr>
         <p:spPr>
           <a:xfrm>
-            <a:off x="7014600" y="1924200"/>
-            <a:ext cx="4943160" cy="342360"/>
+            <a:off x="7014240" y="1924200"/>
+            <a:ext cx="4941720" cy="341280"/>
           </a:xfrm>
           <a:prstGeom prst="rect">
             <a:avLst/>
@@ -18369,8 +18618,8 @@
         </p:nvSpPr>
         <p:spPr>
           <a:xfrm>
-            <a:off x="7014600" y="2305080"/>
-            <a:ext cx="4866840" cy="189720"/>
+            <a:off x="7014240" y="2305080"/>
+            <a:ext cx="4865400" cy="188640"/>
           </a:xfrm>
           <a:prstGeom prst="rect">
             <a:avLst/>
@@ -18421,8 +18670,8 @@
         </p:nvSpPr>
         <p:spPr>
           <a:xfrm>
-            <a:off x="6814440" y="2647800"/>
-            <a:ext cx="18360" cy="723240"/>
+            <a:off x="6814080" y="2647800"/>
+            <a:ext cx="17280" cy="722160"/>
           </a:xfrm>
           <a:custGeom>
             <a:avLst/>
@@ -18472,8 +18721,8 @@
         </p:nvSpPr>
         <p:spPr>
           <a:xfrm>
-            <a:off x="7014600" y="2647800"/>
-            <a:ext cx="494640" cy="342360"/>
+            <a:off x="7014240" y="2647800"/>
+            <a:ext cx="493560" cy="341280"/>
           </a:xfrm>
           <a:prstGeom prst="rect">
             <a:avLst/>
@@ -18524,8 +18773,8 @@
         </p:nvSpPr>
         <p:spPr>
           <a:xfrm>
-            <a:off x="7479720" y="2747880"/>
-            <a:ext cx="532800" cy="227880"/>
+            <a:off x="7479360" y="2747880"/>
+            <a:ext cx="531720" cy="226800"/>
           </a:xfrm>
           <a:prstGeom prst="rect">
             <a:avLst/>
@@ -18576,8 +18825,8 @@
         </p:nvSpPr>
         <p:spPr>
           <a:xfrm>
-            <a:off x="7014600" y="3029040"/>
-            <a:ext cx="4914720" cy="304200"/>
+            <a:off x="7014240" y="3029040"/>
+            <a:ext cx="4913280" cy="303120"/>
           </a:xfrm>
           <a:prstGeom prst="rect">
             <a:avLst/>
@@ -18628,8 +18877,8 @@
         </p:nvSpPr>
         <p:spPr>
           <a:xfrm>
-            <a:off x="6814440" y="3524400"/>
-            <a:ext cx="18360" cy="723240"/>
+            <a:off x="6814080" y="3524400"/>
+            <a:ext cx="17280" cy="722160"/>
           </a:xfrm>
           <a:custGeom>
             <a:avLst/>
@@ -18679,8 +18928,8 @@
         </p:nvSpPr>
         <p:spPr>
           <a:xfrm>
-            <a:off x="7014600" y="3524400"/>
-            <a:ext cx="484920" cy="342360"/>
+            <a:off x="7014240" y="3524400"/>
+            <a:ext cx="483840" cy="341280"/>
           </a:xfrm>
           <a:prstGeom prst="rect">
             <a:avLst/>
@@ -18731,8 +18980,8 @@
         </p:nvSpPr>
         <p:spPr>
           <a:xfrm>
-            <a:off x="7475760" y="3624120"/>
-            <a:ext cx="532800" cy="227880"/>
+            <a:off x="7475400" y="3624120"/>
+            <a:ext cx="531720" cy="226800"/>
           </a:xfrm>
           <a:prstGeom prst="rect">
             <a:avLst/>
@@ -18783,8 +19032,8 @@
         </p:nvSpPr>
         <p:spPr>
           <a:xfrm>
-            <a:off x="7014600" y="3905280"/>
-            <a:ext cx="4914720" cy="304200"/>
+            <a:off x="7014240" y="3905280"/>
+            <a:ext cx="4913280" cy="303120"/>
           </a:xfrm>
           <a:prstGeom prst="rect">
             <a:avLst/>
@@ -18835,8 +19084,8 @@
         </p:nvSpPr>
         <p:spPr>
           <a:xfrm>
-            <a:off x="6814440" y="4400640"/>
-            <a:ext cx="18360" cy="723240"/>
+            <a:off x="6814080" y="4400640"/>
+            <a:ext cx="17280" cy="722160"/>
           </a:xfrm>
           <a:custGeom>
             <a:avLst/>
@@ -18886,8 +19135,8 @@
         </p:nvSpPr>
         <p:spPr>
           <a:xfrm>
-            <a:off x="7014600" y="4400640"/>
-            <a:ext cx="494640" cy="342360"/>
+            <a:off x="7014240" y="4400640"/>
+            <a:ext cx="493560" cy="341280"/>
           </a:xfrm>
           <a:prstGeom prst="rect">
             <a:avLst/>
@@ -18938,8 +19187,8 @@
         </p:nvSpPr>
         <p:spPr>
           <a:xfrm>
-            <a:off x="7482240" y="4500720"/>
-            <a:ext cx="532800" cy="227880"/>
+            <a:off x="7481880" y="4500720"/>
+            <a:ext cx="531720" cy="226800"/>
           </a:xfrm>
           <a:prstGeom prst="rect">
             <a:avLst/>
@@ -18990,8 +19239,8 @@
         </p:nvSpPr>
         <p:spPr>
           <a:xfrm>
-            <a:off x="7014600" y="4781520"/>
-            <a:ext cx="4914720" cy="304200"/>
+            <a:off x="7014240" y="4781520"/>
+            <a:ext cx="4913280" cy="303120"/>
           </a:xfrm>
           <a:prstGeom prst="rect">
             <a:avLst/>
@@ -19042,8 +19291,8 @@
         </p:nvSpPr>
         <p:spPr>
           <a:xfrm>
-            <a:off x="6814440" y="5276880"/>
-            <a:ext cx="18360" cy="913680"/>
+            <a:off x="6814080" y="5276880"/>
+            <a:ext cx="17280" cy="912600"/>
           </a:xfrm>
           <a:custGeom>
             <a:avLst/>
@@ -19093,8 +19342,8 @@
         </p:nvSpPr>
         <p:spPr>
           <a:xfrm>
-            <a:off x="7014600" y="5276880"/>
-            <a:ext cx="456480" cy="342360"/>
+            <a:off x="7014240" y="5276880"/>
+            <a:ext cx="455400" cy="341280"/>
           </a:xfrm>
           <a:prstGeom prst="rect">
             <a:avLst/>
@@ -19145,8 +19394,8 @@
         </p:nvSpPr>
         <p:spPr>
           <a:xfrm>
-            <a:off x="7439760" y="5376960"/>
-            <a:ext cx="532800" cy="227880"/>
+            <a:off x="7439400" y="5376960"/>
+            <a:ext cx="531720" cy="226800"/>
           </a:xfrm>
           <a:prstGeom prst="rect">
             <a:avLst/>
@@ -19197,8 +19446,8 @@
         </p:nvSpPr>
         <p:spPr>
           <a:xfrm>
-            <a:off x="7014600" y="5657760"/>
-            <a:ext cx="4914720" cy="304200"/>
+            <a:off x="7014240" y="5657760"/>
+            <a:ext cx="4913280" cy="303120"/>
           </a:xfrm>
           <a:prstGeom prst="rect">
             <a:avLst/>
@@ -19249,8 +19498,8 @@
         </p:nvSpPr>
         <p:spPr>
           <a:xfrm>
-            <a:off x="7014600" y="6000840"/>
-            <a:ext cx="4866840" cy="189720"/>
+            <a:off x="7014240" y="6000840"/>
+            <a:ext cx="4865400" cy="188640"/>
           </a:xfrm>
           <a:prstGeom prst="rect">
             <a:avLst/>
@@ -19349,7 +19598,7 @@
     <p:bg>
       <p:bgPr>
         <a:solidFill>
-          <a:srgbClr val="999999"/>
+          <a:srgbClr val="fafafa"/>
         </a:solidFill>
       </p:bgPr>
     </p:bg>
@@ -19376,7 +19625,7 @@
         <p:spPr>
           <a:xfrm>
             <a:off x="380880" y="1850760"/>
-            <a:ext cx="761400" cy="18360"/>
+            <a:ext cx="760320" cy="17280"/>
           </a:xfrm>
           <a:custGeom>
             <a:avLst/>
@@ -19427,7 +19676,7 @@
         <p:spPr>
           <a:xfrm>
             <a:off x="380880" y="2174760"/>
-            <a:ext cx="9172440" cy="189720"/>
+            <a:ext cx="9170640" cy="188640"/>
           </a:xfrm>
           <a:prstGeom prst="rect">
             <a:avLst/>
@@ -19455,7 +19704,7 @@
               <a:buNone/>
             </a:pPr>
             <a:r>
-              <a:rPr b="0" lang="en-US" sz="1050" spc="310" strike="noStrike">
+              <a:rPr b="0" lang="en-US" sz="1050" spc="301" strike="noStrike">
                 <a:solidFill>
                   <a:srgbClr val="86868b"/>
                 </a:solidFill>
@@ -19479,7 +19728,7 @@
         <p:spPr>
           <a:xfrm>
             <a:off x="380880" y="2593800"/>
-            <a:ext cx="9563040" cy="1732680"/>
+            <a:ext cx="9561240" cy="1731600"/>
           </a:xfrm>
           <a:prstGeom prst="rect">
             <a:avLst/>
@@ -19552,7 +19801,7 @@
         <p:spPr>
           <a:xfrm>
             <a:off x="380880" y="4635720"/>
-            <a:ext cx="5600520" cy="370800"/>
+            <a:ext cx="5599080" cy="369720"/>
           </a:xfrm>
           <a:prstGeom prst="rect">
             <a:avLst/>
@@ -19603,8 +19852,8 @@
         </p:nvSpPr>
         <p:spPr>
           <a:xfrm>
-            <a:off x="9489600" y="2476440"/>
-            <a:ext cx="3276360" cy="1904400"/>
+            <a:off x="9488880" y="2476440"/>
+            <a:ext cx="3274920" cy="1903320"/>
           </a:xfrm>
           <a:prstGeom prst="rect">
             <a:avLst/>
@@ -19693,7 +19942,7 @@
         <p:spPr>
           <a:xfrm>
             <a:off x="380880" y="380880"/>
-            <a:ext cx="11487600" cy="151560"/>
+            <a:ext cx="11485440" cy="150480"/>
           </a:xfrm>
           <a:prstGeom prst="rect">
             <a:avLst/>
@@ -19721,19 +19970,16 @@
               <a:buNone/>
             </a:pPr>
             <a:r>
-              <a:rPr b="1" lang="en-US" sz="3600" spc="265" strike="noStrike">
-                <a:solidFill>
-                  <a:srgbClr val="f10d0c"/>
+              <a:rPr b="0" lang="en-US" sz="900" spc="256" strike="noStrike">
+                <a:solidFill>
+                  <a:srgbClr val="86868b"/>
                 </a:solidFill>
                 <a:latin typeface="Liter"/>
                 <a:ea typeface="Liter"/>
               </a:rPr>
               <a:t>Mathematical Strategy</a:t>
             </a:r>
-            <a:endParaRPr b="1" lang="en-HK" sz="3600" spc="-1" strike="noStrike">
-              <a:solidFill>
-                <a:srgbClr val="f10d0c"/>
-              </a:solidFill>
+            <a:endParaRPr b="0" lang="en-HK" sz="900" spc="-1" strike="noStrike">
               <a:latin typeface="Arial"/>
             </a:endParaRPr>
           </a:p>
@@ -19748,7 +19994,7 @@
         <p:spPr>
           <a:xfrm>
             <a:off x="380880" y="609480"/>
-            <a:ext cx="11601720" cy="380160"/>
+            <a:ext cx="11599560" cy="379080"/>
           </a:xfrm>
           <a:prstGeom prst="rect">
             <a:avLst/>
@@ -19800,7 +20046,7 @@
         <p:spPr>
           <a:xfrm>
             <a:off x="380880" y="1952640"/>
-            <a:ext cx="8629560" cy="618480"/>
+            <a:ext cx="8627760" cy="617400"/>
           </a:xfrm>
           <a:prstGeom prst="rect">
             <a:avLst/>
@@ -19892,7 +20138,7 @@
         <p:spPr>
           <a:xfrm>
             <a:off x="385920" y="2805120"/>
-            <a:ext cx="4028760" cy="808920"/>
+            <a:ext cx="4027320" cy="807840"/>
           </a:xfrm>
           <a:custGeom>
             <a:avLst/>
@@ -19944,7 +20190,7 @@
         <p:spPr>
           <a:xfrm>
             <a:off x="695160" y="3038400"/>
-            <a:ext cx="3552480" cy="342360"/>
+            <a:ext cx="3551040" cy="341280"/>
           </a:xfrm>
           <a:prstGeom prst="rect">
             <a:avLst/>
@@ -19996,7 +20242,7 @@
         <p:spPr>
           <a:xfrm>
             <a:off x="380880" y="4000680"/>
-            <a:ext cx="5590800" cy="189720"/>
+            <a:ext cx="5589360" cy="188640"/>
           </a:xfrm>
           <a:prstGeom prst="rect">
             <a:avLst/>
@@ -20024,7 +20270,7 @@
               <a:buNone/>
             </a:pPr>
             <a:r>
-              <a:rPr b="0" lang="en-US" sz="1050" spc="205" strike="noStrike">
+              <a:rPr b="0" lang="en-US" sz="1050" spc="197" strike="noStrike">
                 <a:solidFill>
                   <a:srgbClr val="86868b"/>
                 </a:solidFill>
@@ -20048,7 +20294,7 @@
         <p:spPr>
           <a:xfrm>
             <a:off x="380880" y="4343400"/>
-            <a:ext cx="5600520" cy="494640"/>
+            <a:ext cx="5599080" cy="493560"/>
           </a:xfrm>
           <a:prstGeom prst="rect">
             <a:avLst/>
@@ -20100,7 +20346,7 @@
         <p:spPr>
           <a:xfrm>
             <a:off x="380880" y="4991040"/>
-            <a:ext cx="5600520" cy="246960"/>
+            <a:ext cx="5599080" cy="245880"/>
           </a:xfrm>
           <a:prstGeom prst="rect">
             <a:avLst/>
@@ -20151,8 +20397,8 @@
         </p:nvSpPr>
         <p:spPr>
           <a:xfrm>
-            <a:off x="6287040" y="4000680"/>
-            <a:ext cx="5590800" cy="189720"/>
+            <a:off x="6286680" y="4000680"/>
+            <a:ext cx="5589360" cy="188640"/>
           </a:xfrm>
           <a:prstGeom prst="rect">
             <a:avLst/>
@@ -20180,7 +20426,7 @@
               <a:buNone/>
             </a:pPr>
             <a:r>
-              <a:rPr b="0" lang="en-US" sz="1050" spc="205" strike="noStrike">
+              <a:rPr b="0" lang="en-US" sz="1050" spc="197" strike="noStrike">
                 <a:solidFill>
                   <a:srgbClr val="86868b"/>
                 </a:solidFill>
@@ -20203,8 +20449,8 @@
         </p:nvSpPr>
         <p:spPr>
           <a:xfrm>
-            <a:off x="6287040" y="4343400"/>
-            <a:ext cx="5600520" cy="494640"/>
+            <a:off x="6286680" y="4343400"/>
+            <a:ext cx="5599080" cy="493560"/>
           </a:xfrm>
           <a:prstGeom prst="rect">
             <a:avLst/>
@@ -20255,8 +20501,8 @@
         </p:nvSpPr>
         <p:spPr>
           <a:xfrm>
-            <a:off x="6287040" y="4991040"/>
-            <a:ext cx="5600520" cy="246960"/>
+            <a:off x="6286680" y="4991040"/>
+            <a:ext cx="5599080" cy="245880"/>
           </a:xfrm>
           <a:prstGeom prst="rect">
             <a:avLst/>
@@ -20308,7 +20554,7 @@
         <p:spPr>
           <a:xfrm>
             <a:off x="380880" y="6129360"/>
-            <a:ext cx="11430360" cy="8640"/>
+            <a:ext cx="11428200" cy="7560"/>
           </a:xfrm>
           <a:custGeom>
             <a:avLst/>
@@ -20359,7 +20605,7 @@
         <p:spPr>
           <a:xfrm>
             <a:off x="399960" y="6315120"/>
-            <a:ext cx="132480" cy="132480"/>
+            <a:ext cx="131400" cy="131400"/>
           </a:xfrm>
           <a:custGeom>
             <a:avLst/>
@@ -20502,7 +20748,7 @@
         <p:spPr>
           <a:xfrm>
             <a:off x="609480" y="6286680"/>
-            <a:ext cx="11268360" cy="189720"/>
+            <a:ext cx="11266200" cy="188640"/>
           </a:xfrm>
           <a:prstGeom prst="rect">
             <a:avLst/>
@@ -20601,7 +20847,7 @@
         <p:spPr>
           <a:xfrm>
             <a:off x="380880" y="380880"/>
-            <a:ext cx="11487600" cy="151560"/>
+            <a:ext cx="11485440" cy="150480"/>
           </a:xfrm>
           <a:prstGeom prst="rect">
             <a:avLst/>
@@ -20629,7 +20875,7 @@
               <a:buNone/>
             </a:pPr>
             <a:r>
-              <a:rPr b="0" lang="en-US" sz="900" spc="265" strike="noStrike">
+              <a:rPr b="0" lang="en-US" sz="900" spc="256" strike="noStrike">
                 <a:solidFill>
                   <a:srgbClr val="86868b"/>
                 </a:solidFill>
@@ -20653,7 +20899,7 @@
         <p:spPr>
           <a:xfrm>
             <a:off x="380880" y="609480"/>
-            <a:ext cx="11601720" cy="380160"/>
+            <a:ext cx="11599560" cy="379080"/>
           </a:xfrm>
           <a:prstGeom prst="rect">
             <a:avLst/>
@@ -20705,7 +20951,7 @@
         <p:spPr>
           <a:xfrm>
             <a:off x="385920" y="1576440"/>
-            <a:ext cx="447120" cy="447120"/>
+            <a:ext cx="446040" cy="446040"/>
           </a:xfrm>
           <a:custGeom>
             <a:avLst/>
@@ -20757,7 +21003,7 @@
         <p:spPr>
           <a:xfrm>
             <a:off x="333360" y="1571760"/>
-            <a:ext cx="532800" cy="437400"/>
+            <a:ext cx="531720" cy="436320"/>
           </a:xfrm>
           <a:prstGeom prst="rect">
             <a:avLst/>
@@ -20809,7 +21055,7 @@
         <p:spPr>
           <a:xfrm>
             <a:off x="1066680" y="1533600"/>
-            <a:ext cx="10830240" cy="266040"/>
+            <a:ext cx="10828080" cy="264960"/>
           </a:xfrm>
           <a:prstGeom prst="rect">
             <a:avLst/>
@@ -20861,7 +21107,7 @@
         <p:spPr>
           <a:xfrm>
             <a:off x="1066680" y="1838160"/>
-            <a:ext cx="10820880" cy="227880"/>
+            <a:ext cx="10818720" cy="226800"/>
           </a:xfrm>
           <a:prstGeom prst="rect">
             <a:avLst/>
@@ -20923,7 +21169,7 @@
         <p:spPr>
           <a:xfrm>
             <a:off x="385920" y="2262240"/>
-            <a:ext cx="447120" cy="447120"/>
+            <a:ext cx="446040" cy="446040"/>
           </a:xfrm>
           <a:custGeom>
             <a:avLst/>
@@ -20975,7 +21221,7 @@
         <p:spPr>
           <a:xfrm>
             <a:off x="333360" y="2257560"/>
-            <a:ext cx="532800" cy="437400"/>
+            <a:ext cx="531720" cy="436320"/>
           </a:xfrm>
           <a:prstGeom prst="rect">
             <a:avLst/>
@@ -21027,7 +21273,7 @@
         <p:spPr>
           <a:xfrm>
             <a:off x="1066680" y="2219400"/>
-            <a:ext cx="10830240" cy="266040"/>
+            <a:ext cx="10828080" cy="264960"/>
           </a:xfrm>
           <a:prstGeom prst="rect">
             <a:avLst/>
@@ -21079,7 +21325,7 @@
         <p:spPr>
           <a:xfrm>
             <a:off x="1066680" y="2523960"/>
-            <a:ext cx="10820880" cy="227880"/>
+            <a:ext cx="10818720" cy="226800"/>
           </a:xfrm>
           <a:prstGeom prst="rect">
             <a:avLst/>
@@ -21141,7 +21387,7 @@
         <p:spPr>
           <a:xfrm>
             <a:off x="385920" y="2948040"/>
-            <a:ext cx="447120" cy="447120"/>
+            <a:ext cx="446040" cy="446040"/>
           </a:xfrm>
           <a:custGeom>
             <a:avLst/>
@@ -21193,7 +21439,7 @@
         <p:spPr>
           <a:xfrm>
             <a:off x="333360" y="2943360"/>
-            <a:ext cx="532800" cy="437400"/>
+            <a:ext cx="531720" cy="436320"/>
           </a:xfrm>
           <a:prstGeom prst="rect">
             <a:avLst/>
@@ -21245,7 +21491,7 @@
         <p:spPr>
           <a:xfrm>
             <a:off x="1066680" y="2905200"/>
-            <a:ext cx="10830240" cy="266040"/>
+            <a:ext cx="10828080" cy="264960"/>
           </a:xfrm>
           <a:prstGeom prst="rect">
             <a:avLst/>
@@ -21297,7 +21543,7 @@
         <p:spPr>
           <a:xfrm>
             <a:off x="1066680" y="3209760"/>
-            <a:ext cx="10820880" cy="227880"/>
+            <a:ext cx="10818720" cy="226800"/>
           </a:xfrm>
           <a:prstGeom prst="rect">
             <a:avLst/>
@@ -21359,7 +21605,7 @@
         <p:spPr>
           <a:xfrm>
             <a:off x="385920" y="3595680"/>
-            <a:ext cx="447120" cy="447120"/>
+            <a:ext cx="446040" cy="446040"/>
           </a:xfrm>
           <a:custGeom>
             <a:avLst/>
@@ -21411,7 +21657,7 @@
         <p:spPr>
           <a:xfrm>
             <a:off x="333360" y="3591000"/>
-            <a:ext cx="532800" cy="437400"/>
+            <a:ext cx="531720" cy="436320"/>
           </a:xfrm>
           <a:prstGeom prst="rect">
             <a:avLst/>
@@ -21463,7 +21709,7 @@
         <p:spPr>
           <a:xfrm>
             <a:off x="1066680" y="3686040"/>
-            <a:ext cx="10830240" cy="266040"/>
+            <a:ext cx="10828080" cy="264960"/>
           </a:xfrm>
           <a:prstGeom prst="rect">
             <a:avLst/>
@@ -21515,7 +21761,7 @@
         <p:spPr>
           <a:xfrm>
             <a:off x="385920" y="4243320"/>
-            <a:ext cx="447120" cy="447120"/>
+            <a:ext cx="446040" cy="446040"/>
           </a:xfrm>
           <a:custGeom>
             <a:avLst/>
@@ -21567,7 +21813,7 @@
         <p:spPr>
           <a:xfrm>
             <a:off x="333360" y="4238640"/>
-            <a:ext cx="532800" cy="437400"/>
+            <a:ext cx="531720" cy="436320"/>
           </a:xfrm>
           <a:prstGeom prst="rect">
             <a:avLst/>
@@ -21619,7 +21865,7 @@
         <p:spPr>
           <a:xfrm>
             <a:off x="1066680" y="4200480"/>
-            <a:ext cx="10830240" cy="266040"/>
+            <a:ext cx="10828080" cy="264960"/>
           </a:xfrm>
           <a:prstGeom prst="rect">
             <a:avLst/>
@@ -21671,7 +21917,7 @@
         <p:spPr>
           <a:xfrm>
             <a:off x="1066680" y="4505400"/>
-            <a:ext cx="10820880" cy="227880"/>
+            <a:ext cx="10818720" cy="226800"/>
           </a:xfrm>
           <a:prstGeom prst="rect">
             <a:avLst/>
@@ -21733,7 +21979,7 @@
         <p:spPr>
           <a:xfrm>
             <a:off x="380880" y="4971960"/>
-            <a:ext cx="11430360" cy="18360"/>
+            <a:ext cx="11428200" cy="17280"/>
           </a:xfrm>
           <a:custGeom>
             <a:avLst/>
@@ -21784,7 +22030,7 @@
         <p:spPr>
           <a:xfrm>
             <a:off x="380880" y="5210280"/>
-            <a:ext cx="11496960" cy="189720"/>
+            <a:ext cx="11494800" cy="188640"/>
           </a:xfrm>
           <a:prstGeom prst="rect">
             <a:avLst/>
@@ -21812,7 +22058,7 @@
               <a:buNone/>
             </a:pPr>
             <a:r>
-              <a:rPr b="0" lang="en-US" sz="1050" spc="205" strike="noStrike">
+              <a:rPr b="0" lang="en-US" sz="1050" spc="197" strike="noStrike">
                 <a:solidFill>
                   <a:srgbClr val="86868b"/>
                 </a:solidFill>
@@ -21836,7 +22082,7 @@
         <p:spPr>
           <a:xfrm>
             <a:off x="380880" y="5514840"/>
-            <a:ext cx="11525760" cy="266040"/>
+            <a:ext cx="11523600" cy="264960"/>
           </a:xfrm>
           <a:prstGeom prst="rect">
             <a:avLst/>
@@ -21888,7 +22134,7 @@
         <p:spPr>
           <a:xfrm>
             <a:off x="380880" y="5896080"/>
-            <a:ext cx="11516040" cy="266040"/>
+            <a:ext cx="11513880" cy="264960"/>
           </a:xfrm>
           <a:prstGeom prst="rect">
             <a:avLst/>
